--- a/decks/when-your-mind-goes-blank-lesson-v2.pptx
+++ b/decks/when-your-mind-goes-blank-lesson-v2.pptx
@@ -584,7 +584,7 @@
           <a:lstStyle/>
           <a:p>
             <a:r>
-              <a:t>4 MINUTES. Collect anonymously, or let students keep it as a reminder. Before they go, name when to ask for more help: anxiety hurting scores even when they know the material; feeling sick, panicky or unable to sleep before most tests; avoiding school on test days; worry about school spreading into the rest of life. A counselor can help, anxiety responds well to treatment, and some students qualify for accommodations like extended time through a 504 plan. Share the BVR Diner link on the slide (post it on your class page too). It has the test-day plan, the breathing circle, the worry write, a private check-in and who to talk to.</a:t>
+              <a:t>4 MINUTES. Collect anonymously, or let students keep it as a reminder. Before they go, name when to ask for more help: anxiety hurting scores even when they know the material; feeling sick, panicky or unable to sleep before most tests; avoiding school on test days; worry about school spreading into the rest of life. A counselor can help, anxiety responds well to treatment, and some students qualify for accommodations like extended time through a learning plan. Share the BVR Diner link on the slide (post it on your class page too). It has the test-day plan, the breathing circle, the worry write, a private check-in and who to talk to.</a:t>
             </a:r>
           </a:p>
         </p:txBody>
@@ -6839,7 +6839,7 @@
                 </a:solidFill>
                 <a:latin typeface="Source Serif 4"/>
               </a:rPr>
-              <a:t>Students who feel sick before most tests, avoid school on test days, or score low even when they know the material should talk to a counselor. Some qualify for extended time or a separate room through a 504 plan, and the College Board and ACT review requests through the school.</a:t>
+              <a:t>Students who feel sick before most tests, avoid school on test days, or score low even when they know the material should talk to a counselor. Some qualify for extended time or a separate room through a learning plan, and the College Board and ACT review requests through the school.</a:t>
             </a:r>
           </a:p>
           <a:p>
@@ -7193,7 +7193,7 @@
                 </a:solidFill>
                 <a:latin typeface="Source Serif 4"/>
               </a:rPr>
-              <a:t>Students with ADHD, anxiety disorders, learning differences or slower processing may already have accommodations or need them. Mention 504 plans as a normal, available support. The worry write can be typed, spoken or drawn as a list.</a:t>
+              <a:t>Students with ADHD, anxiety disorders, learning differences or slower processing may already have accommodations or need them. Mention learning plans as a normal, available support. The worry write can be typed, spoken or drawn as a list.</a:t>
             </a:r>
           </a:p>
           <a:p>

--- a/decks/when-your-mind-goes-blank-lesson-v2.pptx
+++ b/decks/when-your-mind-goes-blank-lesson-v2.pptx
@@ -18,6 +18,7 @@
     <p:sldId id="266" r:id="rId18"/>
     <p:sldId id="267" r:id="rId19"/>
     <p:sldId id="268" r:id="rId20"/>
+    <p:sldId id="269" r:id="rId21"/>
   </p:sldIdLst>
   <p:sldSz cx="12192000" cy="6858000" type="screen4x3"/>
   <p:notesSz cx="6858000" cy="9144000"/>
@@ -514,7 +515,7 @@
           <a:lstStyle/>
           <a:p>
             <a:r>
-              <a:t>This page and the next three are hidden. They stay in the deck for you and are skipped when you present.</a:t>
+              <a:t>This page is hidden and skipped when you present. The full plan, care notes and research are on the hidden pages at the end of the deck, if you want them.</a:t>
             </a:r>
           </a:p>
         </p:txBody>
@@ -585,6 +586,76 @@
           <a:p>
             <a:r>
               <a:t>4 MINUTES. Collect anonymously, or let students keep it as a reminder. Before they go, name when to ask for more help: anxiety hurting scores even when they know the material; feeling sick, panicky or unable to sleep before most tests; avoiding school on test days; worry about school spreading into the rest of life. A counselor can help, anxiety responds well to treatment, and some students qualify for accommodations like extended time through a learning plan. Share the BVR Diner link on the slide (post it on your class page too). It has the test-day plan, the breathing circle, the worry write, a private check-in and who to talk to.</a:t>
+            </a:r>
+          </a:p>
+        </p:txBody>
+      </p:sp>
+      <p:sp>
+        <p:nvSpPr>
+          <p:cNvPr id="4" name="Slide Number Placeholder 3"/>
+          <p:cNvSpPr>
+            <a:spLocks noGrp="1"/>
+          </p:cNvSpPr>
+          <p:nvPr>
+            <p:ph type="sldNum" idx="5" sz="quarter"/>
+          </p:nvPr>
+        </p:nvSpPr>
+        <p:spPr/>
+      </p:sp>
+    </p:spTree>
+  </p:cSld>
+  <p:clrMapOvr>
+    <a:masterClrMapping/>
+  </p:clrMapOvr>
+</p:notes>
+</file>
+
+<file path=ppt/notesSlides/notesSlide11.xml><?xml version="1.0" encoding="utf-8"?>
+<p:notes xmlns:a="http://schemas.openxmlformats.org/drawingml/2006/main" xmlns:p="http://schemas.openxmlformats.org/presentationml/2006/main" xmlns:r="http://schemas.openxmlformats.org/officeDocument/2006/relationships">
+  <p:cSld>
+    <p:spTree>
+      <p:nvGrpSpPr>
+        <p:cNvPr id="1" name=""/>
+        <p:cNvGrpSpPr/>
+        <p:nvPr/>
+      </p:nvGrpSpPr>
+      <p:grpSpPr>
+        <a:xfrm>
+          <a:off x="0" y="0"/>
+          <a:ext cx="0" cy="0"/>
+          <a:chOff x="0" y="0"/>
+          <a:chExt cx="0" cy="0"/>
+        </a:xfrm>
+      </p:grpSpPr>
+      <p:sp>
+        <p:nvSpPr>
+          <p:cNvPr id="2" name="Slide Image Placeholder 1"/>
+          <p:cNvSpPr>
+            <a:spLocks noGrp="1"/>
+          </p:cNvSpPr>
+          <p:nvPr>
+            <p:ph type="sldImg" idx="2"/>
+          </p:nvPr>
+        </p:nvSpPr>
+        <p:spPr/>
+      </p:sp>
+      <p:sp>
+        <p:nvSpPr>
+          <p:cNvPr id="3" name="Notes Placeholder 2"/>
+          <p:cNvSpPr>
+            <a:spLocks noGrp="1"/>
+          </p:cNvSpPr>
+          <p:nvPr>
+            <p:ph type="body" idx="3" sz="quarter"/>
+          </p:nvPr>
+        </p:nvSpPr>
+        <p:spPr/>
+        <p:txBody>
+          <a:bodyPr/>
+          <a:lstStyle/>
+          <a:p>
+            <a:r>
+              <a:t>If you want more: this page and the next three are hidden and skipped when you present.</a:t>
             </a:r>
           </a:p>
         </p:txBody>
@@ -4236,7 +4307,7 @@
                 </a:solidFill>
                 <a:latin typeface="Inter Tight"/>
               </a:rPr>
-              <a:t>TEACHER PAGE  ·  skipped when you present  ·  Lesson plan</a:t>
+              <a:t>TEACHER PAGE  ·  skipped when you present  ·  Before you start</a:t>
             </a:r>
           </a:p>
         </p:txBody>
@@ -4327,8 +4398,8 @@
         </p:nvSpPr>
         <p:spPr>
           <a:xfrm>
-            <a:off x="548640" y="1828800"/>
-            <a:ext cx="5120640" cy="4389120"/>
+            <a:off x="548640" y="2011680"/>
+            <a:ext cx="11064240" cy="4206240"/>
           </a:xfrm>
           <a:prstGeom prst="rect">
             <a:avLst/>
@@ -4343,43 +4414,43 @@
           <a:p>
             <a:pPr algn="l">
               <a:spcAft>
-                <a:spcPts val="675"/>
-              </a:spcAft>
-            </a:pPr>
-            <a:r>
-              <a:rPr sz="1100" b="1" i="0">
+                <a:spcPts val="810"/>
+              </a:spcAft>
+            </a:pPr>
+            <a:r>
+              <a:rPr sz="1200" b="1" i="0">
                 <a:solidFill>
                   <a:srgbClr val="0B2D5B"/>
                 </a:solidFill>
                 <a:latin typeface="Inter Tight"/>
               </a:rPr>
-              <a:t>GOAL</a:t>
-            </a:r>
-          </a:p>
-          <a:p>
-            <a:pPr algn="l">
-              <a:spcAft>
-                <a:spcPts val="675"/>
-              </a:spcAft>
-            </a:pPr>
-            <a:r>
-              <a:rPr sz="1500" b="0" i="0">
+              <a:t>BEFORE YOU START</a:t>
+            </a:r>
+          </a:p>
+          <a:p>
+            <a:pPr algn="l">
+              <a:spcAft>
+                <a:spcPts val="810"/>
+              </a:spcAft>
+            </a:pPr>
+            <a:r>
+              <a:rPr sz="1800" b="0" i="0">
                 <a:solidFill>
                   <a:srgbClr val="1C1B19"/>
                 </a:solidFill>
                 <a:latin typeface="Source Serif 4"/>
               </a:rPr>
-              <a:t>Students can explain what happens in a test-day blank (the alarm crowds out working memory, and the knowledge is still stored), try two moves that work in the moment (relabel the feeling, breathe out longer than in), and plan for their next big test. The aim is ready, not calm. Nobody should leave thinking anxiety means they're bad at tests.</a:t>
-            </a:r>
-          </a:p>
-          <a:p>
-            <a:pPr algn="l">
-              <a:spcAft>
-                <a:spcPts val="675"/>
-              </a:spcAft>
-            </a:pPr>
-            <a:r>
-              <a:rPr sz="1500" b="0" i="0">
+              <a:t>Students learn what happens in a test-day blank and two moves that work in the moment: relabel the feeling, and breathe out longer than in. Bring lined paper, make the breathing optional, and know who's free that period if a student needs to step out.</a:t>
+            </a:r>
+          </a:p>
+          <a:p>
+            <a:pPr algn="l">
+              <a:spcAft>
+                <a:spcPts val="810"/>
+              </a:spcAft>
+            </a:pPr>
+            <a:r>
+              <a:rPr sz="1800" b="0" i="0">
                 <a:solidFill>
                   <a:srgbClr val="1C1B19"/>
                 </a:solidFill>
@@ -4391,321 +4462,75 @@
           <a:p>
             <a:pPr algn="l">
               <a:spcAft>
-                <a:spcPts val="675"/>
-              </a:spcAft>
-            </a:pPr>
-            <a:r>
-              <a:rPr sz="1100" b="1" i="0">
+                <a:spcPts val="810"/>
+              </a:spcAft>
+            </a:pPr>
+            <a:r>
+              <a:rPr sz="1200" b="1" i="0">
                 <a:solidFill>
                   <a:srgbClr val="0B2D5B"/>
                 </a:solidFill>
                 <a:latin typeface="Inter Tight"/>
               </a:rPr>
-              <a:t>MATERIALS</a:t>
-            </a:r>
-          </a:p>
-          <a:p>
-            <a:pPr algn="l">
-              <a:spcAft>
-                <a:spcPts val="675"/>
-              </a:spcAft>
-            </a:pPr>
-            <a:r>
-              <a:rPr sz="1500" b="0" i="0">
+              <a:t>EVERY STUDENT IN THE ROOM</a:t>
+            </a:r>
+          </a:p>
+          <a:p>
+            <a:pPr algn="l">
+              <a:spcAft>
+                <a:spcPts val="810"/>
+              </a:spcAft>
+            </a:pPr>
+            <a:r>
+              <a:rPr sz="1800" b="0" i="0">
                 <a:solidFill>
                   <a:srgbClr val="1C1B19"/>
                 </a:solidFill>
                 <a:latin typeface="Source Serif 4"/>
               </a:rPr>
-              <a:t>Index cards for the exit card</a:t>
-            </a:r>
-          </a:p>
-          <a:p>
-            <a:pPr algn="l">
-              <a:spcAft>
-                <a:spcPts val="675"/>
-              </a:spcAft>
-            </a:pPr>
-            <a:r>
-              <a:rPr sz="1500" b="0" i="0">
+              <a:t>For some students, like Mei, a score feels like it belongs to the whole family, and testing in a second language takes extra working memory.</a:t>
+            </a:r>
+          </a:p>
+          <a:p>
+            <a:pPr algn="l">
+              <a:spcAft>
+                <a:spcPts val="810"/>
+              </a:spcAft>
+            </a:pPr>
+            <a:r>
+              <a:rPr sz="1800" b="0" i="0">
                 <a:solidFill>
                   <a:srgbClr val="1C1B19"/>
                 </a:solidFill>
                 <a:latin typeface="Source Serif 4"/>
               </a:rPr>
-              <a:t>Lined paper for the worry write, one sheet per student</a:t>
-            </a:r>
-          </a:p>
-          <a:p>
-            <a:pPr algn="l">
-              <a:spcAft>
-                <a:spcPts val="675"/>
-              </a:spcAft>
-            </a:pPr>
-            <a:r>
-              <a:rPr sz="1500" b="0" i="0">
-                <a:solidFill>
-                  <a:srgbClr val="1C1B19"/>
-                </a:solidFill>
-                <a:latin typeface="Source Serif 4"/>
-              </a:rPr>
-              <a:t>The BVR Diner page link (last slide) to share after class</a:t>
-            </a:r>
-          </a:p>
-        </p:txBody>
-      </p:sp>
-      <p:sp>
-        <p:nvSpPr>
-          <p:cNvPr id="7" name="TextBox 6"/>
-          <p:cNvSpPr txBox="1"/>
-          <p:nvPr/>
-        </p:nvSpPr>
-        <p:spPr>
-          <a:xfrm>
-            <a:off x="6126480" y="1828800"/>
-            <a:ext cx="5486400" cy="4389120"/>
-          </a:xfrm>
-          <a:prstGeom prst="rect">
-            <a:avLst/>
-          </a:prstGeom>
-          <a:noFill/>
-        </p:spPr>
-        <p:txBody>
-          <a:bodyPr wrap="square" anchor="t" lIns="0" rIns="0" tIns="0" bIns="0">
-            <a:spAutoFit/>
-          </a:bodyPr>
-          <a:lstStyle/>
-          <a:p>
-            <a:pPr algn="l">
-              <a:spcAft>
-                <a:spcPts val="630"/>
-              </a:spcAft>
-            </a:pPr>
-            <a:r>
-              <a:rPr sz="1100" b="1" i="0">
+              <a:t/>
+            </a:r>
+          </a:p>
+          <a:p>
+            <a:pPr algn="l">
+              <a:spcAft>
+                <a:spcPts val="810"/>
+              </a:spcAft>
+            </a:pPr>
+            <a:r>
+              <a:rPr sz="1200" b="1" i="0">
                 <a:solidFill>
                   <a:srgbClr val="0B2D5B"/>
                 </a:solidFill>
                 <a:latin typeface="Inter Tight"/>
               </a:rPr>
-              <a:t>FLOW</a:t>
-            </a:r>
-          </a:p>
-          <a:p>
-            <a:pPr algn="l">
-              <a:spcAft>
-                <a:spcPts val="630"/>
-              </a:spcAft>
-            </a:pPr>
-            <a:r>
-              <a:rPr sz="1300" b="1" i="0">
-                <a:solidFill>
-                  <a:srgbClr val="F47B20"/>
-                </a:solidFill>
-                <a:latin typeface="Inter Tight"/>
-              </a:rPr>
-              <a:t>5 min   </a:t>
-            </a:r>
-            <a:r>
-              <a:rPr sz="1400" b="0" i="0">
-                <a:solidFill>
-                  <a:srgbClr val="1C1B19"/>
-                </a:solidFill>
-                <a:latin typeface="Source Serif 4"/>
-              </a:rPr>
-              <a:t>Myth or fact (stand up, sit down)</a:t>
-            </a:r>
-          </a:p>
-          <a:p>
-            <a:pPr algn="l">
-              <a:spcAft>
-                <a:spcPts val="630"/>
-              </a:spcAft>
-            </a:pPr>
-            <a:r>
-              <a:rPr sz="1300" b="1" i="0">
-                <a:solidFill>
-                  <a:srgbClr val="F47B20"/>
-                </a:solidFill>
-                <a:latin typeface="Inter Tight"/>
-              </a:rPr>
-              <a:t>8 min   </a:t>
-            </a:r>
-            <a:r>
-              <a:rPr sz="1400" b="0" i="0">
-                <a:solidFill>
-                  <a:srgbClr val="1C1B19"/>
-                </a:solidFill>
-                <a:latin typeface="Source Serif 4"/>
-              </a:rPr>
-              <a:t>What happens in the blank</a:t>
-            </a:r>
-          </a:p>
-          <a:p>
-            <a:pPr algn="l">
-              <a:spcAft>
-                <a:spcPts val="630"/>
-              </a:spcAft>
-            </a:pPr>
-            <a:r>
-              <a:rPr sz="1300" b="1" i="0">
-                <a:solidFill>
-                  <a:srgbClr val="F47B20"/>
-                </a:solidFill>
-                <a:latin typeface="Inter Tight"/>
-              </a:rPr>
-              <a:t>7 min   </a:t>
-            </a:r>
-            <a:r>
-              <a:rPr sz="1400" b="0" i="0">
-                <a:solidFill>
-                  <a:srgbClr val="1C1B19"/>
-                </a:solidFill>
-                <a:latin typeface="Source Serif 4"/>
-              </a:rPr>
-              <a:t>Ready, not calm (quick tally)</a:t>
-            </a:r>
-          </a:p>
-          <a:p>
-            <a:pPr algn="l">
-              <a:spcAft>
-                <a:spcPts val="630"/>
-              </a:spcAft>
-            </a:pPr>
-            <a:r>
-              <a:rPr sz="1300" b="1" i="0">
-                <a:solidFill>
-                  <a:srgbClr val="F47B20"/>
-                </a:solidFill>
-                <a:latin typeface="Inter Tight"/>
-              </a:rPr>
-              <a:t>7 min   </a:t>
-            </a:r>
-            <a:r>
-              <a:rPr sz="1400" b="0" i="0">
-                <a:solidFill>
-                  <a:srgbClr val="1C1B19"/>
-                </a:solidFill>
-                <a:latin typeface="Source Serif 4"/>
-              </a:rPr>
-              <a:t>Before and during, with one minute of breathing</a:t>
-            </a:r>
-          </a:p>
-          <a:p>
-            <a:pPr algn="l">
-              <a:spcAft>
-                <a:spcPts val="630"/>
-              </a:spcAft>
-            </a:pPr>
-            <a:r>
-              <a:rPr sz="1300" b="1" i="0">
-                <a:solidFill>
-                  <a:srgbClr val="F47B20"/>
-                </a:solidFill>
-                <a:latin typeface="Inter Tight"/>
-              </a:rPr>
-              <a:t>8 min   </a:t>
-            </a:r>
-            <a:r>
-              <a:rPr sz="1400" b="0" i="0">
-                <a:solidFill>
-                  <a:srgbClr val="1C1B19"/>
-                </a:solidFill>
-                <a:latin typeface="Source Serif 4"/>
-              </a:rPr>
-              <a:t>Three test moments (small groups)</a:t>
-            </a:r>
-          </a:p>
-          <a:p>
-            <a:pPr algn="l">
-              <a:spcAft>
-                <a:spcPts val="630"/>
-              </a:spcAft>
-            </a:pPr>
-            <a:r>
-              <a:rPr sz="1300" b="1" i="0">
-                <a:solidFill>
-                  <a:srgbClr val="F47B20"/>
-                </a:solidFill>
-                <a:latin typeface="Inter Tight"/>
-              </a:rPr>
-              <a:t>6 min   </a:t>
-            </a:r>
-            <a:r>
-              <a:rPr sz="1400" b="0" i="0">
-                <a:solidFill>
-                  <a:srgbClr val="1C1B19"/>
-                </a:solidFill>
-                <a:latin typeface="Source Serif 4"/>
-              </a:rPr>
-              <a:t>The worry write (private)</a:t>
-            </a:r>
-          </a:p>
-          <a:p>
-            <a:pPr algn="l">
-              <a:spcAft>
-                <a:spcPts val="630"/>
-              </a:spcAft>
-            </a:pPr>
-            <a:r>
-              <a:rPr sz="1300" b="1" i="0">
-                <a:solidFill>
-                  <a:srgbClr val="F47B20"/>
-                </a:solidFill>
-                <a:latin typeface="Inter Tight"/>
-              </a:rPr>
-              <a:t>4 min   </a:t>
-            </a:r>
-            <a:r>
-              <a:rPr sz="1400" b="0" i="0">
-                <a:solidFill>
-                  <a:srgbClr val="1C1B19"/>
-                </a:solidFill>
-                <a:latin typeface="Source Serif 4"/>
-              </a:rPr>
-              <a:t>Exit card and the BVR Diner link</a:t>
-            </a:r>
-          </a:p>
-          <a:p>
-            <a:pPr algn="l">
-              <a:spcAft>
-                <a:spcPts val="630"/>
-              </a:spcAft>
-            </a:pPr>
-            <a:r>
-              <a:rPr sz="1400" b="0" i="0">
-                <a:solidFill>
-                  <a:srgbClr val="1C1B19"/>
-                </a:solidFill>
-                <a:latin typeface="Source Serif 4"/>
-              </a:rPr>
-              <a:t/>
-            </a:r>
-          </a:p>
-          <a:p>
-            <a:pPr algn="l">
-              <a:spcAft>
-                <a:spcPts val="630"/>
-              </a:spcAft>
-            </a:pPr>
-            <a:r>
-              <a:rPr sz="1100" b="1" i="0">
-                <a:solidFill>
-                  <a:srgbClr val="0B2D5B"/>
-                </a:solidFill>
-                <a:latin typeface="Inter Tight"/>
-              </a:rPr>
               <a:t>SHORT ON TIME (20-MINUTE ADVISORY)</a:t>
             </a:r>
           </a:p>
           <a:p>
             <a:pPr algn="l">
               <a:spcAft>
-                <a:spcPts val="630"/>
-              </a:spcAft>
-            </a:pPr>
-            <a:r>
-              <a:rPr sz="1400" b="0" i="0">
+                <a:spcPts val="810"/>
+              </a:spcAft>
+            </a:pPr>
+            <a:r>
+              <a:rPr sz="1800" b="0" i="0">
                 <a:solidFill>
                   <a:srgbClr val="1C1B19"/>
                 </a:solidFill>
@@ -4820,7 +4645,7 @@
                 </a:solidFill>
                 <a:latin typeface="Inter Tight"/>
               </a:rPr>
-              <a:t>BEFORE AND DURING</a:t>
+              <a:t>BEFORE YOU GO</a:t>
             </a:r>
           </a:p>
         </p:txBody>
@@ -4872,7 +4697,7 @@
         </p:nvSpPr>
         <p:spPr>
           <a:xfrm>
-            <a:off x="822960" y="1005840"/>
+            <a:off x="822960" y="1188720"/>
             <a:ext cx="10515600" cy="914400"/>
           </a:xfrm>
           <a:prstGeom prst="rect">
@@ -4888,31 +4713,70 @@
           <a:p>
             <a:pPr algn="l">
               <a:spcAft>
-                <a:spcPts val="1530"/>
-              </a:spcAft>
-            </a:pPr>
-            <a:r>
-              <a:rPr sz="3400" b="1" i="0">
+                <a:spcPts val="1620"/>
+              </a:spcAft>
+            </a:pPr>
+            <a:r>
+              <a:rPr sz="3600" b="1" i="0">
                 <a:solidFill>
                   <a:srgbClr val="1C1B19"/>
                 </a:solidFill>
                 <a:latin typeface="Source Serif 4"/>
               </a:rPr>
-              <a:t>What to do, and when</a:t>
-            </a:r>
-          </a:p>
-        </p:txBody>
-      </p:sp>
-      <p:sp>
-        <p:nvSpPr>
-          <p:cNvPr id="6" name="Rectangle 5"/>
+              <a:t>Exit card</a:t>
+            </a:r>
+          </a:p>
+        </p:txBody>
+      </p:sp>
+      <p:sp>
+        <p:nvSpPr>
+          <p:cNvPr id="6" name="TextBox 5"/>
+          <p:cNvSpPr txBox="1"/>
+          <p:nvPr/>
+        </p:nvSpPr>
+        <p:spPr>
+          <a:xfrm>
+            <a:off x="822960" y="2286000"/>
+            <a:ext cx="10515600" cy="1463040"/>
+          </a:xfrm>
+          <a:prstGeom prst="rect">
+            <a:avLst/>
+          </a:prstGeom>
+          <a:noFill/>
+        </p:spPr>
+        <p:txBody>
+          <a:bodyPr wrap="square" anchor="t" lIns="0" rIns="0" tIns="0" bIns="0">
+            <a:spAutoFit/>
+          </a:bodyPr>
+          <a:lstStyle/>
+          <a:p>
+            <a:pPr algn="l">
+              <a:spcAft>
+                <a:spcPts val="1080"/>
+              </a:spcAft>
+            </a:pPr>
+            <a:r>
+              <a:rPr sz="2400" b="0" i="0">
+                <a:solidFill>
+                  <a:srgbClr val="1C1B19"/>
+                </a:solidFill>
+                <a:latin typeface="Source Serif 4"/>
+              </a:rPr>
+              <a:t>Which move will you use on your next test: relabel, breathe, skip and return, or the worry write?</a:t>
+            </a:r>
+          </a:p>
+        </p:txBody>
+      </p:sp>
+      <p:sp>
+        <p:nvSpPr>
+          <p:cNvPr id="7" name="Rectangle 6"/>
           <p:cNvSpPr/>
           <p:nvPr/>
         </p:nvSpPr>
         <p:spPr>
           <a:xfrm>
-            <a:off x="822960" y="2103120"/>
-            <a:ext cx="5120640" cy="3931920"/>
+            <a:off x="822960" y="4023360"/>
+            <a:ext cx="10515600" cy="1371600"/>
           </a:xfrm>
           <a:prstGeom prst="rect">
             <a:avLst/>
@@ -4922,7 +4786,7 @@
           </a:solidFill>
           <a:ln w="15875">
             <a:solidFill>
-              <a:srgbClr val="D8D2C6"/>
+              <a:srgbClr val="1C1B19"/>
             </a:solidFill>
           </a:ln>
           <a:effectLst/>
@@ -4951,14 +4815,14 @@
       </p:sp>
       <p:sp>
         <p:nvSpPr>
-          <p:cNvPr id="7" name="TextBox 6"/>
+          <p:cNvPr id="8" name="TextBox 7"/>
           <p:cNvSpPr txBox="1"/>
           <p:nvPr/>
         </p:nvSpPr>
         <p:spPr>
           <a:xfrm>
-            <a:off x="1097280" y="2286000"/>
-            <a:ext cx="4572000" cy="457200"/>
+            <a:off x="1097280" y="4206240"/>
+            <a:ext cx="10058400" cy="365760"/>
           </a:xfrm>
           <a:prstGeom prst="rect">
             <a:avLst/>
@@ -4973,31 +4837,31 @@
           <a:p>
             <a:pPr algn="l">
               <a:spcAft>
-                <a:spcPts val="585"/>
-              </a:spcAft>
-            </a:pPr>
-            <a:r>
-              <a:rPr sz="1300" b="1" i="0">
+                <a:spcPts val="540"/>
+              </a:spcAft>
+            </a:pPr>
+            <a:r>
+              <a:rPr sz="1200" b="1" i="0">
                 <a:solidFill>
                   <a:srgbClr val="0B2D5B"/>
                 </a:solidFill>
                 <a:latin typeface="Inter Tight"/>
               </a:rPr>
-              <a:t>THE WEEK BEFORE</a:t>
-            </a:r>
-          </a:p>
-        </p:txBody>
-      </p:sp>
-      <p:sp>
-        <p:nvSpPr>
-          <p:cNvPr id="8" name="TextBox 7"/>
+              <a:t>ON THE BVR DINER MENU</a:t>
+            </a:r>
+          </a:p>
+        </p:txBody>
+      </p:sp>
+      <p:sp>
+        <p:nvSpPr>
+          <p:cNvPr id="9" name="TextBox 8"/>
           <p:cNvSpPr txBox="1"/>
           <p:nvPr/>
         </p:nvSpPr>
         <p:spPr>
           <a:xfrm>
-            <a:off x="1097280" y="2788920"/>
-            <a:ext cx="4572000" cy="3108960"/>
+            <a:off x="1097280" y="4617720"/>
+            <a:ext cx="10058400" cy="640080"/>
           </a:xfrm>
           <a:prstGeom prst="rect">
             <a:avLst/>
@@ -5012,90 +4876,66 @@
           <a:p>
             <a:pPr algn="l">
               <a:spcAft>
-                <a:spcPts val="855"/>
-              </a:spcAft>
-            </a:pPr>
-            <a:r>
-              <a:rPr sz="1900" b="0" i="0">
+                <a:spcPts val="900"/>
+              </a:spcAft>
+            </a:pPr>
+            <a:r>
+              <a:rPr sz="2000" b="0" i="0">
                 <a:solidFill>
                   <a:srgbClr val="1C1B19"/>
                 </a:solidFill>
-                <a:latin typeface="Source Serif 4"/>
-              </a:rPr>
-              <a:t>Quiz yourself, don't reread</a:t>
-            </a:r>
-          </a:p>
-          <a:p>
-            <a:pPr algn="l">
-              <a:spcAft>
-                <a:spcPts val="855"/>
-              </a:spcAft>
-            </a:pPr>
-            <a:r>
-              <a:rPr sz="1900" b="0" i="0">
-                <a:solidFill>
-                  <a:srgbClr val="1C1B19"/>
-                </a:solidFill>
-                <a:latin typeface="Source Serif 4"/>
-              </a:rPr>
-              <a:t>Practice timed, with no notes</a:t>
-            </a:r>
-          </a:p>
-          <a:p>
-            <a:pPr algn="l">
-              <a:spcAft>
-                <a:spcPts val="855"/>
-              </a:spcAft>
-            </a:pPr>
-            <a:r>
-              <a:rPr sz="1900" b="0" i="0">
-                <a:solidFill>
-                  <a:srgbClr val="1C1B19"/>
-                </a:solidFill>
-                <a:latin typeface="Source Serif 4"/>
-              </a:rPr>
-              <a:t>Protect sleep, last two nights</a:t>
-            </a:r>
-          </a:p>
-          <a:p>
-            <a:pPr algn="l">
-              <a:spcAft>
-                <a:spcPts val="855"/>
-              </a:spcAft>
-            </a:pPr>
-            <a:r>
-              <a:rPr sz="1900" b="0" i="0">
-                <a:solidFill>
-                  <a:srgbClr val="1C1B19"/>
-                </a:solidFill>
-                <a:latin typeface="Source Serif 4"/>
-              </a:rPr>
-              <a:t>Your usual caffeine, no extra</a:t>
-            </a:r>
-          </a:p>
-        </p:txBody>
-      </p:sp>
-      <p:sp>
-        <p:nvSpPr>
-          <p:cNvPr id="9" name="Rectangle 8"/>
+                <a:latin typeface="Inter Tight"/>
+              </a:rPr>
+              <a:t>https://rmwtoolkit.github.io/bcds-toolkit/when-your-mind-goes-blank-high-school.html</a:t>
+            </a:r>
+          </a:p>
+        </p:txBody>
+      </p:sp>
+    </p:spTree>
+  </p:cSld>
+  <p:clrMapOvr>
+    <a:masterClrMapping/>
+  </p:clrMapOvr>
+</p:sld>
+</file>
+
+<file path=ppt/slides/slide11.xml><?xml version="1.0" encoding="utf-8"?>
+<p:sld xmlns:a="http://schemas.openxmlformats.org/drawingml/2006/main" xmlns:p="http://schemas.openxmlformats.org/presentationml/2006/main" xmlns:r="http://schemas.openxmlformats.org/officeDocument/2006/relationships" show="0">
+  <p:cSld>
+    <p:bg>
+      <p:bgPr>
+        <a:solidFill>
+          <a:srgbClr val="EEEBE4"/>
+        </a:solidFill>
+        <a:effectLst/>
+      </p:bgPr>
+    </p:bg>
+    <p:spTree>
+      <p:nvGrpSpPr>
+        <p:cNvPr id="1" name=""/>
+        <p:cNvGrpSpPr/>
+        <p:nvPr/>
+      </p:nvGrpSpPr>
+      <p:grpSpPr/>
+      <p:sp>
+        <p:nvSpPr>
+          <p:cNvPr id="2" name="Rectangle 1"/>
           <p:cNvSpPr/>
           <p:nvPr/>
         </p:nvSpPr>
         <p:spPr>
           <a:xfrm>
-            <a:off x="6309360" y="2103120"/>
-            <a:ext cx="5120640" cy="3931920"/>
+            <a:off x="0" y="0"/>
+            <a:ext cx="12191695" cy="384048"/>
           </a:xfrm>
           <a:prstGeom prst="rect">
             <a:avLst/>
           </a:prstGeom>
           <a:solidFill>
-            <a:srgbClr val="FFFFFF"/>
+            <a:srgbClr val="0B2D5B"/>
           </a:solidFill>
-          <a:ln w="15875">
-            <a:solidFill>
-              <a:srgbClr val="D8D2C6"/>
-            </a:solidFill>
+          <a:ln>
+            <a:noFill/>
           </a:ln>
           <a:effectLst/>
         </p:spPr>
@@ -5123,14 +4963,14 @@
       </p:sp>
       <p:sp>
         <p:nvSpPr>
-          <p:cNvPr id="10" name="TextBox 9"/>
+          <p:cNvPr id="3" name="TextBox 2"/>
           <p:cNvSpPr txBox="1"/>
           <p:nvPr/>
         </p:nvSpPr>
         <p:spPr>
           <a:xfrm>
-            <a:off x="6583680" y="2286000"/>
-            <a:ext cx="4572000" cy="457200"/>
+            <a:off x="548640" y="100584"/>
+            <a:ext cx="10972800" cy="274320"/>
           </a:xfrm>
           <a:prstGeom prst="rect">
             <a:avLst/>
@@ -5145,31 +4985,31 @@
           <a:p>
             <a:pPr algn="l">
               <a:spcAft>
-                <a:spcPts val="585"/>
-              </a:spcAft>
-            </a:pPr>
-            <a:r>
-              <a:rPr sz="1300" b="1" i="0">
-                <a:solidFill>
-                  <a:srgbClr val="0B2D5B"/>
+                <a:spcPts val="495"/>
+              </a:spcAft>
+            </a:pPr>
+            <a:r>
+              <a:rPr sz="1100" b="1" i="0">
+                <a:solidFill>
+                  <a:srgbClr val="FFFFFF"/>
                 </a:solidFill>
                 <a:latin typeface="Inter Tight"/>
               </a:rPr>
-              <a:t>DURING THE TEST</a:t>
-            </a:r>
-          </a:p>
-        </p:txBody>
-      </p:sp>
-      <p:sp>
-        <p:nvSpPr>
-          <p:cNvPr id="11" name="TextBox 10"/>
+              <a:t>TEACHER PAGE  ·  skipped when you present  ·  Lesson plan</a:t>
+            </a:r>
+          </a:p>
+        </p:txBody>
+      </p:sp>
+      <p:sp>
+        <p:nvSpPr>
+          <p:cNvPr id="4" name="TextBox 3"/>
           <p:cNvSpPr txBox="1"/>
           <p:nvPr/>
         </p:nvSpPr>
         <p:spPr>
           <a:xfrm>
-            <a:off x="6583680" y="2788920"/>
-            <a:ext cx="4572000" cy="3108960"/>
+            <a:off x="548640" y="685800"/>
+            <a:ext cx="10972800" cy="731520"/>
           </a:xfrm>
           <a:prstGeom prst="rect">
             <a:avLst/>
@@ -5184,65 +5024,453 @@
           <a:p>
             <a:pPr algn="l">
               <a:spcAft>
-                <a:spcPts val="855"/>
-              </a:spcAft>
-            </a:pPr>
-            <a:r>
-              <a:rPr sz="1900" b="0" i="0">
+                <a:spcPts val="1530"/>
+              </a:spcAft>
+            </a:pPr>
+            <a:r>
+              <a:rPr sz="3400" b="1" i="0">
                 <a:solidFill>
                   <a:srgbClr val="1C1B19"/>
                 </a:solidFill>
                 <a:latin typeface="Source Serif 4"/>
               </a:rPr>
-              <a:t>Breathe in for 4, out for 6</a:t>
-            </a:r>
-          </a:p>
-          <a:p>
-            <a:pPr algn="l">
-              <a:spcAft>
-                <a:spcPts val="855"/>
-              </a:spcAft>
-            </a:pPr>
-            <a:r>
-              <a:rPr sz="1900" b="0" i="0">
+              <a:t>When Your Mind Goes Blank</a:t>
+            </a:r>
+          </a:p>
+        </p:txBody>
+      </p:sp>
+      <p:sp>
+        <p:nvSpPr>
+          <p:cNvPr id="5" name="TextBox 4"/>
+          <p:cNvSpPr txBox="1"/>
+          <p:nvPr/>
+        </p:nvSpPr>
+        <p:spPr>
+          <a:xfrm>
+            <a:off x="548640" y="1325880"/>
+            <a:ext cx="10972800" cy="365760"/>
+          </a:xfrm>
+          <a:prstGeom prst="rect">
+            <a:avLst/>
+          </a:prstGeom>
+          <a:noFill/>
+        </p:spPr>
+        <p:txBody>
+          <a:bodyPr wrap="square" anchor="t" lIns="0" rIns="0" tIns="0" bIns="0">
+            <a:spAutoFit/>
+          </a:bodyPr>
+          <a:lstStyle/>
+          <a:p>
+            <a:pPr algn="l">
+              <a:spcAft>
+                <a:spcPts val="630"/>
+              </a:spcAft>
+            </a:pPr>
+            <a:r>
+              <a:rPr sz="1400" b="0" i="0">
+                <a:solidFill>
+                  <a:srgbClr val="5D5A54"/>
+                </a:solidFill>
+                <a:latin typeface="Inter Tight"/>
+              </a:rPr>
+              <a:t>Upper School  ·  45 minutes (20-minute advisory version below)  ·  9th grade advisory, health class, or a counselor-led group</a:t>
+            </a:r>
+          </a:p>
+        </p:txBody>
+      </p:sp>
+      <p:sp>
+        <p:nvSpPr>
+          <p:cNvPr id="6" name="TextBox 5"/>
+          <p:cNvSpPr txBox="1"/>
+          <p:nvPr/>
+        </p:nvSpPr>
+        <p:spPr>
+          <a:xfrm>
+            <a:off x="548640" y="1828800"/>
+            <a:ext cx="5120640" cy="4389120"/>
+          </a:xfrm>
+          <a:prstGeom prst="rect">
+            <a:avLst/>
+          </a:prstGeom>
+          <a:noFill/>
+        </p:spPr>
+        <p:txBody>
+          <a:bodyPr wrap="square" anchor="t" lIns="0" rIns="0" tIns="0" bIns="0">
+            <a:spAutoFit/>
+          </a:bodyPr>
+          <a:lstStyle/>
+          <a:p>
+            <a:pPr algn="l">
+              <a:spcAft>
+                <a:spcPts val="675"/>
+              </a:spcAft>
+            </a:pPr>
+            <a:r>
+              <a:rPr sz="1100" b="1" i="0">
+                <a:solidFill>
+                  <a:srgbClr val="0B2D5B"/>
+                </a:solidFill>
+                <a:latin typeface="Inter Tight"/>
+              </a:rPr>
+              <a:t>GOAL</a:t>
+            </a:r>
+          </a:p>
+          <a:p>
+            <a:pPr algn="l">
+              <a:spcAft>
+                <a:spcPts val="675"/>
+              </a:spcAft>
+            </a:pPr>
+            <a:r>
+              <a:rPr sz="1500" b="0" i="0">
                 <a:solidFill>
                   <a:srgbClr val="1C1B19"/>
                 </a:solidFill>
                 <a:latin typeface="Source Serif 4"/>
               </a:rPr>
-              <a:t>Skip it, mark it, come back</a:t>
-            </a:r>
-          </a:p>
-          <a:p>
-            <a:pPr algn="l">
-              <a:spcAft>
-                <a:spcPts val="855"/>
-              </a:spcAft>
-            </a:pPr>
-            <a:r>
-              <a:rPr sz="1900" b="0" i="0">
+              <a:t>Students can explain what happens in a test-day blank (the alarm crowds out working memory, and the knowledge is still stored), try two moves that work in the moment (relabel the feeling, breathe out longer than in), and plan for their next big test. The aim is ready, not calm. Nobody should leave thinking anxiety means they're bad at tests.</a:t>
+            </a:r>
+          </a:p>
+          <a:p>
+            <a:pPr algn="l">
+              <a:spcAft>
+                <a:spcPts val="675"/>
+              </a:spcAft>
+            </a:pPr>
+            <a:r>
+              <a:rPr sz="1500" b="0" i="0">
                 <a:solidFill>
                   <a:srgbClr val="1C1B19"/>
                 </a:solidFill>
                 <a:latin typeface="Source Serif 4"/>
               </a:rPr>
-              <a:t>Jot formulas at the start</a:t>
-            </a:r>
-          </a:p>
-          <a:p>
-            <a:pPr algn="l">
-              <a:spcAft>
-                <a:spcPts val="855"/>
-              </a:spcAft>
-            </a:pPr>
-            <a:r>
-              <a:rPr sz="1900" b="0" i="0">
+              <a:t/>
+            </a:r>
+          </a:p>
+          <a:p>
+            <a:pPr algn="l">
+              <a:spcAft>
+                <a:spcPts val="675"/>
+              </a:spcAft>
+            </a:pPr>
+            <a:r>
+              <a:rPr sz="1100" b="1" i="0">
+                <a:solidFill>
+                  <a:srgbClr val="0B2D5B"/>
+                </a:solidFill>
+                <a:latin typeface="Inter Tight"/>
+              </a:rPr>
+              <a:t>MATERIALS</a:t>
+            </a:r>
+          </a:p>
+          <a:p>
+            <a:pPr algn="l">
+              <a:spcAft>
+                <a:spcPts val="675"/>
+              </a:spcAft>
+            </a:pPr>
+            <a:r>
+              <a:rPr sz="1500" b="0" i="0">
                 <a:solidFill>
                   <a:srgbClr val="1C1B19"/>
                 </a:solidFill>
                 <a:latin typeface="Source Serif 4"/>
               </a:rPr>
-              <a:t>After: debrief, don't replay</a:t>
+              <a:t>Index cards for the exit card</a:t>
+            </a:r>
+          </a:p>
+          <a:p>
+            <a:pPr algn="l">
+              <a:spcAft>
+                <a:spcPts val="675"/>
+              </a:spcAft>
+            </a:pPr>
+            <a:r>
+              <a:rPr sz="1500" b="0" i="0">
+                <a:solidFill>
+                  <a:srgbClr val="1C1B19"/>
+                </a:solidFill>
+                <a:latin typeface="Source Serif 4"/>
+              </a:rPr>
+              <a:t>Lined paper for the worry write, one sheet per student</a:t>
+            </a:r>
+          </a:p>
+          <a:p>
+            <a:pPr algn="l">
+              <a:spcAft>
+                <a:spcPts val="675"/>
+              </a:spcAft>
+            </a:pPr>
+            <a:r>
+              <a:rPr sz="1500" b="0" i="0">
+                <a:solidFill>
+                  <a:srgbClr val="1C1B19"/>
+                </a:solidFill>
+                <a:latin typeface="Source Serif 4"/>
+              </a:rPr>
+              <a:t>The BVR Diner page link (last slide) to share after class</a:t>
+            </a:r>
+          </a:p>
+        </p:txBody>
+      </p:sp>
+      <p:sp>
+        <p:nvSpPr>
+          <p:cNvPr id="7" name="TextBox 6"/>
+          <p:cNvSpPr txBox="1"/>
+          <p:nvPr/>
+        </p:nvSpPr>
+        <p:spPr>
+          <a:xfrm>
+            <a:off x="6126480" y="1828800"/>
+            <a:ext cx="5486400" cy="4389120"/>
+          </a:xfrm>
+          <a:prstGeom prst="rect">
+            <a:avLst/>
+          </a:prstGeom>
+          <a:noFill/>
+        </p:spPr>
+        <p:txBody>
+          <a:bodyPr wrap="square" anchor="t" lIns="0" rIns="0" tIns="0" bIns="0">
+            <a:spAutoFit/>
+          </a:bodyPr>
+          <a:lstStyle/>
+          <a:p>
+            <a:pPr algn="l">
+              <a:spcAft>
+                <a:spcPts val="630"/>
+              </a:spcAft>
+            </a:pPr>
+            <a:r>
+              <a:rPr sz="1100" b="1" i="0">
+                <a:solidFill>
+                  <a:srgbClr val="0B2D5B"/>
+                </a:solidFill>
+                <a:latin typeface="Inter Tight"/>
+              </a:rPr>
+              <a:t>FLOW</a:t>
+            </a:r>
+          </a:p>
+          <a:p>
+            <a:pPr algn="l">
+              <a:spcAft>
+                <a:spcPts val="630"/>
+              </a:spcAft>
+            </a:pPr>
+            <a:r>
+              <a:rPr sz="1300" b="1" i="0">
+                <a:solidFill>
+                  <a:srgbClr val="F47B20"/>
+                </a:solidFill>
+                <a:latin typeface="Inter Tight"/>
+              </a:rPr>
+              <a:t>5 min   </a:t>
+            </a:r>
+            <a:r>
+              <a:rPr sz="1400" b="0" i="0">
+                <a:solidFill>
+                  <a:srgbClr val="1C1B19"/>
+                </a:solidFill>
+                <a:latin typeface="Source Serif 4"/>
+              </a:rPr>
+              <a:t>Myth or fact (stand up, sit down)</a:t>
+            </a:r>
+          </a:p>
+          <a:p>
+            <a:pPr algn="l">
+              <a:spcAft>
+                <a:spcPts val="630"/>
+              </a:spcAft>
+            </a:pPr>
+            <a:r>
+              <a:rPr sz="1300" b="1" i="0">
+                <a:solidFill>
+                  <a:srgbClr val="F47B20"/>
+                </a:solidFill>
+                <a:latin typeface="Inter Tight"/>
+              </a:rPr>
+              <a:t>8 min   </a:t>
+            </a:r>
+            <a:r>
+              <a:rPr sz="1400" b="0" i="0">
+                <a:solidFill>
+                  <a:srgbClr val="1C1B19"/>
+                </a:solidFill>
+                <a:latin typeface="Source Serif 4"/>
+              </a:rPr>
+              <a:t>What happens in the blank</a:t>
+            </a:r>
+          </a:p>
+          <a:p>
+            <a:pPr algn="l">
+              <a:spcAft>
+                <a:spcPts val="630"/>
+              </a:spcAft>
+            </a:pPr>
+            <a:r>
+              <a:rPr sz="1300" b="1" i="0">
+                <a:solidFill>
+                  <a:srgbClr val="F47B20"/>
+                </a:solidFill>
+                <a:latin typeface="Inter Tight"/>
+              </a:rPr>
+              <a:t>7 min   </a:t>
+            </a:r>
+            <a:r>
+              <a:rPr sz="1400" b="0" i="0">
+                <a:solidFill>
+                  <a:srgbClr val="1C1B19"/>
+                </a:solidFill>
+                <a:latin typeface="Source Serif 4"/>
+              </a:rPr>
+              <a:t>Ready, not calm (quick tally)</a:t>
+            </a:r>
+          </a:p>
+          <a:p>
+            <a:pPr algn="l">
+              <a:spcAft>
+                <a:spcPts val="630"/>
+              </a:spcAft>
+            </a:pPr>
+            <a:r>
+              <a:rPr sz="1300" b="1" i="0">
+                <a:solidFill>
+                  <a:srgbClr val="F47B20"/>
+                </a:solidFill>
+                <a:latin typeface="Inter Tight"/>
+              </a:rPr>
+              <a:t>7 min   </a:t>
+            </a:r>
+            <a:r>
+              <a:rPr sz="1400" b="0" i="0">
+                <a:solidFill>
+                  <a:srgbClr val="1C1B19"/>
+                </a:solidFill>
+                <a:latin typeface="Source Serif 4"/>
+              </a:rPr>
+              <a:t>Before and during, with one minute of breathing</a:t>
+            </a:r>
+          </a:p>
+          <a:p>
+            <a:pPr algn="l">
+              <a:spcAft>
+                <a:spcPts val="630"/>
+              </a:spcAft>
+            </a:pPr>
+            <a:r>
+              <a:rPr sz="1300" b="1" i="0">
+                <a:solidFill>
+                  <a:srgbClr val="F47B20"/>
+                </a:solidFill>
+                <a:latin typeface="Inter Tight"/>
+              </a:rPr>
+              <a:t>8 min   </a:t>
+            </a:r>
+            <a:r>
+              <a:rPr sz="1400" b="0" i="0">
+                <a:solidFill>
+                  <a:srgbClr val="1C1B19"/>
+                </a:solidFill>
+                <a:latin typeface="Source Serif 4"/>
+              </a:rPr>
+              <a:t>Three test moments (small groups)</a:t>
+            </a:r>
+          </a:p>
+          <a:p>
+            <a:pPr algn="l">
+              <a:spcAft>
+                <a:spcPts val="630"/>
+              </a:spcAft>
+            </a:pPr>
+            <a:r>
+              <a:rPr sz="1300" b="1" i="0">
+                <a:solidFill>
+                  <a:srgbClr val="F47B20"/>
+                </a:solidFill>
+                <a:latin typeface="Inter Tight"/>
+              </a:rPr>
+              <a:t>6 min   </a:t>
+            </a:r>
+            <a:r>
+              <a:rPr sz="1400" b="0" i="0">
+                <a:solidFill>
+                  <a:srgbClr val="1C1B19"/>
+                </a:solidFill>
+                <a:latin typeface="Source Serif 4"/>
+              </a:rPr>
+              <a:t>The worry write (private)</a:t>
+            </a:r>
+          </a:p>
+          <a:p>
+            <a:pPr algn="l">
+              <a:spcAft>
+                <a:spcPts val="630"/>
+              </a:spcAft>
+            </a:pPr>
+            <a:r>
+              <a:rPr sz="1300" b="1" i="0">
+                <a:solidFill>
+                  <a:srgbClr val="F47B20"/>
+                </a:solidFill>
+                <a:latin typeface="Inter Tight"/>
+              </a:rPr>
+              <a:t>4 min   </a:t>
+            </a:r>
+            <a:r>
+              <a:rPr sz="1400" b="0" i="0">
+                <a:solidFill>
+                  <a:srgbClr val="1C1B19"/>
+                </a:solidFill>
+                <a:latin typeface="Source Serif 4"/>
+              </a:rPr>
+              <a:t>Exit card and the BVR Diner link</a:t>
+            </a:r>
+          </a:p>
+          <a:p>
+            <a:pPr algn="l">
+              <a:spcAft>
+                <a:spcPts val="630"/>
+              </a:spcAft>
+            </a:pPr>
+            <a:r>
+              <a:rPr sz="1400" b="0" i="0">
+                <a:solidFill>
+                  <a:srgbClr val="1C1B19"/>
+                </a:solidFill>
+                <a:latin typeface="Source Serif 4"/>
+              </a:rPr>
+              <a:t/>
+            </a:r>
+          </a:p>
+          <a:p>
+            <a:pPr algn="l">
+              <a:spcAft>
+                <a:spcPts val="630"/>
+              </a:spcAft>
+            </a:pPr>
+            <a:r>
+              <a:rPr sz="1100" b="1" i="0">
+                <a:solidFill>
+                  <a:srgbClr val="0B2D5B"/>
+                </a:solidFill>
+                <a:latin typeface="Inter Tight"/>
+              </a:rPr>
+              <a:t>SHORT ON TIME (20-MINUTE ADVISORY)</a:t>
+            </a:r>
+          </a:p>
+          <a:p>
+            <a:pPr algn="l">
+              <a:spcAft>
+                <a:spcPts val="630"/>
+              </a:spcAft>
+            </a:pPr>
+            <a:r>
+              <a:rPr sz="1400" b="0" i="0">
+                <a:solidFill>
+                  <a:srgbClr val="1C1B19"/>
+                </a:solidFill>
+                <a:latin typeface="Source Serif 4"/>
+              </a:rPr>
+              <a:t>Myth or fact (4), what happens in the blank (5), ready not calm with the breathing minute (7), exit card and link (4). Share the BVR Diner link so students get the worry write and the rest.</a:t>
             </a:r>
           </a:p>
         </p:txBody>
@@ -5255,7 +5483,1661 @@
 </p:sld>
 </file>
 
-<file path=ppt/slides/slide11.xml><?xml version="1.0" encoding="utf-8"?>
+<file path=ppt/slides/slide12.xml><?xml version="1.0" encoding="utf-8"?>
+<p:sld xmlns:a="http://schemas.openxmlformats.org/drawingml/2006/main" xmlns:p="http://schemas.openxmlformats.org/presentationml/2006/main" xmlns:r="http://schemas.openxmlformats.org/officeDocument/2006/relationships" show="0">
+  <p:cSld>
+    <p:bg>
+      <p:bgPr>
+        <a:solidFill>
+          <a:srgbClr val="EEEBE4"/>
+        </a:solidFill>
+        <a:effectLst/>
+      </p:bgPr>
+    </p:bg>
+    <p:spTree>
+      <p:nvGrpSpPr>
+        <p:cNvPr id="1" name=""/>
+        <p:cNvGrpSpPr/>
+        <p:nvPr/>
+      </p:nvGrpSpPr>
+      <p:grpSpPr/>
+      <p:sp>
+        <p:nvSpPr>
+          <p:cNvPr id="2" name="Rectangle 1"/>
+          <p:cNvSpPr/>
+          <p:nvPr/>
+        </p:nvSpPr>
+        <p:spPr>
+          <a:xfrm>
+            <a:off x="0" y="0"/>
+            <a:ext cx="12191695" cy="384048"/>
+          </a:xfrm>
+          <a:prstGeom prst="rect">
+            <a:avLst/>
+          </a:prstGeom>
+          <a:solidFill>
+            <a:srgbClr val="0B2D5B"/>
+          </a:solidFill>
+          <a:ln>
+            <a:noFill/>
+          </a:ln>
+          <a:effectLst/>
+        </p:spPr>
+        <p:style>
+          <a:lnRef idx="1">
+            <a:schemeClr val="accent1"/>
+          </a:lnRef>
+          <a:fillRef idx="3">
+            <a:schemeClr val="accent1"/>
+          </a:fillRef>
+          <a:effectRef idx="2">
+            <a:schemeClr val="accent1"/>
+          </a:effectRef>
+          <a:fontRef idx="minor">
+            <a:schemeClr val="lt1"/>
+          </a:fontRef>
+        </p:style>
+        <p:txBody>
+          <a:bodyPr rtlCol="0" anchor="ctr"/>
+          <a:lstStyle/>
+          <a:p>
+            <a:pPr algn="ctr"/>
+          </a:p>
+        </p:txBody>
+      </p:sp>
+      <p:sp>
+        <p:nvSpPr>
+          <p:cNvPr id="3" name="TextBox 2"/>
+          <p:cNvSpPr txBox="1"/>
+          <p:nvPr/>
+        </p:nvSpPr>
+        <p:spPr>
+          <a:xfrm>
+            <a:off x="548640" y="100584"/>
+            <a:ext cx="10972800" cy="274320"/>
+          </a:xfrm>
+          <a:prstGeom prst="rect">
+            <a:avLst/>
+          </a:prstGeom>
+          <a:noFill/>
+        </p:spPr>
+        <p:txBody>
+          <a:bodyPr wrap="square" anchor="t" lIns="0" rIns="0" tIns="0" bIns="0">
+            <a:spAutoFit/>
+          </a:bodyPr>
+          <a:lstStyle/>
+          <a:p>
+            <a:pPr algn="l">
+              <a:spcAft>
+                <a:spcPts val="495"/>
+              </a:spcAft>
+            </a:pPr>
+            <a:r>
+              <a:rPr sz="1100" b="1" i="0">
+                <a:solidFill>
+                  <a:srgbClr val="FFFFFF"/>
+                </a:solidFill>
+                <a:latin typeface="Inter Tight"/>
+              </a:rPr>
+              <a:t>TEACHER PAGE  ·  skipped when you present  ·  Before you teach</a:t>
+            </a:r>
+          </a:p>
+        </p:txBody>
+      </p:sp>
+      <p:sp>
+        <p:nvSpPr>
+          <p:cNvPr id="4" name="TextBox 3"/>
+          <p:cNvSpPr txBox="1"/>
+          <p:nvPr/>
+        </p:nvSpPr>
+        <p:spPr>
+          <a:xfrm>
+            <a:off x="548640" y="685800"/>
+            <a:ext cx="10972800" cy="640080"/>
+          </a:xfrm>
+          <a:prstGeom prst="rect">
+            <a:avLst/>
+          </a:prstGeom>
+          <a:noFill/>
+        </p:spPr>
+        <p:txBody>
+          <a:bodyPr wrap="square" anchor="t" lIns="0" rIns="0" tIns="0" bIns="0">
+            <a:spAutoFit/>
+          </a:bodyPr>
+          <a:lstStyle/>
+          <a:p>
+            <a:pPr algn="l">
+              <a:spcAft>
+                <a:spcPts val="1350"/>
+              </a:spcAft>
+            </a:pPr>
+            <a:r>
+              <a:rPr sz="3000" b="1" i="0">
+                <a:solidFill>
+                  <a:srgbClr val="1C1B19"/>
+                </a:solidFill>
+                <a:latin typeface="Source Serif 4"/>
+              </a:rPr>
+              <a:t>Before you teach</a:t>
+            </a:r>
+          </a:p>
+        </p:txBody>
+      </p:sp>
+      <p:sp>
+        <p:nvSpPr>
+          <p:cNvPr id="5" name="TextBox 4"/>
+          <p:cNvSpPr txBox="1"/>
+          <p:nvPr/>
+        </p:nvSpPr>
+        <p:spPr>
+          <a:xfrm>
+            <a:off x="548640" y="1463040"/>
+            <a:ext cx="5394960" cy="4937760"/>
+          </a:xfrm>
+          <a:prstGeom prst="rect">
+            <a:avLst/>
+          </a:prstGeom>
+          <a:noFill/>
+        </p:spPr>
+        <p:txBody>
+          <a:bodyPr wrap="square" anchor="t" lIns="0" rIns="0" tIns="0" bIns="0">
+            <a:spAutoFit/>
+          </a:bodyPr>
+          <a:lstStyle/>
+          <a:p>
+            <a:pPr algn="l">
+              <a:spcAft>
+                <a:spcPts val="585"/>
+              </a:spcAft>
+            </a:pPr>
+            <a:r>
+              <a:rPr sz="1500" b="1" i="0">
+                <a:solidFill>
+                  <a:srgbClr val="1C1B19"/>
+                </a:solidFill>
+                <a:latin typeface="Source Serif 4"/>
+              </a:rPr>
+              <a:t>Some students dread every test.</a:t>
+            </a:r>
+          </a:p>
+          <a:p>
+            <a:pPr algn="l">
+              <a:spcAft>
+                <a:spcPts val="585"/>
+              </a:spcAft>
+            </a:pPr>
+            <a:r>
+              <a:rPr sz="1300" b="0" i="0">
+                <a:solidFill>
+                  <a:srgbClr val="1C1B19"/>
+                </a:solidFill>
+                <a:latin typeface="Source Serif 4"/>
+              </a:rPr>
+              <a:t>For a few students this lesson is about something they feel every week. Keep the tone ordinary and practical. Never ask who gets anxious, who has blanked, or what anyone scored.</a:t>
+            </a:r>
+          </a:p>
+          <a:p>
+            <a:pPr algn="l">
+              <a:spcAft>
+                <a:spcPts val="585"/>
+              </a:spcAft>
+            </a:pPr>
+            <a:r>
+              <a:rPr sz="1300" b="0" i="0">
+                <a:solidFill>
+                  <a:srgbClr val="1C1B19"/>
+                </a:solidFill>
+                <a:latin typeface="Source Serif 4"/>
+              </a:rPr>
+              <a:t/>
+            </a:r>
+          </a:p>
+          <a:p>
+            <a:pPr algn="l">
+              <a:spcAft>
+                <a:spcPts val="585"/>
+              </a:spcAft>
+            </a:pPr>
+            <a:r>
+              <a:rPr sz="1500" b="1" i="0">
+                <a:solidFill>
+                  <a:srgbClr val="1C1B19"/>
+                </a:solidFill>
+                <a:latin typeface="Source Serif 4"/>
+              </a:rPr>
+              <a:t>Make the breathing optional.</a:t>
+            </a:r>
+          </a:p>
+          <a:p>
+            <a:pPr algn="l">
+              <a:spcAft>
+                <a:spcPts val="585"/>
+              </a:spcAft>
+            </a:pPr>
+            <a:r>
+              <a:rPr sz="1300" b="0" i="0">
+                <a:solidFill>
+                  <a:srgbClr val="1C1B19"/>
+                </a:solidFill>
+                <a:latin typeface="Source Serif 4"/>
+              </a:rPr>
+              <a:t>Some students feel more uneasy when they focus on their breath. Eyes can stay open. Anyone can just sit quietly or look at the clock. Grounding (three things you see, two you hear, one you feel) is the other choice.</a:t>
+            </a:r>
+          </a:p>
+          <a:p>
+            <a:pPr algn="l">
+              <a:spcAft>
+                <a:spcPts val="585"/>
+              </a:spcAft>
+            </a:pPr>
+            <a:r>
+              <a:rPr sz="1300" b="0" i="0">
+                <a:solidFill>
+                  <a:srgbClr val="1C1B19"/>
+                </a:solidFill>
+                <a:latin typeface="Source Serif 4"/>
+              </a:rPr>
+              <a:t/>
+            </a:r>
+          </a:p>
+          <a:p>
+            <a:pPr algn="l">
+              <a:spcAft>
+                <a:spcPts val="585"/>
+              </a:spcAft>
+            </a:pPr>
+            <a:r>
+              <a:rPr sz="1500" b="1" i="0">
+                <a:solidFill>
+                  <a:srgbClr val="1C1B19"/>
+                </a:solidFill>
+                <a:latin typeface="Source Serif 4"/>
+              </a:rPr>
+              <a:t>Know what panic looks like.</a:t>
+            </a:r>
+          </a:p>
+          <a:p>
+            <a:pPr algn="l">
+              <a:spcAft>
+                <a:spcPts val="585"/>
+              </a:spcAft>
+            </a:pPr>
+            <a:r>
+              <a:rPr sz="1300" b="0" i="0">
+                <a:solidFill>
+                  <a:srgbClr val="1C1B19"/>
+                </a:solidFill>
+                <a:latin typeface="Source Serif 4"/>
+              </a:rPr>
+              <a:t>If a student feels sick, panicky or can't settle, let them step out with a pass to the nurse or a counselor. Before class, know who's free that period.</a:t>
+            </a:r>
+          </a:p>
+          <a:p>
+            <a:pPr algn="l">
+              <a:spcAft>
+                <a:spcPts val="585"/>
+              </a:spcAft>
+            </a:pPr>
+            <a:r>
+              <a:rPr sz="1300" b="0" i="0">
+                <a:solidFill>
+                  <a:srgbClr val="1C1B19"/>
+                </a:solidFill>
+                <a:latin typeface="Source Serif 4"/>
+              </a:rPr>
+              <a:t/>
+            </a:r>
+          </a:p>
+        </p:txBody>
+      </p:sp>
+      <p:sp>
+        <p:nvSpPr>
+          <p:cNvPr id="6" name="TextBox 5"/>
+          <p:cNvSpPr txBox="1"/>
+          <p:nvPr/>
+        </p:nvSpPr>
+        <p:spPr>
+          <a:xfrm>
+            <a:off x="6217920" y="1463040"/>
+            <a:ext cx="5394960" cy="4937760"/>
+          </a:xfrm>
+          <a:prstGeom prst="rect">
+            <a:avLst/>
+          </a:prstGeom>
+          <a:noFill/>
+        </p:spPr>
+        <p:txBody>
+          <a:bodyPr wrap="square" anchor="t" lIns="0" rIns="0" tIns="0" bIns="0">
+            <a:spAutoFit/>
+          </a:bodyPr>
+          <a:lstStyle/>
+          <a:p>
+            <a:pPr algn="l">
+              <a:spcAft>
+                <a:spcPts val="585"/>
+              </a:spcAft>
+            </a:pPr>
+            <a:r>
+              <a:rPr sz="1500" b="1" i="0">
+                <a:solidFill>
+                  <a:srgbClr val="1C1B19"/>
+                </a:solidFill>
+                <a:latin typeface="Source Serif 4"/>
+              </a:rPr>
+              <a:t>Be honest about the size of it.</a:t>
+            </a:r>
+          </a:p>
+          <a:p>
+            <a:pPr algn="l">
+              <a:spcAft>
+                <a:spcPts val="585"/>
+              </a:spcAft>
+            </a:pPr>
+            <a:r>
+              <a:rPr sz="1300" b="0" i="0">
+                <a:solidFill>
+                  <a:srgbClr val="1C1B19"/>
+                </a:solidFill>
+                <a:latin typeface="Source Serif 4"/>
+              </a:rPr>
+              <a:t>Test anxiety is linked to lower scores, and the effect is small to moderate. Several of these studies were with adults or college students. Anxiety is one factor in a score, never a verdict.</a:t>
+            </a:r>
+          </a:p>
+          <a:p>
+            <a:pPr algn="l">
+              <a:spcAft>
+                <a:spcPts val="585"/>
+              </a:spcAft>
+            </a:pPr>
+            <a:r>
+              <a:rPr sz="1300" b="0" i="0">
+                <a:solidFill>
+                  <a:srgbClr val="1C1B19"/>
+                </a:solidFill>
+                <a:latin typeface="Source Serif 4"/>
+              </a:rPr>
+              <a:t/>
+            </a:r>
+          </a:p>
+          <a:p>
+            <a:pPr algn="l">
+              <a:spcAft>
+                <a:spcPts val="585"/>
+              </a:spcAft>
+            </a:pPr>
+            <a:r>
+              <a:rPr sz="1500" b="1" i="0">
+                <a:solidFill>
+                  <a:srgbClr val="1C1B19"/>
+                </a:solidFill>
+                <a:latin typeface="Source Serif 4"/>
+              </a:rPr>
+              <a:t>Point to accommodations.</a:t>
+            </a:r>
+          </a:p>
+          <a:p>
+            <a:pPr algn="l">
+              <a:spcAft>
+                <a:spcPts val="585"/>
+              </a:spcAft>
+            </a:pPr>
+            <a:r>
+              <a:rPr sz="1300" b="0" i="0">
+                <a:solidFill>
+                  <a:srgbClr val="1C1B19"/>
+                </a:solidFill>
+                <a:latin typeface="Source Serif 4"/>
+              </a:rPr>
+              <a:t>Students who feel sick before most tests, avoid school on test days, or score low even when they know the material should talk to a counselor. Some qualify for extended time or a separate room through a learning plan, and the College Board and ACT review requests through the school.</a:t>
+            </a:r>
+          </a:p>
+          <a:p>
+            <a:pPr algn="l">
+              <a:spcAft>
+                <a:spcPts val="585"/>
+              </a:spcAft>
+            </a:pPr>
+            <a:r>
+              <a:rPr sz="1300" b="0" i="0">
+                <a:solidFill>
+                  <a:srgbClr val="1C1B19"/>
+                </a:solidFill>
+                <a:latin typeface="Source Serif 4"/>
+              </a:rPr>
+              <a:t/>
+            </a:r>
+          </a:p>
+          <a:p>
+            <a:pPr algn="l">
+              <a:spcAft>
+                <a:spcPts val="585"/>
+              </a:spcAft>
+            </a:pPr>
+            <a:r>
+              <a:rPr sz="1500" b="1" i="0">
+                <a:solidFill>
+                  <a:srgbClr val="1C1B19"/>
+                </a:solidFill>
+                <a:latin typeface="Source Serif 4"/>
+              </a:rPr>
+              <a:t>Family pressure is close to the surface.</a:t>
+            </a:r>
+          </a:p>
+          <a:p>
+            <a:pPr algn="l">
+              <a:spcAft>
+                <a:spcPts val="585"/>
+              </a:spcAft>
+            </a:pPr>
+            <a:r>
+              <a:rPr sz="1300" b="0" i="0">
+                <a:solidFill>
+                  <a:srgbClr val="1C1B19"/>
+                </a:solidFill>
+                <a:latin typeface="Source Serif 4"/>
+              </a:rPr>
+              <a:t>Mei's scenario is about a family's sacrifice. Some students feel exactly that. Respect the family and the student's love for them, and keep any reflection on it private. If home pressure sounds frightening, that's a counselor conversation that day.</a:t>
+            </a:r>
+          </a:p>
+          <a:p>
+            <a:pPr algn="l">
+              <a:spcAft>
+                <a:spcPts val="585"/>
+              </a:spcAft>
+            </a:pPr>
+            <a:r>
+              <a:rPr sz="1300" b="0" i="0">
+                <a:solidFill>
+                  <a:srgbClr val="1C1B19"/>
+                </a:solidFill>
+                <a:latin typeface="Source Serif 4"/>
+              </a:rPr>
+              <a:t/>
+            </a:r>
+          </a:p>
+        </p:txBody>
+      </p:sp>
+    </p:spTree>
+  </p:cSld>
+  <p:clrMapOvr>
+    <a:masterClrMapping/>
+  </p:clrMapOvr>
+</p:sld>
+</file>
+
+<file path=ppt/slides/slide13.xml><?xml version="1.0" encoding="utf-8"?>
+<p:sld xmlns:a="http://schemas.openxmlformats.org/drawingml/2006/main" xmlns:p="http://schemas.openxmlformats.org/presentationml/2006/main" xmlns:r="http://schemas.openxmlformats.org/officeDocument/2006/relationships" show="0">
+  <p:cSld>
+    <p:bg>
+      <p:bgPr>
+        <a:solidFill>
+          <a:srgbClr val="EEEBE4"/>
+        </a:solidFill>
+        <a:effectLst/>
+      </p:bgPr>
+    </p:bg>
+    <p:spTree>
+      <p:nvGrpSpPr>
+        <p:cNvPr id="1" name=""/>
+        <p:cNvGrpSpPr/>
+        <p:nvPr/>
+      </p:nvGrpSpPr>
+      <p:grpSpPr/>
+      <p:sp>
+        <p:nvSpPr>
+          <p:cNvPr id="2" name="Rectangle 1"/>
+          <p:cNvSpPr/>
+          <p:nvPr/>
+        </p:nvSpPr>
+        <p:spPr>
+          <a:xfrm>
+            <a:off x="0" y="0"/>
+            <a:ext cx="12191695" cy="384048"/>
+          </a:xfrm>
+          <a:prstGeom prst="rect">
+            <a:avLst/>
+          </a:prstGeom>
+          <a:solidFill>
+            <a:srgbClr val="0B2D5B"/>
+          </a:solidFill>
+          <a:ln>
+            <a:noFill/>
+          </a:ln>
+          <a:effectLst/>
+        </p:spPr>
+        <p:style>
+          <a:lnRef idx="1">
+            <a:schemeClr val="accent1"/>
+          </a:lnRef>
+          <a:fillRef idx="3">
+            <a:schemeClr val="accent1"/>
+          </a:fillRef>
+          <a:effectRef idx="2">
+            <a:schemeClr val="accent1"/>
+          </a:effectRef>
+          <a:fontRef idx="minor">
+            <a:schemeClr val="lt1"/>
+          </a:fontRef>
+        </p:style>
+        <p:txBody>
+          <a:bodyPr rtlCol="0" anchor="ctr"/>
+          <a:lstStyle/>
+          <a:p>
+            <a:pPr algn="ctr"/>
+          </a:p>
+        </p:txBody>
+      </p:sp>
+      <p:sp>
+        <p:nvSpPr>
+          <p:cNvPr id="3" name="TextBox 2"/>
+          <p:cNvSpPr txBox="1"/>
+          <p:nvPr/>
+        </p:nvSpPr>
+        <p:spPr>
+          <a:xfrm>
+            <a:off x="548640" y="100584"/>
+            <a:ext cx="10972800" cy="274320"/>
+          </a:xfrm>
+          <a:prstGeom prst="rect">
+            <a:avLst/>
+          </a:prstGeom>
+          <a:noFill/>
+        </p:spPr>
+        <p:txBody>
+          <a:bodyPr wrap="square" anchor="t" lIns="0" rIns="0" tIns="0" bIns="0">
+            <a:spAutoFit/>
+          </a:bodyPr>
+          <a:lstStyle/>
+          <a:p>
+            <a:pPr algn="l">
+              <a:spcAft>
+                <a:spcPts val="495"/>
+              </a:spcAft>
+            </a:pPr>
+            <a:r>
+              <a:rPr sz="1100" b="1" i="0">
+                <a:solidFill>
+                  <a:srgbClr val="FFFFFF"/>
+                </a:solidFill>
+                <a:latin typeface="Inter Tight"/>
+              </a:rPr>
+              <a:t>TEACHER PAGE  ·  skipped when you present  ·  Every student in the room</a:t>
+            </a:r>
+          </a:p>
+        </p:txBody>
+      </p:sp>
+      <p:sp>
+        <p:nvSpPr>
+          <p:cNvPr id="4" name="TextBox 3"/>
+          <p:cNvSpPr txBox="1"/>
+          <p:nvPr/>
+        </p:nvSpPr>
+        <p:spPr>
+          <a:xfrm>
+            <a:off x="548640" y="685800"/>
+            <a:ext cx="10972800" cy="640080"/>
+          </a:xfrm>
+          <a:prstGeom prst="rect">
+            <a:avLst/>
+          </a:prstGeom>
+          <a:noFill/>
+        </p:spPr>
+        <p:txBody>
+          <a:bodyPr wrap="square" anchor="t" lIns="0" rIns="0" tIns="0" bIns="0">
+            <a:spAutoFit/>
+          </a:bodyPr>
+          <a:lstStyle/>
+          <a:p>
+            <a:pPr algn="l">
+              <a:spcAft>
+                <a:spcPts val="1350"/>
+              </a:spcAft>
+            </a:pPr>
+            <a:r>
+              <a:rPr sz="3000" b="1" i="0">
+                <a:solidFill>
+                  <a:srgbClr val="1C1B19"/>
+                </a:solidFill>
+                <a:latin typeface="Source Serif 4"/>
+              </a:rPr>
+              <a:t>Every student in the room</a:t>
+            </a:r>
+          </a:p>
+        </p:txBody>
+      </p:sp>
+      <p:sp>
+        <p:nvSpPr>
+          <p:cNvPr id="5" name="TextBox 4"/>
+          <p:cNvSpPr txBox="1"/>
+          <p:nvPr/>
+        </p:nvSpPr>
+        <p:spPr>
+          <a:xfrm>
+            <a:off x="548640" y="1325880"/>
+            <a:ext cx="10972800" cy="365760"/>
+          </a:xfrm>
+          <a:prstGeom prst="rect">
+            <a:avLst/>
+          </a:prstGeom>
+          <a:noFill/>
+        </p:spPr>
+        <p:txBody>
+          <a:bodyPr wrap="square" anchor="t" lIns="0" rIns="0" tIns="0" bIns="0">
+            <a:spAutoFit/>
+          </a:bodyPr>
+          <a:lstStyle/>
+          <a:p>
+            <a:pPr algn="l">
+              <a:spcAft>
+                <a:spcPts val="630"/>
+              </a:spcAft>
+            </a:pPr>
+            <a:r>
+              <a:rPr sz="1400" b="0" i="0">
+                <a:solidFill>
+                  <a:srgbClr val="5D5A54"/>
+                </a:solidFill>
+                <a:latin typeface="Inter Tight"/>
+              </a:rPr>
+              <a:t>Culture, family, identity, ability and money: what to keep in mind for this topic.</a:t>
+            </a:r>
+          </a:p>
+        </p:txBody>
+      </p:sp>
+      <p:sp>
+        <p:nvSpPr>
+          <p:cNvPr id="6" name="TextBox 5"/>
+          <p:cNvSpPr txBox="1"/>
+          <p:nvPr/>
+        </p:nvSpPr>
+        <p:spPr>
+          <a:xfrm>
+            <a:off x="548640" y="1828800"/>
+            <a:ext cx="5394960" cy="4572000"/>
+          </a:xfrm>
+          <a:prstGeom prst="rect">
+            <a:avLst/>
+          </a:prstGeom>
+          <a:noFill/>
+        </p:spPr>
+        <p:txBody>
+          <a:bodyPr wrap="square" anchor="t" lIns="0" rIns="0" tIns="0" bIns="0">
+            <a:spAutoFit/>
+          </a:bodyPr>
+          <a:lstStyle/>
+          <a:p>
+            <a:pPr algn="l">
+              <a:spcAft>
+                <a:spcPts val="585"/>
+              </a:spcAft>
+            </a:pPr>
+            <a:r>
+              <a:rPr sz="1500" b="1" i="0">
+                <a:solidFill>
+                  <a:srgbClr val="1C1B19"/>
+                </a:solidFill>
+                <a:latin typeface="Source Serif 4"/>
+              </a:rPr>
+              <a:t>Stakes that belong to the whole family.</a:t>
+            </a:r>
+          </a:p>
+          <a:p>
+            <a:pPr algn="l">
+              <a:spcAft>
+                <a:spcPts val="585"/>
+              </a:spcAft>
+            </a:pPr>
+            <a:r>
+              <a:rPr sz="1300" b="0" i="0">
+                <a:solidFill>
+                  <a:srgbClr val="1C1B19"/>
+                </a:solidFill>
+                <a:latin typeface="Source Serif 4"/>
+              </a:rPr>
+              <a:t>For some students, a score feels like it belongs to parents who sacrificed, or to being the first in the family to take a big test. That can motivate and weigh at once. Don't tell students to stop caring. Help them name it, privately, and talk to someone they trust.</a:t>
+            </a:r>
+          </a:p>
+          <a:p>
+            <a:pPr algn="l">
+              <a:spcAft>
+                <a:spcPts val="585"/>
+              </a:spcAft>
+            </a:pPr>
+            <a:r>
+              <a:rPr sz="1300" b="0" i="0">
+                <a:solidFill>
+                  <a:srgbClr val="1C1B19"/>
+                </a:solidFill>
+                <a:latin typeface="Source Serif 4"/>
+              </a:rPr>
+              <a:t/>
+            </a:r>
+          </a:p>
+          <a:p>
+            <a:pPr algn="l">
+              <a:spcAft>
+                <a:spcPts val="585"/>
+              </a:spcAft>
+            </a:pPr>
+            <a:r>
+              <a:rPr sz="1500" b="1" i="0">
+                <a:solidFill>
+                  <a:srgbClr val="1C1B19"/>
+                </a:solidFill>
+                <a:latin typeface="Source Serif 4"/>
+              </a:rPr>
+              <a:t>Disability and neurodivergence.</a:t>
+            </a:r>
+          </a:p>
+          <a:p>
+            <a:pPr algn="l">
+              <a:spcAft>
+                <a:spcPts val="585"/>
+              </a:spcAft>
+            </a:pPr>
+            <a:r>
+              <a:rPr sz="1300" b="0" i="0">
+                <a:solidFill>
+                  <a:srgbClr val="1C1B19"/>
+                </a:solidFill>
+                <a:latin typeface="Source Serif 4"/>
+              </a:rPr>
+              <a:t>Students with ADHD, anxiety disorders, learning differences or slower processing may already have accommodations or need them. Mention learning plans as a normal, available support. The worry write can be typed, spoken or drawn as a list.</a:t>
+            </a:r>
+          </a:p>
+          <a:p>
+            <a:pPr algn="l">
+              <a:spcAft>
+                <a:spcPts val="585"/>
+              </a:spcAft>
+            </a:pPr>
+            <a:r>
+              <a:rPr sz="1300" b="0" i="0">
+                <a:solidFill>
+                  <a:srgbClr val="1C1B19"/>
+                </a:solidFill>
+                <a:latin typeface="Source Serif 4"/>
+              </a:rPr>
+              <a:t/>
+            </a:r>
+          </a:p>
+          <a:p>
+            <a:pPr algn="l">
+              <a:spcAft>
+                <a:spcPts val="585"/>
+              </a:spcAft>
+            </a:pPr>
+            <a:r>
+              <a:rPr sz="1500" b="1" i="0">
+                <a:solidFill>
+                  <a:srgbClr val="1C1B19"/>
+                </a:solidFill>
+                <a:latin typeface="Source Serif 4"/>
+              </a:rPr>
+              <a:t>Testing in a second language.</a:t>
+            </a:r>
+          </a:p>
+          <a:p>
+            <a:pPr algn="l">
+              <a:spcAft>
+                <a:spcPts val="585"/>
+              </a:spcAft>
+            </a:pPr>
+            <a:r>
+              <a:rPr sz="1300" b="0" i="0">
+                <a:solidFill>
+                  <a:srgbClr val="1C1B19"/>
+                </a:solidFill>
+                <a:latin typeface="Source Serif 4"/>
+              </a:rPr>
+              <a:t>A student learning English is doing extra work on every question, and stress takes up the same working memory. The worry write works in any language. Ask the student's teacher or counselor about language supports on tests.</a:t>
+            </a:r>
+          </a:p>
+          <a:p>
+            <a:pPr algn="l">
+              <a:spcAft>
+                <a:spcPts val="585"/>
+              </a:spcAft>
+            </a:pPr>
+            <a:r>
+              <a:rPr sz="1300" b="0" i="0">
+                <a:solidFill>
+                  <a:srgbClr val="1C1B19"/>
+                </a:solidFill>
+                <a:latin typeface="Source Serif 4"/>
+              </a:rPr>
+              <a:t/>
+            </a:r>
+          </a:p>
+        </p:txBody>
+      </p:sp>
+      <p:sp>
+        <p:nvSpPr>
+          <p:cNvPr id="7" name="TextBox 6"/>
+          <p:cNvSpPr txBox="1"/>
+          <p:nvPr/>
+        </p:nvSpPr>
+        <p:spPr>
+          <a:xfrm>
+            <a:off x="6217920" y="1828800"/>
+            <a:ext cx="5394960" cy="4572000"/>
+          </a:xfrm>
+          <a:prstGeom prst="rect">
+            <a:avLst/>
+          </a:prstGeom>
+          <a:noFill/>
+        </p:spPr>
+        <p:txBody>
+          <a:bodyPr wrap="square" anchor="t" lIns="0" rIns="0" tIns="0" bIns="0">
+            <a:spAutoFit/>
+          </a:bodyPr>
+          <a:lstStyle/>
+          <a:p>
+            <a:pPr algn="l">
+              <a:spcAft>
+                <a:spcPts val="585"/>
+              </a:spcAft>
+            </a:pPr>
+            <a:r>
+              <a:rPr sz="1500" b="1" i="0">
+                <a:solidFill>
+                  <a:srgbClr val="1C1B19"/>
+                </a:solidFill>
+                <a:latin typeface="Source Serif 4"/>
+              </a:rPr>
+              <a:t>Prep costs money. These moves don't.</a:t>
+            </a:r>
+          </a:p>
+          <a:p>
+            <a:pPr algn="l">
+              <a:spcAft>
+                <a:spcPts val="585"/>
+              </a:spcAft>
+            </a:pPr>
+            <a:r>
+              <a:rPr sz="1300" b="0" i="0">
+                <a:solidFill>
+                  <a:srgbClr val="1C1B19"/>
+                </a:solidFill>
+                <a:latin typeface="Source Serif 4"/>
+              </a:rPr>
+              <a:t>Some classmates have paid tutors or prep courses. Everything in this lesson is free: practice testing with old quizzes, timed practice at home, sleep, the long exhale, the worry write.</a:t>
+            </a:r>
+          </a:p>
+          <a:p>
+            <a:pPr algn="l">
+              <a:spcAft>
+                <a:spcPts val="585"/>
+              </a:spcAft>
+            </a:pPr>
+            <a:r>
+              <a:rPr sz="1300" b="0" i="0">
+                <a:solidFill>
+                  <a:srgbClr val="1C1B19"/>
+                </a:solidFill>
+                <a:latin typeface="Source Serif 4"/>
+              </a:rPr>
+              <a:t/>
+            </a:r>
+          </a:p>
+          <a:p>
+            <a:pPr algn="l">
+              <a:spcAft>
+                <a:spcPts val="585"/>
+              </a:spcAft>
+            </a:pPr>
+            <a:r>
+              <a:rPr sz="1500" b="1" i="0">
+                <a:solidFill>
+                  <a:srgbClr val="1C1B19"/>
+                </a:solidFill>
+                <a:latin typeface="Source Serif 4"/>
+              </a:rPr>
+              <a:t>Faith and what grounds a student.</a:t>
+            </a:r>
+          </a:p>
+          <a:p>
+            <a:pPr algn="l">
+              <a:spcAft>
+                <a:spcPts val="585"/>
+              </a:spcAft>
+            </a:pPr>
+            <a:r>
+              <a:rPr sz="1300" b="0" i="0">
+                <a:solidFill>
+                  <a:srgbClr val="1C1B19"/>
+                </a:solidFill>
+                <a:latin typeface="Source Serif 4"/>
+              </a:rPr>
+              <a:t>"I'm getting ready" can sit beside a prayer, a phrase from home, or whatever grounds a student. Fasting or religious holidays during exam weeks can affect sleep and energy; a student can plan practice around them and talk with a teacher early.</a:t>
+            </a:r>
+          </a:p>
+          <a:p>
+            <a:pPr algn="l">
+              <a:spcAft>
+                <a:spcPts val="585"/>
+              </a:spcAft>
+            </a:pPr>
+            <a:r>
+              <a:rPr sz="1300" b="0" i="0">
+                <a:solidFill>
+                  <a:srgbClr val="1C1B19"/>
+                </a:solidFill>
+                <a:latin typeface="Source Serif 4"/>
+              </a:rPr>
+              <a:t/>
+            </a:r>
+          </a:p>
+          <a:p>
+            <a:pPr algn="l">
+              <a:spcAft>
+                <a:spcPts val="585"/>
+              </a:spcAft>
+            </a:pPr>
+            <a:r>
+              <a:rPr sz="1500" b="1" i="0">
+                <a:solidFill>
+                  <a:srgbClr val="1C1B19"/>
+                </a:solidFill>
+                <a:latin typeface="Source Serif 4"/>
+              </a:rPr>
+              <a:t>Who the trusted person is.</a:t>
+            </a:r>
+          </a:p>
+          <a:p>
+            <a:pPr algn="l">
+              <a:spcAft>
+                <a:spcPts val="585"/>
+              </a:spcAft>
+            </a:pPr>
+            <a:r>
+              <a:rPr sz="1300" b="0" i="0">
+                <a:solidFill>
+                  <a:srgbClr val="1C1B19"/>
+                </a:solidFill>
+                <a:latin typeface="Source Serif 4"/>
+              </a:rPr>
+              <a:t>"Talk with someone you trust" might be a grandparent, an older sibling, a coach, a foster parent, or a friend. Don't assume two parents or a parent at home in any scenario.</a:t>
+            </a:r>
+          </a:p>
+          <a:p>
+            <a:pPr algn="l">
+              <a:spcAft>
+                <a:spcPts val="585"/>
+              </a:spcAft>
+            </a:pPr>
+            <a:r>
+              <a:rPr sz="1300" b="0" i="0">
+                <a:solidFill>
+                  <a:srgbClr val="1C1B19"/>
+                </a:solidFill>
+                <a:latin typeface="Source Serif 4"/>
+              </a:rPr>
+              <a:t/>
+            </a:r>
+          </a:p>
+        </p:txBody>
+      </p:sp>
+    </p:spTree>
+  </p:cSld>
+  <p:clrMapOvr>
+    <a:masterClrMapping/>
+  </p:clrMapOvr>
+</p:sld>
+</file>
+
+<file path=ppt/slides/slide14.xml><?xml version="1.0" encoding="utf-8"?>
+<p:sld xmlns:a="http://schemas.openxmlformats.org/drawingml/2006/main" xmlns:p="http://schemas.openxmlformats.org/presentationml/2006/main" xmlns:r="http://schemas.openxmlformats.org/officeDocument/2006/relationships" show="0">
+  <p:cSld>
+    <p:bg>
+      <p:bgPr>
+        <a:solidFill>
+          <a:srgbClr val="EEEBE4"/>
+        </a:solidFill>
+        <a:effectLst/>
+      </p:bgPr>
+    </p:bg>
+    <p:spTree>
+      <p:nvGrpSpPr>
+        <p:cNvPr id="1" name=""/>
+        <p:cNvGrpSpPr/>
+        <p:nvPr/>
+      </p:nvGrpSpPr>
+      <p:grpSpPr/>
+      <p:sp>
+        <p:nvSpPr>
+          <p:cNvPr id="2" name="Rectangle 1"/>
+          <p:cNvSpPr/>
+          <p:nvPr/>
+        </p:nvSpPr>
+        <p:spPr>
+          <a:xfrm>
+            <a:off x="0" y="0"/>
+            <a:ext cx="12191695" cy="384048"/>
+          </a:xfrm>
+          <a:prstGeom prst="rect">
+            <a:avLst/>
+          </a:prstGeom>
+          <a:solidFill>
+            <a:srgbClr val="0B2D5B"/>
+          </a:solidFill>
+          <a:ln>
+            <a:noFill/>
+          </a:ln>
+          <a:effectLst/>
+        </p:spPr>
+        <p:style>
+          <a:lnRef idx="1">
+            <a:schemeClr val="accent1"/>
+          </a:lnRef>
+          <a:fillRef idx="3">
+            <a:schemeClr val="accent1"/>
+          </a:fillRef>
+          <a:effectRef idx="2">
+            <a:schemeClr val="accent1"/>
+          </a:effectRef>
+          <a:fontRef idx="minor">
+            <a:schemeClr val="lt1"/>
+          </a:fontRef>
+        </p:style>
+        <p:txBody>
+          <a:bodyPr rtlCol="0" anchor="ctr"/>
+          <a:lstStyle/>
+          <a:p>
+            <a:pPr algn="ctr"/>
+          </a:p>
+        </p:txBody>
+      </p:sp>
+      <p:sp>
+        <p:nvSpPr>
+          <p:cNvPr id="3" name="TextBox 2"/>
+          <p:cNvSpPr txBox="1"/>
+          <p:nvPr/>
+        </p:nvSpPr>
+        <p:spPr>
+          <a:xfrm>
+            <a:off x="548640" y="100584"/>
+            <a:ext cx="10972800" cy="274320"/>
+          </a:xfrm>
+          <a:prstGeom prst="rect">
+            <a:avLst/>
+          </a:prstGeom>
+          <a:noFill/>
+        </p:spPr>
+        <p:txBody>
+          <a:bodyPr wrap="square" anchor="t" lIns="0" rIns="0" tIns="0" bIns="0">
+            <a:spAutoFit/>
+          </a:bodyPr>
+          <a:lstStyle/>
+          <a:p>
+            <a:pPr algn="l">
+              <a:spcAft>
+                <a:spcPts val="495"/>
+              </a:spcAft>
+            </a:pPr>
+            <a:r>
+              <a:rPr sz="1100" b="1" i="0">
+                <a:solidFill>
+                  <a:srgbClr val="FFFFFF"/>
+                </a:solidFill>
+                <a:latin typeface="Inter Tight"/>
+              </a:rPr>
+              <a:t>TEACHER PAGE  ·  skipped when you present  ·  Background</a:t>
+            </a:r>
+          </a:p>
+        </p:txBody>
+      </p:sp>
+      <p:sp>
+        <p:nvSpPr>
+          <p:cNvPr id="4" name="TextBox 3"/>
+          <p:cNvSpPr txBox="1"/>
+          <p:nvPr/>
+        </p:nvSpPr>
+        <p:spPr>
+          <a:xfrm>
+            <a:off x="548640" y="685800"/>
+            <a:ext cx="10972800" cy="640080"/>
+          </a:xfrm>
+          <a:prstGeom prst="rect">
+            <a:avLst/>
+          </a:prstGeom>
+          <a:noFill/>
+        </p:spPr>
+        <p:txBody>
+          <a:bodyPr wrap="square" anchor="t" lIns="0" rIns="0" tIns="0" bIns="0">
+            <a:spAutoFit/>
+          </a:bodyPr>
+          <a:lstStyle/>
+          <a:p>
+            <a:pPr algn="l">
+              <a:spcAft>
+                <a:spcPts val="1350"/>
+              </a:spcAft>
+            </a:pPr>
+            <a:r>
+              <a:rPr sz="3000" b="1" i="0">
+                <a:solidFill>
+                  <a:srgbClr val="1C1B19"/>
+                </a:solidFill>
+                <a:latin typeface="Source Serif 4"/>
+              </a:rPr>
+              <a:t>What the research says</a:t>
+            </a:r>
+          </a:p>
+        </p:txBody>
+      </p:sp>
+      <p:sp>
+        <p:nvSpPr>
+          <p:cNvPr id="5" name="TextBox 4"/>
+          <p:cNvSpPr txBox="1"/>
+          <p:nvPr/>
+        </p:nvSpPr>
+        <p:spPr>
+          <a:xfrm>
+            <a:off x="548640" y="1463040"/>
+            <a:ext cx="5394960" cy="4937760"/>
+          </a:xfrm>
+          <a:prstGeom prst="rect">
+            <a:avLst/>
+          </a:prstGeom>
+          <a:noFill/>
+        </p:spPr>
+        <p:txBody>
+          <a:bodyPr wrap="square" anchor="t" lIns="0" rIns="0" tIns="0" bIns="0">
+            <a:spAutoFit/>
+          </a:bodyPr>
+          <a:lstStyle/>
+          <a:p>
+            <a:pPr algn="l">
+              <a:spcAft>
+                <a:spcPts val="585"/>
+              </a:spcAft>
+            </a:pPr>
+            <a:r>
+              <a:rPr sz="1300" b="0" i="0">
+                <a:solidFill>
+                  <a:srgbClr val="1C1B19"/>
+                </a:solidFill>
+                <a:latin typeface="Source Serif 4"/>
+              </a:rPr>
+              <a:t>Even mild stress you feel you can't control can quickly weaken the prefrontal cortex, where working memory and reasoning happen.</a:t>
+            </a:r>
+          </a:p>
+          <a:p>
+            <a:pPr algn="l">
+              <a:spcAft>
+                <a:spcPts val="585"/>
+              </a:spcAft>
+            </a:pPr>
+            <a:r>
+              <a:rPr sz="1050" b="0" i="0">
+                <a:solidFill>
+                  <a:srgbClr val="5D5A54"/>
+                </a:solidFill>
+                <a:latin typeface="Inter Tight"/>
+              </a:rPr>
+              <a:t>Arnsten, Nature Reviews Neuroscience, 2009</a:t>
+            </a:r>
+          </a:p>
+          <a:p>
+            <a:pPr algn="l">
+              <a:spcAft>
+                <a:spcPts val="585"/>
+              </a:spcAft>
+            </a:pPr>
+            <a:r>
+              <a:rPr sz="1300" b="0" i="0">
+                <a:solidFill>
+                  <a:srgbClr val="1C1B19"/>
+                </a:solidFill>
+                <a:latin typeface="Source Serif 4"/>
+              </a:rPr>
+              <a:t>A review of 238 studies linked test anxiety to lower scores, with some of the strongest links on entrance exams and state tests in high school. The effects are small to moderate.</a:t>
+            </a:r>
+          </a:p>
+          <a:p>
+            <a:pPr algn="l">
+              <a:spcAft>
+                <a:spcPts val="585"/>
+              </a:spcAft>
+            </a:pPr>
+            <a:r>
+              <a:rPr sz="1050" b="0" i="0">
+                <a:solidFill>
+                  <a:srgbClr val="5D5A54"/>
+                </a:solidFill>
+                <a:latin typeface="Inter Tight"/>
+              </a:rPr>
+              <a:t>von der Embse et al., Journal of Affective Disorders, 2018</a:t>
+            </a:r>
+          </a:p>
+          <a:p>
+            <a:pPr algn="l">
+              <a:spcAft>
+                <a:spcPts val="585"/>
+              </a:spcAft>
+            </a:pPr>
+            <a:r>
+              <a:rPr sz="1300" b="0" i="0">
+                <a:solidFill>
+                  <a:srgbClr val="1C1B19"/>
+                </a:solidFill>
+                <a:latin typeface="Source Serif 4"/>
+              </a:rPr>
+              <a:t>Most people think calming down is the best way to handle nerves. People who told themselves "I am excited" before singing, a speech or a math test felt more excited and performed better than people told to calm down.</a:t>
+            </a:r>
+          </a:p>
+          <a:p>
+            <a:pPr algn="l">
+              <a:spcAft>
+                <a:spcPts val="585"/>
+              </a:spcAft>
+            </a:pPr>
+            <a:r>
+              <a:rPr sz="1050" b="0" i="0">
+                <a:solidFill>
+                  <a:srgbClr val="5D5A54"/>
+                </a:solidFill>
+                <a:latin typeface="Inter Tight"/>
+              </a:rPr>
+              <a:t>Brooks, Journal of Experimental Psychology: General, 2014</a:t>
+            </a:r>
+          </a:p>
+        </p:txBody>
+      </p:sp>
+      <p:sp>
+        <p:nvSpPr>
+          <p:cNvPr id="6" name="TextBox 5"/>
+          <p:cNvSpPr txBox="1"/>
+          <p:nvPr/>
+        </p:nvSpPr>
+        <p:spPr>
+          <a:xfrm>
+            <a:off x="6217920" y="1463040"/>
+            <a:ext cx="5394960" cy="4937760"/>
+          </a:xfrm>
+          <a:prstGeom prst="rect">
+            <a:avLst/>
+          </a:prstGeom>
+          <a:noFill/>
+        </p:spPr>
+        <p:txBody>
+          <a:bodyPr wrap="square" anchor="t" lIns="0" rIns="0" tIns="0" bIns="0">
+            <a:spAutoFit/>
+          </a:bodyPr>
+          <a:lstStyle/>
+          <a:p>
+            <a:pPr algn="l">
+              <a:spcAft>
+                <a:spcPts val="585"/>
+              </a:spcAft>
+            </a:pPr>
+            <a:r>
+              <a:rPr sz="1300" b="0" i="0">
+                <a:solidFill>
+                  <a:srgbClr val="1C1B19"/>
+                </a:solidFill>
+                <a:latin typeface="Source Serif 4"/>
+              </a:rPr>
+              <a:t>Students told that a racing heart can help performance did better on GRE math, in the lab and on their real exam months later.</a:t>
+            </a:r>
+          </a:p>
+          <a:p>
+            <a:pPr algn="l">
+              <a:spcAft>
+                <a:spcPts val="585"/>
+              </a:spcAft>
+            </a:pPr>
+            <a:r>
+              <a:rPr sz="1050" b="0" i="0">
+                <a:solidFill>
+                  <a:srgbClr val="5D5A54"/>
+                </a:solidFill>
+                <a:latin typeface="Inter Tight"/>
+              </a:rPr>
+              <a:t>Jamieson et al., Journal of Experimental Social Psychology, 2010</a:t>
+            </a:r>
+          </a:p>
+          <a:p>
+            <a:pPr algn="l">
+              <a:spcAft>
+                <a:spcPts val="585"/>
+              </a:spcAft>
+            </a:pPr>
+            <a:r>
+              <a:rPr sz="1300" b="0" i="0">
+                <a:solidFill>
+                  <a:srgbClr val="1C1B19"/>
+                </a:solidFill>
+                <a:latin typeface="Source Serif 4"/>
+              </a:rPr>
+              <a:t>People who learned by practice testing kept their memory under acute stress. People who learned by rereading lost more, especially after the stressor.</a:t>
+            </a:r>
+          </a:p>
+          <a:p>
+            <a:pPr algn="l">
+              <a:spcAft>
+                <a:spcPts val="585"/>
+              </a:spcAft>
+            </a:pPr>
+            <a:r>
+              <a:rPr sz="1050" b="0" i="0">
+                <a:solidFill>
+                  <a:srgbClr val="5D5A54"/>
+                </a:solidFill>
+                <a:latin typeface="Inter Tight"/>
+              </a:rPr>
+              <a:t>Smith, Floerke and Thomas, Science, 2016</a:t>
+            </a:r>
+          </a:p>
+          <a:p>
+            <a:pPr algn="l">
+              <a:spcAft>
+                <a:spcPts val="585"/>
+              </a:spcAft>
+            </a:pPr>
+            <a:r>
+              <a:rPr sz="1300" b="0" i="0">
+                <a:solidFill>
+                  <a:srgbClr val="1C1B19"/>
+                </a:solidFill>
+                <a:latin typeface="Source Serif 4"/>
+              </a:rPr>
+              <a:t>High school students who wrote freely about their test worries for about ten minutes before a final scored higher. The most anxious students gained the most.</a:t>
+            </a:r>
+          </a:p>
+          <a:p>
+            <a:pPr algn="l">
+              <a:spcAft>
+                <a:spcPts val="585"/>
+              </a:spcAft>
+            </a:pPr>
+            <a:r>
+              <a:rPr sz="1050" b="0" i="0">
+                <a:solidFill>
+                  <a:srgbClr val="5D5A54"/>
+                </a:solidFill>
+                <a:latin typeface="Inter Tight"/>
+              </a:rPr>
+              <a:t>Ramirez and Beilock, Science, 2011</a:t>
+            </a:r>
+          </a:p>
+        </p:txBody>
+      </p:sp>
+    </p:spTree>
+  </p:cSld>
+  <p:clrMapOvr>
+    <a:masterClrMapping/>
+  </p:clrMapOvr>
+</p:sld>
+</file>
+
+<file path=ppt/slides/slide2.xml><?xml version="1.0" encoding="utf-8"?>
+<p:sld xmlns:a="http://schemas.openxmlformats.org/drawingml/2006/main" xmlns:p="http://schemas.openxmlformats.org/presentationml/2006/main" xmlns:r="http://schemas.openxmlformats.org/officeDocument/2006/relationships">
+  <p:cSld>
+    <p:bg>
+      <p:bgPr>
+        <a:solidFill>
+          <a:srgbClr val="0B2D5B"/>
+        </a:solidFill>
+        <a:effectLst/>
+      </p:bgPr>
+    </p:bg>
+    <p:spTree>
+      <p:nvGrpSpPr>
+        <p:cNvPr id="1" name=""/>
+        <p:cNvGrpSpPr/>
+        <p:nvPr/>
+      </p:nvGrpSpPr>
+      <p:grpSpPr/>
+      <p:sp>
+        <p:nvSpPr>
+          <p:cNvPr id="2" name="Rectangle 1"/>
+          <p:cNvSpPr/>
+          <p:nvPr/>
+        </p:nvSpPr>
+        <p:spPr>
+          <a:xfrm>
+            <a:off x="548640" y="502920"/>
+            <a:ext cx="457200" cy="54864"/>
+          </a:xfrm>
+          <a:prstGeom prst="rect">
+            <a:avLst/>
+          </a:prstGeom>
+          <a:solidFill>
+            <a:srgbClr val="F47B20"/>
+          </a:solidFill>
+          <a:ln>
+            <a:noFill/>
+          </a:ln>
+          <a:effectLst/>
+        </p:spPr>
+        <p:style>
+          <a:lnRef idx="1">
+            <a:schemeClr val="accent1"/>
+          </a:lnRef>
+          <a:fillRef idx="3">
+            <a:schemeClr val="accent1"/>
+          </a:fillRef>
+          <a:effectRef idx="2">
+            <a:schemeClr val="accent1"/>
+          </a:effectRef>
+          <a:fontRef idx="minor">
+            <a:schemeClr val="lt1"/>
+          </a:fontRef>
+        </p:style>
+        <p:txBody>
+          <a:bodyPr rtlCol="0" anchor="ctr"/>
+          <a:lstStyle/>
+          <a:p>
+            <a:pPr algn="ctr"/>
+          </a:p>
+        </p:txBody>
+      </p:sp>
+      <p:sp>
+        <p:nvSpPr>
+          <p:cNvPr id="3" name="TextBox 2"/>
+          <p:cNvSpPr txBox="1"/>
+          <p:nvPr/>
+        </p:nvSpPr>
+        <p:spPr>
+          <a:xfrm>
+            <a:off x="1143000" y="393192"/>
+            <a:ext cx="8229600" cy="274320"/>
+          </a:xfrm>
+          <a:prstGeom prst="rect">
+            <a:avLst/>
+          </a:prstGeom>
+          <a:noFill/>
+        </p:spPr>
+        <p:txBody>
+          <a:bodyPr wrap="square" anchor="t" lIns="0" rIns="0" tIns="0" bIns="0">
+            <a:spAutoFit/>
+          </a:bodyPr>
+          <a:lstStyle/>
+          <a:p>
+            <a:pPr algn="l">
+              <a:spcAft>
+                <a:spcPts val="540"/>
+              </a:spcAft>
+            </a:pPr>
+            <a:r>
+              <a:rPr sz="1200" b="1" i="0">
+                <a:solidFill>
+                  <a:srgbClr val="5D5A54"/>
+                </a:solidFill>
+                <a:latin typeface="Inter Tight"/>
+              </a:rPr>
+              <a:t>WHEN YOUR MIND GOES BLANK</a:t>
+            </a:r>
+          </a:p>
+        </p:txBody>
+      </p:sp>
+      <p:sp>
+        <p:nvSpPr>
+          <p:cNvPr id="4" name="TextBox 3"/>
+          <p:cNvSpPr txBox="1"/>
+          <p:nvPr/>
+        </p:nvSpPr>
+        <p:spPr>
+          <a:xfrm>
+            <a:off x="8229600" y="6400800"/>
+            <a:ext cx="3410712" cy="274320"/>
+          </a:xfrm>
+          <a:prstGeom prst="rect">
+            <a:avLst/>
+          </a:prstGeom>
+          <a:noFill/>
+        </p:spPr>
+        <p:txBody>
+          <a:bodyPr wrap="square" anchor="t" lIns="0" rIns="0" tIns="0" bIns="0">
+            <a:spAutoFit/>
+          </a:bodyPr>
+          <a:lstStyle/>
+          <a:p>
+            <a:pPr algn="r">
+              <a:spcAft>
+                <a:spcPts val="450"/>
+              </a:spcAft>
+            </a:pPr>
+            <a:r>
+              <a:rPr sz="1000" b="0" i="0">
+                <a:solidFill>
+                  <a:srgbClr val="5D5A54"/>
+                </a:solidFill>
+                <a:latin typeface="Inter Tight"/>
+              </a:rPr>
+              <a:t>Beaver Counseling</a:t>
+            </a:r>
+          </a:p>
+        </p:txBody>
+      </p:sp>
+      <p:sp>
+        <p:nvSpPr>
+          <p:cNvPr id="5" name="TextBox 4"/>
+          <p:cNvSpPr txBox="1"/>
+          <p:nvPr/>
+        </p:nvSpPr>
+        <p:spPr>
+          <a:xfrm>
+            <a:off x="822960" y="2011680"/>
+            <a:ext cx="10515600" cy="1463040"/>
+          </a:xfrm>
+          <a:prstGeom prst="rect">
+            <a:avLst/>
+          </a:prstGeom>
+          <a:noFill/>
+        </p:spPr>
+        <p:txBody>
+          <a:bodyPr wrap="square" anchor="b" lIns="0" rIns="0" tIns="0" bIns="0">
+            <a:spAutoFit/>
+          </a:bodyPr>
+          <a:lstStyle/>
+          <a:p>
+            <a:pPr algn="l">
+              <a:spcAft>
+                <a:spcPts val="2700"/>
+              </a:spcAft>
+            </a:pPr>
+            <a:r>
+              <a:rPr sz="6000" b="1" i="0">
+                <a:solidFill>
+                  <a:srgbClr val="FFFFFF"/>
+                </a:solidFill>
+                <a:latin typeface="Source Serif 4"/>
+              </a:rPr>
+              <a:t>When Your Mind Goes Blank</a:t>
+            </a:r>
+          </a:p>
+        </p:txBody>
+      </p:sp>
+      <p:sp>
+        <p:nvSpPr>
+          <p:cNvPr id="6" name="TextBox 5"/>
+          <p:cNvSpPr txBox="1"/>
+          <p:nvPr/>
+        </p:nvSpPr>
+        <p:spPr>
+          <a:xfrm>
+            <a:off x="822960" y="3611880"/>
+            <a:ext cx="10515600" cy="914400"/>
+          </a:xfrm>
+          <a:prstGeom prst="rect">
+            <a:avLst/>
+          </a:prstGeom>
+          <a:noFill/>
+        </p:spPr>
+        <p:txBody>
+          <a:bodyPr wrap="square" anchor="t" lIns="0" rIns="0" tIns="0" bIns="0">
+            <a:spAutoFit/>
+          </a:bodyPr>
+          <a:lstStyle/>
+          <a:p>
+            <a:pPr algn="l">
+              <a:spcAft>
+                <a:spcPts val="1080"/>
+              </a:spcAft>
+            </a:pPr>
+            <a:r>
+              <a:rPr sz="2400" b="0" i="1">
+                <a:solidFill>
+                  <a:srgbClr val="E8E4DA"/>
+                </a:solidFill>
+                <a:latin typeface="Source Serif 4"/>
+              </a:rPr>
+              <a:t>You knew it last night. Here's how to get it back.</a:t>
+            </a:r>
+          </a:p>
+        </p:txBody>
+      </p:sp>
+      <p:sp>
+        <p:nvSpPr>
+          <p:cNvPr id="7" name="TextBox 6"/>
+          <p:cNvSpPr txBox="1"/>
+          <p:nvPr/>
+        </p:nvSpPr>
+        <p:spPr>
+          <a:xfrm>
+            <a:off x="822960" y="6035040"/>
+            <a:ext cx="7315200" cy="365760"/>
+          </a:xfrm>
+          <a:prstGeom prst="rect">
+            <a:avLst/>
+          </a:prstGeom>
+          <a:noFill/>
+        </p:spPr>
+        <p:txBody>
+          <a:bodyPr wrap="square" anchor="t" lIns="0" rIns="0" tIns="0" bIns="0">
+            <a:spAutoFit/>
+          </a:bodyPr>
+          <a:lstStyle/>
+          <a:p>
+            <a:pPr algn="l">
+              <a:spcAft>
+                <a:spcPts val="585"/>
+              </a:spcAft>
+            </a:pPr>
+            <a:r>
+              <a:rPr sz="1300" b="0" i="0">
+                <a:solidFill>
+                  <a:srgbClr val="E8E4DA"/>
+                </a:solidFill>
+                <a:latin typeface="Inter Tight"/>
+              </a:rPr>
+              <a:t>Beaver Upper School · Counseling</a:t>
+            </a:r>
+          </a:p>
+        </p:txBody>
+      </p:sp>
+    </p:spTree>
+  </p:cSld>
+  <p:clrMapOvr>
+    <a:masterClrMapping/>
+  </p:clrMapOvr>
+</p:sld>
+</file>
+
+<file path=ppt/slides/slide3.xml><?xml version="1.0" encoding="utf-8"?>
 <p:sld xmlns:a="http://schemas.openxmlformats.org/drawingml/2006/main" xmlns:p="http://schemas.openxmlformats.org/presentationml/2006/main" xmlns:r="http://schemas.openxmlformats.org/officeDocument/2006/relationships">
   <p:cSld>
     <p:bg>
@@ -5351,7 +7233,7 @@
                 </a:solidFill>
                 <a:latin typeface="Inter Tight"/>
               </a:rPr>
-              <a:t>THREE TEST MOMENTS</a:t>
+              <a:t>MYTH OR FACT?</a:t>
             </a:r>
           </a:p>
         </p:txBody>
@@ -5404,7 +7286,7 @@
         <p:spPr>
           <a:xfrm>
             <a:off x="822960" y="1005840"/>
-            <a:ext cx="10515600" cy="914400"/>
+            <a:ext cx="10515600" cy="1097280"/>
           </a:xfrm>
           <a:prstGeom prst="rect">
             <a:avLst/>
@@ -5419,77 +7301,31 @@
           <a:p>
             <a:pPr algn="l">
               <a:spcAft>
-                <a:spcPts val="1530"/>
-              </a:spcAft>
-            </a:pPr>
-            <a:r>
-              <a:rPr sz="3400" b="1" i="0">
+                <a:spcPts val="1620"/>
+              </a:spcAft>
+            </a:pPr>
+            <a:r>
+              <a:rPr sz="3600" b="1" i="0">
                 <a:solidFill>
                   <a:srgbClr val="1C1B19"/>
                 </a:solidFill>
                 <a:latin typeface="Source Serif 4"/>
               </a:rPr>
-              <a:t>What's the best move?</a:t>
-            </a:r>
-          </a:p>
-        </p:txBody>
-      </p:sp>
-      <p:sp>
-        <p:nvSpPr>
-          <p:cNvPr id="6" name="Rectangle 5"/>
-          <p:cNvSpPr/>
-          <p:nvPr/>
-        </p:nvSpPr>
-        <p:spPr>
-          <a:xfrm>
-            <a:off x="822960" y="2103120"/>
-            <a:ext cx="3322320" cy="3840480"/>
-          </a:xfrm>
-          <a:prstGeom prst="rect">
-            <a:avLst/>
-          </a:prstGeom>
-          <a:solidFill>
-            <a:srgbClr val="FFFFFF"/>
-          </a:solidFill>
-          <a:ln w="15875">
-            <a:solidFill>
-              <a:srgbClr val="D8D2C6"/>
-            </a:solidFill>
-          </a:ln>
-          <a:effectLst/>
-        </p:spPr>
-        <p:style>
-          <a:lnRef idx="1">
-            <a:schemeClr val="accent1"/>
-          </a:lnRef>
-          <a:fillRef idx="3">
-            <a:schemeClr val="accent1"/>
-          </a:fillRef>
-          <a:effectRef idx="2">
-            <a:schemeClr val="accent1"/>
-          </a:effectRef>
-          <a:fontRef idx="minor">
-            <a:schemeClr val="lt1"/>
-          </a:fontRef>
-        </p:style>
-        <p:txBody>
-          <a:bodyPr rtlCol="0" anchor="ctr"/>
-          <a:lstStyle/>
-          <a:p>
-            <a:pPr algn="ctr"/>
-          </a:p>
-        </p:txBody>
-      </p:sp>
-      <p:sp>
-        <p:nvSpPr>
-          <p:cNvPr id="7" name="TextBox 6"/>
+              <a:t>Stand up if you think it's a fact.</a:t>
+            </a:r>
+          </a:p>
+        </p:txBody>
+      </p:sp>
+      <p:sp>
+        <p:nvSpPr>
+          <p:cNvPr id="6" name="TextBox 5"/>
           <p:cNvSpPr txBox="1"/>
           <p:nvPr/>
         </p:nvSpPr>
         <p:spPr>
           <a:xfrm>
-            <a:off x="1051560" y="2286000"/>
-            <a:ext cx="2865120" cy="365760"/>
+            <a:off x="822960" y="2057400"/>
+            <a:ext cx="548640" cy="804672"/>
           </a:xfrm>
           <a:prstGeom prst="rect">
             <a:avLst/>
@@ -5504,31 +7340,31 @@
           <a:p>
             <a:pPr algn="l">
               <a:spcAft>
-                <a:spcPts val="585"/>
-              </a:spcAft>
-            </a:pPr>
-            <a:r>
-              <a:rPr sz="1300" b="1" i="0">
-                <a:solidFill>
-                  <a:srgbClr val="0B2D5B"/>
-                </a:solidFill>
-                <a:latin typeface="Inter Tight"/>
-              </a:rPr>
-              <a:t>TARIQ</a:t>
-            </a:r>
-          </a:p>
-        </p:txBody>
-      </p:sp>
-      <p:sp>
-        <p:nvSpPr>
-          <p:cNvPr id="8" name="TextBox 7"/>
+                <a:spcPts val="1170"/>
+              </a:spcAft>
+            </a:pPr>
+            <a:r>
+              <a:rPr sz="2600" b="1" i="0">
+                <a:solidFill>
+                  <a:srgbClr val="F47B20"/>
+                </a:solidFill>
+                <a:latin typeface="Source Serif 4"/>
+              </a:rPr>
+              <a:t>1</a:t>
+            </a:r>
+          </a:p>
+        </p:txBody>
+      </p:sp>
+      <p:sp>
+        <p:nvSpPr>
+          <p:cNvPr id="7" name="TextBox 6"/>
           <p:cNvSpPr txBox="1"/>
           <p:nvPr/>
         </p:nvSpPr>
         <p:spPr>
           <a:xfrm>
-            <a:off x="1051560" y="2743200"/>
-            <a:ext cx="2865120" cy="3017520"/>
+            <a:off x="1463040" y="2093976"/>
+            <a:ext cx="9875520" cy="804672"/>
           </a:xfrm>
           <a:prstGeom prst="rect">
             <a:avLst/>
@@ -5543,77 +7379,31 @@
           <a:p>
             <a:pPr algn="l">
               <a:spcAft>
-                <a:spcPts val="810"/>
-              </a:spcAft>
-            </a:pPr>
-            <a:r>
-              <a:rPr sz="1800" b="0" i="0">
+                <a:spcPts val="945"/>
+              </a:spcAft>
+            </a:pPr>
+            <a:r>
+              <a:rPr sz="2100" b="1" i="0">
                 <a:solidFill>
                   <a:srgbClr val="1C1B19"/>
                 </a:solidFill>
                 <a:latin typeface="Source Serif 4"/>
               </a:rPr>
-              <a:t>Halfway through his first geometry midterm, a problem he's sure he practiced looks completely unfamiliar. His heart starts pounding.</a:t>
-            </a:r>
-          </a:p>
-        </p:txBody>
-      </p:sp>
-      <p:sp>
-        <p:nvSpPr>
-          <p:cNvPr id="9" name="Rectangle 8"/>
-          <p:cNvSpPr/>
-          <p:nvPr/>
-        </p:nvSpPr>
-        <p:spPr>
-          <a:xfrm>
-            <a:off x="4419600" y="2103120"/>
-            <a:ext cx="3322320" cy="3840480"/>
-          </a:xfrm>
-          <a:prstGeom prst="rect">
-            <a:avLst/>
-          </a:prstGeom>
-          <a:solidFill>
-            <a:srgbClr val="FFFFFF"/>
-          </a:solidFill>
-          <a:ln w="15875">
-            <a:solidFill>
-              <a:srgbClr val="D8D2C6"/>
-            </a:solidFill>
-          </a:ln>
-          <a:effectLst/>
-        </p:spPr>
-        <p:style>
-          <a:lnRef idx="1">
-            <a:schemeClr val="accent1"/>
-          </a:lnRef>
-          <a:fillRef idx="3">
-            <a:schemeClr val="accent1"/>
-          </a:fillRef>
-          <a:effectRef idx="2">
-            <a:schemeClr val="accent1"/>
-          </a:effectRef>
-          <a:fontRef idx="minor">
-            <a:schemeClr val="lt1"/>
-          </a:fontRef>
-        </p:style>
-        <p:txBody>
-          <a:bodyPr rtlCol="0" anchor="ctr"/>
-          <a:lstStyle/>
-          <a:p>
-            <a:pPr algn="ctr"/>
-          </a:p>
-        </p:txBody>
-      </p:sp>
-      <p:sp>
-        <p:nvSpPr>
-          <p:cNvPr id="10" name="TextBox 9"/>
+              <a:t>You have to be calm to do well on a test.</a:t>
+            </a:r>
+          </a:p>
+        </p:txBody>
+      </p:sp>
+      <p:sp>
+        <p:nvSpPr>
+          <p:cNvPr id="8" name="TextBox 7"/>
           <p:cNvSpPr txBox="1"/>
           <p:nvPr/>
         </p:nvSpPr>
         <p:spPr>
           <a:xfrm>
-            <a:off x="4648200" y="2286000"/>
-            <a:ext cx="2865120" cy="365760"/>
+            <a:off x="822960" y="2862072"/>
+            <a:ext cx="548640" cy="804672"/>
           </a:xfrm>
           <a:prstGeom prst="rect">
             <a:avLst/>
@@ -5628,31 +7418,31 @@
           <a:p>
             <a:pPr algn="l">
               <a:spcAft>
-                <a:spcPts val="585"/>
-              </a:spcAft>
-            </a:pPr>
-            <a:r>
-              <a:rPr sz="1300" b="1" i="0">
-                <a:solidFill>
-                  <a:srgbClr val="0B2D5B"/>
-                </a:solidFill>
-                <a:latin typeface="Inter Tight"/>
-              </a:rPr>
-              <a:t>ANA</a:t>
-            </a:r>
-          </a:p>
-        </p:txBody>
-      </p:sp>
-      <p:sp>
-        <p:nvSpPr>
-          <p:cNvPr id="11" name="TextBox 10"/>
+                <a:spcPts val="1170"/>
+              </a:spcAft>
+            </a:pPr>
+            <a:r>
+              <a:rPr sz="2600" b="1" i="0">
+                <a:solidFill>
+                  <a:srgbClr val="F47B20"/>
+                </a:solidFill>
+                <a:latin typeface="Source Serif 4"/>
+              </a:rPr>
+              <a:t>2</a:t>
+            </a:r>
+          </a:p>
+        </p:txBody>
+      </p:sp>
+      <p:sp>
+        <p:nvSpPr>
+          <p:cNvPr id="9" name="TextBox 8"/>
           <p:cNvSpPr txBox="1"/>
           <p:nvPr/>
         </p:nvSpPr>
         <p:spPr>
           <a:xfrm>
-            <a:off x="4648200" y="2743200"/>
-            <a:ext cx="2865120" cy="3017520"/>
+            <a:off x="1463040" y="2898648"/>
+            <a:ext cx="9875520" cy="804672"/>
           </a:xfrm>
           <a:prstGeom prst="rect">
             <a:avLst/>
@@ -5667,77 +7457,31 @@
           <a:p>
             <a:pPr algn="l">
               <a:spcAft>
-                <a:spcPts val="810"/>
-              </a:spcAft>
-            </a:pPr>
-            <a:r>
-              <a:rPr sz="1800" b="0" i="0">
+                <a:spcPts val="945"/>
+              </a:spcAft>
+            </a:pPr>
+            <a:r>
+              <a:rPr sz="2100" b="1" i="0">
                 <a:solidFill>
                   <a:srgbClr val="1C1B19"/>
                 </a:solidFill>
                 <a:latin typeface="Source Serif 4"/>
               </a:rPr>
-              <a:t>Has a Spanish oral exam tomorrow. She blanked on the last one and keeps replaying the moment the teacher waited.</a:t>
-            </a:r>
-          </a:p>
-        </p:txBody>
-      </p:sp>
-      <p:sp>
-        <p:nvSpPr>
-          <p:cNvPr id="12" name="Rectangle 11"/>
-          <p:cNvSpPr/>
-          <p:nvPr/>
-        </p:nvSpPr>
-        <p:spPr>
-          <a:xfrm>
-            <a:off x="8016239" y="2103120"/>
-            <a:ext cx="3322320" cy="3840480"/>
-          </a:xfrm>
-          <a:prstGeom prst="rect">
-            <a:avLst/>
-          </a:prstGeom>
-          <a:solidFill>
-            <a:srgbClr val="FFFFFF"/>
-          </a:solidFill>
-          <a:ln w="15875">
-            <a:solidFill>
-              <a:srgbClr val="D8D2C6"/>
-            </a:solidFill>
-          </a:ln>
-          <a:effectLst/>
-        </p:spPr>
-        <p:style>
-          <a:lnRef idx="1">
-            <a:schemeClr val="accent1"/>
-          </a:lnRef>
-          <a:fillRef idx="3">
-            <a:schemeClr val="accent1"/>
-          </a:fillRef>
-          <a:effectRef idx="2">
-            <a:schemeClr val="accent1"/>
-          </a:effectRef>
-          <a:fontRef idx="minor">
-            <a:schemeClr val="lt1"/>
-          </a:fontRef>
-        </p:style>
-        <p:txBody>
-          <a:bodyPr rtlCol="0" anchor="ctr"/>
-          <a:lstStyle/>
-          <a:p>
-            <a:pPr algn="ctr"/>
-          </a:p>
-        </p:txBody>
-      </p:sp>
-      <p:sp>
-        <p:nvSpPr>
-          <p:cNvPr id="13" name="TextBox 12"/>
+              <a:t>If you're anxious, you didn't study enough.</a:t>
+            </a:r>
+          </a:p>
+        </p:txBody>
+      </p:sp>
+      <p:sp>
+        <p:nvSpPr>
+          <p:cNvPr id="10" name="TextBox 9"/>
           <p:cNvSpPr txBox="1"/>
           <p:nvPr/>
         </p:nvSpPr>
         <p:spPr>
           <a:xfrm>
-            <a:off x="8244839" y="2286000"/>
-            <a:ext cx="2865120" cy="365760"/>
+            <a:off x="822960" y="3666744"/>
+            <a:ext cx="548640" cy="804672"/>
           </a:xfrm>
           <a:prstGeom prst="rect">
             <a:avLst/>
@@ -5752,31 +7496,31 @@
           <a:p>
             <a:pPr algn="l">
               <a:spcAft>
-                <a:spcPts val="585"/>
-              </a:spcAft>
-            </a:pPr>
-            <a:r>
-              <a:rPr sz="1300" b="1" i="0">
-                <a:solidFill>
-                  <a:srgbClr val="0B2D5B"/>
-                </a:solidFill>
-                <a:latin typeface="Inter Tight"/>
-              </a:rPr>
-              <a:t>MEI</a:t>
-            </a:r>
-          </a:p>
-        </p:txBody>
-      </p:sp>
-      <p:sp>
-        <p:nvSpPr>
-          <p:cNvPr id="14" name="TextBox 13"/>
+                <a:spcPts val="1170"/>
+              </a:spcAft>
+            </a:pPr>
+            <a:r>
+              <a:rPr sz="2600" b="1" i="0">
+                <a:solidFill>
+                  <a:srgbClr val="F47B20"/>
+                </a:solidFill>
+                <a:latin typeface="Source Serif 4"/>
+              </a:rPr>
+              <a:t>3</a:t>
+            </a:r>
+          </a:p>
+        </p:txBody>
+      </p:sp>
+      <p:sp>
+        <p:nvSpPr>
+          <p:cNvPr id="11" name="TextBox 10"/>
           <p:cNvSpPr txBox="1"/>
           <p:nvPr/>
         </p:nvSpPr>
         <p:spPr>
           <a:xfrm>
-            <a:off x="8244839" y="2743200"/>
-            <a:ext cx="2865120" cy="3017520"/>
+            <a:off x="1463040" y="3703320"/>
+            <a:ext cx="9875520" cy="804672"/>
           </a:xfrm>
           <a:prstGeom prst="rect">
             <a:avLst/>
@@ -5791,17 +7535,173 @@
           <a:p>
             <a:pPr algn="l">
               <a:spcAft>
-                <a:spcPts val="810"/>
-              </a:spcAft>
-            </a:pPr>
-            <a:r>
-              <a:rPr sz="1800" b="0" i="0">
+                <a:spcPts val="945"/>
+              </a:spcAft>
+            </a:pPr>
+            <a:r>
+              <a:rPr sz="2100" b="1" i="0">
                 <a:solidFill>
                   <a:srgbClr val="1C1B19"/>
                 </a:solidFill>
                 <a:latin typeface="Source Serif 4"/>
               </a:rPr>
-              <a:t>Her family moved so she could go to this school. She feels her biology final belongs to them too. It's midnight and she can't stop studying.</a:t>
+              <a:t>When you blank, the information is gone.</a:t>
+            </a:r>
+          </a:p>
+        </p:txBody>
+      </p:sp>
+      <p:sp>
+        <p:nvSpPr>
+          <p:cNvPr id="12" name="TextBox 11"/>
+          <p:cNvSpPr txBox="1"/>
+          <p:nvPr/>
+        </p:nvSpPr>
+        <p:spPr>
+          <a:xfrm>
+            <a:off x="822960" y="4471416"/>
+            <a:ext cx="548640" cy="804672"/>
+          </a:xfrm>
+          <a:prstGeom prst="rect">
+            <a:avLst/>
+          </a:prstGeom>
+          <a:noFill/>
+        </p:spPr>
+        <p:txBody>
+          <a:bodyPr wrap="square" anchor="t" lIns="0" rIns="0" tIns="0" bIns="0">
+            <a:spAutoFit/>
+          </a:bodyPr>
+          <a:lstStyle/>
+          <a:p>
+            <a:pPr algn="l">
+              <a:spcAft>
+                <a:spcPts val="1170"/>
+              </a:spcAft>
+            </a:pPr>
+            <a:r>
+              <a:rPr sz="2600" b="1" i="0">
+                <a:solidFill>
+                  <a:srgbClr val="F47B20"/>
+                </a:solidFill>
+                <a:latin typeface="Source Serif 4"/>
+              </a:rPr>
+              <a:t>4</a:t>
+            </a:r>
+          </a:p>
+        </p:txBody>
+      </p:sp>
+      <p:sp>
+        <p:nvSpPr>
+          <p:cNvPr id="13" name="TextBox 12"/>
+          <p:cNvSpPr txBox="1"/>
+          <p:nvPr/>
+        </p:nvSpPr>
+        <p:spPr>
+          <a:xfrm>
+            <a:off x="1463040" y="4507992"/>
+            <a:ext cx="9875520" cy="804672"/>
+          </a:xfrm>
+          <a:prstGeom prst="rect">
+            <a:avLst/>
+          </a:prstGeom>
+          <a:noFill/>
+        </p:spPr>
+        <p:txBody>
+          <a:bodyPr wrap="square" anchor="t" lIns="0" rIns="0" tIns="0" bIns="0">
+            <a:spAutoFit/>
+          </a:bodyPr>
+          <a:lstStyle/>
+          <a:p>
+            <a:pPr algn="l">
+              <a:spcAft>
+                <a:spcPts val="945"/>
+              </a:spcAft>
+            </a:pPr>
+            <a:r>
+              <a:rPr sz="2100" b="1" i="0">
+                <a:solidFill>
+                  <a:srgbClr val="1C1B19"/>
+                </a:solidFill>
+                <a:latin typeface="Source Serif 4"/>
+              </a:rPr>
+              <a:t>Writing about your worries before a test can raise your score.</a:t>
+            </a:r>
+          </a:p>
+        </p:txBody>
+      </p:sp>
+      <p:sp>
+        <p:nvSpPr>
+          <p:cNvPr id="14" name="TextBox 13"/>
+          <p:cNvSpPr txBox="1"/>
+          <p:nvPr/>
+        </p:nvSpPr>
+        <p:spPr>
+          <a:xfrm>
+            <a:off x="822960" y="5276088"/>
+            <a:ext cx="548640" cy="804672"/>
+          </a:xfrm>
+          <a:prstGeom prst="rect">
+            <a:avLst/>
+          </a:prstGeom>
+          <a:noFill/>
+        </p:spPr>
+        <p:txBody>
+          <a:bodyPr wrap="square" anchor="t" lIns="0" rIns="0" tIns="0" bIns="0">
+            <a:spAutoFit/>
+          </a:bodyPr>
+          <a:lstStyle/>
+          <a:p>
+            <a:pPr algn="l">
+              <a:spcAft>
+                <a:spcPts val="1170"/>
+              </a:spcAft>
+            </a:pPr>
+            <a:r>
+              <a:rPr sz="2600" b="1" i="0">
+                <a:solidFill>
+                  <a:srgbClr val="F47B20"/>
+                </a:solidFill>
+                <a:latin typeface="Source Serif 4"/>
+              </a:rPr>
+              <a:t>5</a:t>
+            </a:r>
+          </a:p>
+        </p:txBody>
+      </p:sp>
+      <p:sp>
+        <p:nvSpPr>
+          <p:cNvPr id="15" name="TextBox 14"/>
+          <p:cNvSpPr txBox="1"/>
+          <p:nvPr/>
+        </p:nvSpPr>
+        <p:spPr>
+          <a:xfrm>
+            <a:off x="1463040" y="5312664"/>
+            <a:ext cx="9875520" cy="804672"/>
+          </a:xfrm>
+          <a:prstGeom prst="rect">
+            <a:avLst/>
+          </a:prstGeom>
+          <a:noFill/>
+        </p:spPr>
+        <p:txBody>
+          <a:bodyPr wrap="square" anchor="t" lIns="0" rIns="0" tIns="0" bIns="0">
+            <a:spAutoFit/>
+          </a:bodyPr>
+          <a:lstStyle/>
+          <a:p>
+            <a:pPr algn="l">
+              <a:spcAft>
+                <a:spcPts val="945"/>
+              </a:spcAft>
+            </a:pPr>
+            <a:r>
+              <a:rPr sz="2100" b="1" i="0">
+                <a:solidFill>
+                  <a:srgbClr val="1C1B19"/>
+                </a:solidFill>
+                <a:latin typeface="Source Serif 4"/>
+              </a:rPr>
+              <a:t>An extra energy drink will sharpen you up.</a:t>
             </a:r>
           </a:p>
         </p:txBody>
@@ -5814,7 +7714,7 @@
 </p:sld>
 </file>
 
-<file path=ppt/slides/slide12.xml><?xml version="1.0" encoding="utf-8"?>
+<file path=ppt/slides/slide4.xml><?xml version="1.0" encoding="utf-8"?>
 <p:sld xmlns:a="http://schemas.openxmlformats.org/drawingml/2006/main" xmlns:p="http://schemas.openxmlformats.org/presentationml/2006/main" xmlns:r="http://schemas.openxmlformats.org/officeDocument/2006/relationships">
   <p:cSld>
     <p:bg>
@@ -5910,7 +7810,7 @@
                 </a:solidFill>
                 <a:latin typeface="Inter Tight"/>
               </a:rPr>
-              <a:t>TRY IT</a:t>
+              <a:t>MYTH OR FACT?</a:t>
             </a:r>
           </a:p>
         </p:txBody>
@@ -5956,97 +7856,14 @@
       </p:sp>
       <p:sp>
         <p:nvSpPr>
-          <p:cNvPr id="5" name="Rectangle 4"/>
-          <p:cNvSpPr/>
-          <p:nvPr/>
-        </p:nvSpPr>
-        <p:spPr>
-          <a:xfrm>
-            <a:off x="822960" y="1371600"/>
-            <a:ext cx="73152" cy="3566160"/>
-          </a:xfrm>
-          <a:prstGeom prst="rect">
-            <a:avLst/>
-          </a:prstGeom>
-          <a:solidFill>
-            <a:srgbClr val="F47B20"/>
-          </a:solidFill>
-          <a:ln>
-            <a:noFill/>
-          </a:ln>
-          <a:effectLst/>
-        </p:spPr>
-        <p:style>
-          <a:lnRef idx="1">
-            <a:schemeClr val="accent1"/>
-          </a:lnRef>
-          <a:fillRef idx="3">
-            <a:schemeClr val="accent1"/>
-          </a:fillRef>
-          <a:effectRef idx="2">
-            <a:schemeClr val="accent1"/>
-          </a:effectRef>
-          <a:fontRef idx="minor">
-            <a:schemeClr val="lt1"/>
-          </a:fontRef>
-        </p:style>
-        <p:txBody>
-          <a:bodyPr rtlCol="0" anchor="ctr"/>
-          <a:lstStyle/>
-          <a:p>
-            <a:pPr algn="ctr"/>
-          </a:p>
-        </p:txBody>
-      </p:sp>
-      <p:sp>
-        <p:nvSpPr>
-          <p:cNvPr id="6" name="TextBox 5"/>
+          <p:cNvPr id="5" name="TextBox 4"/>
           <p:cNvSpPr txBox="1"/>
           <p:nvPr/>
         </p:nvSpPr>
         <p:spPr>
           <a:xfrm>
-            <a:off x="1188720" y="1371600"/>
-            <a:ext cx="10058400" cy="3566160"/>
-          </a:xfrm>
-          <a:prstGeom prst="rect">
-            <a:avLst/>
-          </a:prstGeom>
-          <a:noFill/>
-        </p:spPr>
-        <p:txBody>
-          <a:bodyPr wrap="square" anchor="ctr" lIns="0" rIns="0" tIns="0" bIns="0">
-            <a:spAutoFit/>
-          </a:bodyPr>
-          <a:lstStyle/>
-          <a:p>
-            <a:pPr algn="l">
-              <a:spcAft>
-                <a:spcPts val="1800"/>
-              </a:spcAft>
-            </a:pPr>
-            <a:r>
-              <a:rPr sz="4000" b="0" i="1">
-                <a:solidFill>
-                  <a:srgbClr val="1C1B19"/>
-                </a:solidFill>
-                <a:latin typeface="Source Serif 4"/>
-              </a:rPr>
-              <a:t>What are you worried will happen on your next test, and why?</a:t>
-            </a:r>
-          </a:p>
-        </p:txBody>
-      </p:sp>
-      <p:sp>
-        <p:nvSpPr>
-          <p:cNvPr id="7" name="TextBox 6"/>
-          <p:cNvSpPr txBox="1"/>
-          <p:nvPr/>
-        </p:nvSpPr>
-        <p:spPr>
-          <a:xfrm>
-            <a:off x="1188720" y="5120640"/>
-            <a:ext cx="10058400" cy="914400"/>
+            <a:off x="822960" y="1005840"/>
+            <a:ext cx="10515600" cy="1097280"/>
           </a:xfrm>
           <a:prstGeom prst="rect">
             <a:avLst/>
@@ -6061,17 +7878,487 @@
           <a:p>
             <a:pPr algn="l">
               <a:spcAft>
-                <a:spcPts val="810"/>
-              </a:spcAft>
-            </a:pPr>
-            <a:r>
-              <a:rPr sz="1800" b="0" i="0">
+                <a:spcPts val="1620"/>
+              </a:spcAft>
+            </a:pPr>
+            <a:r>
+              <a:rPr sz="3600" b="1" i="0">
+                <a:solidFill>
+                  <a:srgbClr val="1C1B19"/>
+                </a:solidFill>
+                <a:latin typeface="Source Serif 4"/>
+              </a:rPr>
+              <a:t>The answers</a:t>
+            </a:r>
+          </a:p>
+        </p:txBody>
+      </p:sp>
+      <p:sp>
+        <p:nvSpPr>
+          <p:cNvPr id="6" name="TextBox 5"/>
+          <p:cNvSpPr txBox="1"/>
+          <p:nvPr/>
+        </p:nvSpPr>
+        <p:spPr>
+          <a:xfrm>
+            <a:off x="822960" y="2057400"/>
+            <a:ext cx="548640" cy="804672"/>
+          </a:xfrm>
+          <a:prstGeom prst="rect">
+            <a:avLst/>
+          </a:prstGeom>
+          <a:noFill/>
+        </p:spPr>
+        <p:txBody>
+          <a:bodyPr wrap="square" anchor="t" lIns="0" rIns="0" tIns="0" bIns="0">
+            <a:spAutoFit/>
+          </a:bodyPr>
+          <a:lstStyle/>
+          <a:p>
+            <a:pPr algn="l">
+              <a:spcAft>
+                <a:spcPts val="1170"/>
+              </a:spcAft>
+            </a:pPr>
+            <a:r>
+              <a:rPr sz="2600" b="1" i="0">
+                <a:solidFill>
+                  <a:srgbClr val="F47B20"/>
+                </a:solidFill>
+                <a:latin typeface="Source Serif 4"/>
+              </a:rPr>
+              <a:t>1</a:t>
+            </a:r>
+          </a:p>
+        </p:txBody>
+      </p:sp>
+      <p:sp>
+        <p:nvSpPr>
+          <p:cNvPr id="7" name="TextBox 6"/>
+          <p:cNvSpPr txBox="1"/>
+          <p:nvPr/>
+        </p:nvSpPr>
+        <p:spPr>
+          <a:xfrm>
+            <a:off x="1463040" y="2093976"/>
+            <a:ext cx="9875520" cy="804672"/>
+          </a:xfrm>
+          <a:prstGeom prst="rect">
+            <a:avLst/>
+          </a:prstGeom>
+          <a:noFill/>
+        </p:spPr>
+        <p:txBody>
+          <a:bodyPr wrap="square" anchor="t" lIns="0" rIns="0" tIns="0" bIns="0">
+            <a:spAutoFit/>
+          </a:bodyPr>
+          <a:lstStyle/>
+          <a:p>
+            <a:pPr algn="l">
+              <a:spcAft>
+                <a:spcPts val="945"/>
+              </a:spcAft>
+            </a:pPr>
+            <a:r>
+              <a:rPr sz="2100" b="1" i="0">
+                <a:solidFill>
+                  <a:srgbClr val="1C1B19"/>
+                </a:solidFill>
+                <a:latin typeface="Source Serif 4"/>
+              </a:rPr>
+              <a:t>Myth.</a:t>
+            </a:r>
+          </a:p>
+          <a:p>
+            <a:pPr algn="l">
+              <a:spcAft>
+                <a:spcPts val="945"/>
+              </a:spcAft>
+            </a:pPr>
+            <a:r>
+              <a:rPr sz="1600" b="0" i="0">
                 <a:solidFill>
                   <a:srgbClr val="5D5A54"/>
                 </a:solidFill>
-                <a:latin typeface="Inter Tight"/>
-              </a:rPr>
-              <a:t>Write without stopping. Don't edit. Nobody reads it.</a:t>
+                <a:latin typeface="Source Serif 4"/>
+              </a:rPr>
+              <a:t>You can be keyed up and do well. Aim for ready.</a:t>
+            </a:r>
+          </a:p>
+        </p:txBody>
+      </p:sp>
+      <p:sp>
+        <p:nvSpPr>
+          <p:cNvPr id="8" name="TextBox 7"/>
+          <p:cNvSpPr txBox="1"/>
+          <p:nvPr/>
+        </p:nvSpPr>
+        <p:spPr>
+          <a:xfrm>
+            <a:off x="822960" y="2862072"/>
+            <a:ext cx="548640" cy="804672"/>
+          </a:xfrm>
+          <a:prstGeom prst="rect">
+            <a:avLst/>
+          </a:prstGeom>
+          <a:noFill/>
+        </p:spPr>
+        <p:txBody>
+          <a:bodyPr wrap="square" anchor="t" lIns="0" rIns="0" tIns="0" bIns="0">
+            <a:spAutoFit/>
+          </a:bodyPr>
+          <a:lstStyle/>
+          <a:p>
+            <a:pPr algn="l">
+              <a:spcAft>
+                <a:spcPts val="1170"/>
+              </a:spcAft>
+            </a:pPr>
+            <a:r>
+              <a:rPr sz="2600" b="1" i="0">
+                <a:solidFill>
+                  <a:srgbClr val="F47B20"/>
+                </a:solidFill>
+                <a:latin typeface="Source Serif 4"/>
+              </a:rPr>
+              <a:t>2</a:t>
+            </a:r>
+          </a:p>
+        </p:txBody>
+      </p:sp>
+      <p:sp>
+        <p:nvSpPr>
+          <p:cNvPr id="9" name="TextBox 8"/>
+          <p:cNvSpPr txBox="1"/>
+          <p:nvPr/>
+        </p:nvSpPr>
+        <p:spPr>
+          <a:xfrm>
+            <a:off x="1463040" y="2898648"/>
+            <a:ext cx="9875520" cy="804672"/>
+          </a:xfrm>
+          <a:prstGeom prst="rect">
+            <a:avLst/>
+          </a:prstGeom>
+          <a:noFill/>
+        </p:spPr>
+        <p:txBody>
+          <a:bodyPr wrap="square" anchor="t" lIns="0" rIns="0" tIns="0" bIns="0">
+            <a:spAutoFit/>
+          </a:bodyPr>
+          <a:lstStyle/>
+          <a:p>
+            <a:pPr algn="l">
+              <a:spcAft>
+                <a:spcPts val="945"/>
+              </a:spcAft>
+            </a:pPr>
+            <a:r>
+              <a:rPr sz="2100" b="1" i="0">
+                <a:solidFill>
+                  <a:srgbClr val="1C1B19"/>
+                </a:solidFill>
+                <a:latin typeface="Source Serif 4"/>
+              </a:rPr>
+              <a:t>Myth.</a:t>
+            </a:r>
+          </a:p>
+          <a:p>
+            <a:pPr algn="l">
+              <a:spcAft>
+                <a:spcPts val="945"/>
+              </a:spcAft>
+            </a:pPr>
+            <a:r>
+              <a:rPr sz="1600" b="0" i="0">
+                <a:solidFill>
+                  <a:srgbClr val="5D5A54"/>
+                </a:solidFill>
+                <a:latin typeface="Source Serif 4"/>
+              </a:rPr>
+              <a:t>Anxiety tracks how much it matters to you.</a:t>
+            </a:r>
+          </a:p>
+        </p:txBody>
+      </p:sp>
+      <p:sp>
+        <p:nvSpPr>
+          <p:cNvPr id="10" name="TextBox 9"/>
+          <p:cNvSpPr txBox="1"/>
+          <p:nvPr/>
+        </p:nvSpPr>
+        <p:spPr>
+          <a:xfrm>
+            <a:off x="822960" y="3666744"/>
+            <a:ext cx="548640" cy="804672"/>
+          </a:xfrm>
+          <a:prstGeom prst="rect">
+            <a:avLst/>
+          </a:prstGeom>
+          <a:noFill/>
+        </p:spPr>
+        <p:txBody>
+          <a:bodyPr wrap="square" anchor="t" lIns="0" rIns="0" tIns="0" bIns="0">
+            <a:spAutoFit/>
+          </a:bodyPr>
+          <a:lstStyle/>
+          <a:p>
+            <a:pPr algn="l">
+              <a:spcAft>
+                <a:spcPts val="1170"/>
+              </a:spcAft>
+            </a:pPr>
+            <a:r>
+              <a:rPr sz="2600" b="1" i="0">
+                <a:solidFill>
+                  <a:srgbClr val="F47B20"/>
+                </a:solidFill>
+                <a:latin typeface="Source Serif 4"/>
+              </a:rPr>
+              <a:t>3</a:t>
+            </a:r>
+          </a:p>
+        </p:txBody>
+      </p:sp>
+      <p:sp>
+        <p:nvSpPr>
+          <p:cNvPr id="11" name="TextBox 10"/>
+          <p:cNvSpPr txBox="1"/>
+          <p:nvPr/>
+        </p:nvSpPr>
+        <p:spPr>
+          <a:xfrm>
+            <a:off x="1463040" y="3703320"/>
+            <a:ext cx="9875520" cy="804672"/>
+          </a:xfrm>
+          <a:prstGeom prst="rect">
+            <a:avLst/>
+          </a:prstGeom>
+          <a:noFill/>
+        </p:spPr>
+        <p:txBody>
+          <a:bodyPr wrap="square" anchor="t" lIns="0" rIns="0" tIns="0" bIns="0">
+            <a:spAutoFit/>
+          </a:bodyPr>
+          <a:lstStyle/>
+          <a:p>
+            <a:pPr algn="l">
+              <a:spcAft>
+                <a:spcPts val="945"/>
+              </a:spcAft>
+            </a:pPr>
+            <a:r>
+              <a:rPr sz="2100" b="1" i="0">
+                <a:solidFill>
+                  <a:srgbClr val="1C1B19"/>
+                </a:solidFill>
+                <a:latin typeface="Source Serif 4"/>
+              </a:rPr>
+              <a:t>Myth.</a:t>
+            </a:r>
+          </a:p>
+          <a:p>
+            <a:pPr algn="l">
+              <a:spcAft>
+                <a:spcPts val="945"/>
+              </a:spcAft>
+            </a:pPr>
+            <a:r>
+              <a:rPr sz="1600" b="0" i="0">
+                <a:solidFill>
+                  <a:srgbClr val="5D5A54"/>
+                </a:solidFill>
+                <a:latin typeface="Source Serif 4"/>
+              </a:rPr>
+              <a:t>It's still stored. Pulling it up is what's struggling.</a:t>
+            </a:r>
+          </a:p>
+        </p:txBody>
+      </p:sp>
+      <p:sp>
+        <p:nvSpPr>
+          <p:cNvPr id="12" name="TextBox 11"/>
+          <p:cNvSpPr txBox="1"/>
+          <p:nvPr/>
+        </p:nvSpPr>
+        <p:spPr>
+          <a:xfrm>
+            <a:off x="822960" y="4471416"/>
+            <a:ext cx="548640" cy="804672"/>
+          </a:xfrm>
+          <a:prstGeom prst="rect">
+            <a:avLst/>
+          </a:prstGeom>
+          <a:noFill/>
+        </p:spPr>
+        <p:txBody>
+          <a:bodyPr wrap="square" anchor="t" lIns="0" rIns="0" tIns="0" bIns="0">
+            <a:spAutoFit/>
+          </a:bodyPr>
+          <a:lstStyle/>
+          <a:p>
+            <a:pPr algn="l">
+              <a:spcAft>
+                <a:spcPts val="1170"/>
+              </a:spcAft>
+            </a:pPr>
+            <a:r>
+              <a:rPr sz="2600" b="1" i="0">
+                <a:solidFill>
+                  <a:srgbClr val="F47B20"/>
+                </a:solidFill>
+                <a:latin typeface="Source Serif 4"/>
+              </a:rPr>
+              <a:t>4</a:t>
+            </a:r>
+          </a:p>
+        </p:txBody>
+      </p:sp>
+      <p:sp>
+        <p:nvSpPr>
+          <p:cNvPr id="13" name="TextBox 12"/>
+          <p:cNvSpPr txBox="1"/>
+          <p:nvPr/>
+        </p:nvSpPr>
+        <p:spPr>
+          <a:xfrm>
+            <a:off x="1463040" y="4507992"/>
+            <a:ext cx="9875520" cy="804672"/>
+          </a:xfrm>
+          <a:prstGeom prst="rect">
+            <a:avLst/>
+          </a:prstGeom>
+          <a:noFill/>
+        </p:spPr>
+        <p:txBody>
+          <a:bodyPr wrap="square" anchor="t" lIns="0" rIns="0" tIns="0" bIns="0">
+            <a:spAutoFit/>
+          </a:bodyPr>
+          <a:lstStyle/>
+          <a:p>
+            <a:pPr algn="l">
+              <a:spcAft>
+                <a:spcPts val="945"/>
+              </a:spcAft>
+            </a:pPr>
+            <a:r>
+              <a:rPr sz="2100" b="1" i="0">
+                <a:solidFill>
+                  <a:srgbClr val="1C1B19"/>
+                </a:solidFill>
+                <a:latin typeface="Source Serif 4"/>
+              </a:rPr>
+              <a:t>Fact.</a:t>
+            </a:r>
+          </a:p>
+          <a:p>
+            <a:pPr algn="l">
+              <a:spcAft>
+                <a:spcPts val="945"/>
+              </a:spcAft>
+            </a:pPr>
+            <a:r>
+              <a:rPr sz="1600" b="0" i="0">
+                <a:solidFill>
+                  <a:srgbClr val="5D5A54"/>
+                </a:solidFill>
+                <a:latin typeface="Source Serif 4"/>
+              </a:rPr>
+              <a:t>High schoolers who did it before a final scored higher.</a:t>
+            </a:r>
+          </a:p>
+        </p:txBody>
+      </p:sp>
+      <p:sp>
+        <p:nvSpPr>
+          <p:cNvPr id="14" name="TextBox 13"/>
+          <p:cNvSpPr txBox="1"/>
+          <p:nvPr/>
+        </p:nvSpPr>
+        <p:spPr>
+          <a:xfrm>
+            <a:off x="822960" y="5276088"/>
+            <a:ext cx="548640" cy="804672"/>
+          </a:xfrm>
+          <a:prstGeom prst="rect">
+            <a:avLst/>
+          </a:prstGeom>
+          <a:noFill/>
+        </p:spPr>
+        <p:txBody>
+          <a:bodyPr wrap="square" anchor="t" lIns="0" rIns="0" tIns="0" bIns="0">
+            <a:spAutoFit/>
+          </a:bodyPr>
+          <a:lstStyle/>
+          <a:p>
+            <a:pPr algn="l">
+              <a:spcAft>
+                <a:spcPts val="1170"/>
+              </a:spcAft>
+            </a:pPr>
+            <a:r>
+              <a:rPr sz="2600" b="1" i="0">
+                <a:solidFill>
+                  <a:srgbClr val="F47B20"/>
+                </a:solidFill>
+                <a:latin typeface="Source Serif 4"/>
+              </a:rPr>
+              <a:t>5</a:t>
+            </a:r>
+          </a:p>
+        </p:txBody>
+      </p:sp>
+      <p:sp>
+        <p:nvSpPr>
+          <p:cNvPr id="15" name="TextBox 14"/>
+          <p:cNvSpPr txBox="1"/>
+          <p:nvPr/>
+        </p:nvSpPr>
+        <p:spPr>
+          <a:xfrm>
+            <a:off x="1463040" y="5312664"/>
+            <a:ext cx="9875520" cy="804672"/>
+          </a:xfrm>
+          <a:prstGeom prst="rect">
+            <a:avLst/>
+          </a:prstGeom>
+          <a:noFill/>
+        </p:spPr>
+        <p:txBody>
+          <a:bodyPr wrap="square" anchor="t" lIns="0" rIns="0" tIns="0" bIns="0">
+            <a:spAutoFit/>
+          </a:bodyPr>
+          <a:lstStyle/>
+          <a:p>
+            <a:pPr algn="l">
+              <a:spcAft>
+                <a:spcPts val="945"/>
+              </a:spcAft>
+            </a:pPr>
+            <a:r>
+              <a:rPr sz="2100" b="1" i="0">
+                <a:solidFill>
+                  <a:srgbClr val="1C1B19"/>
+                </a:solidFill>
+                <a:latin typeface="Source Serif 4"/>
+              </a:rPr>
+              <a:t>Myth.</a:t>
+            </a:r>
+          </a:p>
+          <a:p>
+            <a:pPr algn="l">
+              <a:spcAft>
+                <a:spcPts val="945"/>
+              </a:spcAft>
+            </a:pPr>
+            <a:r>
+              <a:rPr sz="1600" b="0" i="0">
+                <a:solidFill>
+                  <a:srgbClr val="5D5A54"/>
+                </a:solidFill>
+                <a:latin typeface="Source Serif 4"/>
+              </a:rPr>
+              <a:t>Extra caffeine adds to the racing heart. Your usual is fine.</a:t>
             </a:r>
           </a:p>
         </p:txBody>
@@ -6084,7 +8371,7 @@
 </p:sld>
 </file>
 
-<file path=ppt/slides/slide13.xml><?xml version="1.0" encoding="utf-8"?>
+<file path=ppt/slides/slide5.xml><?xml version="1.0" encoding="utf-8"?>
 <p:sld xmlns:a="http://schemas.openxmlformats.org/drawingml/2006/main" xmlns:p="http://schemas.openxmlformats.org/presentationml/2006/main" xmlns:r="http://schemas.openxmlformats.org/officeDocument/2006/relationships">
   <p:cSld>
     <p:bg>
@@ -6180,7 +8467,7 @@
                 </a:solidFill>
                 <a:latin typeface="Inter Tight"/>
               </a:rPr>
-              <a:t>BEFORE YOU GO</a:t>
+              <a:t>WHAT HAPPENS IN THE BLANK</a:t>
             </a:r>
           </a:p>
         </p:txBody>
@@ -6232,7 +8519,7 @@
         </p:nvSpPr>
         <p:spPr>
           <a:xfrm>
-            <a:off x="822960" y="1188720"/>
+            <a:off x="822960" y="1005840"/>
             <a:ext cx="10515600" cy="914400"/>
           </a:xfrm>
           <a:prstGeom prst="rect">
@@ -6248,70 +8535,31 @@
           <a:p>
             <a:pPr algn="l">
               <a:spcAft>
-                <a:spcPts val="1620"/>
-              </a:spcAft>
-            </a:pPr>
-            <a:r>
-              <a:rPr sz="3600" b="1" i="0">
+                <a:spcPts val="1530"/>
+              </a:spcAft>
+            </a:pPr>
+            <a:r>
+              <a:rPr sz="3400" b="1" i="0">
                 <a:solidFill>
                   <a:srgbClr val="1C1B19"/>
                 </a:solidFill>
                 <a:latin typeface="Source Serif 4"/>
               </a:rPr>
-              <a:t>Exit card</a:t>
-            </a:r>
-          </a:p>
-        </p:txBody>
-      </p:sp>
-      <p:sp>
-        <p:nvSpPr>
-          <p:cNvPr id="6" name="TextBox 5"/>
-          <p:cNvSpPr txBox="1"/>
-          <p:nvPr/>
-        </p:nvSpPr>
-        <p:spPr>
-          <a:xfrm>
-            <a:off x="822960" y="2286000"/>
-            <a:ext cx="10515600" cy="1463040"/>
-          </a:xfrm>
-          <a:prstGeom prst="rect">
-            <a:avLst/>
-          </a:prstGeom>
-          <a:noFill/>
-        </p:spPr>
-        <p:txBody>
-          <a:bodyPr wrap="square" anchor="t" lIns="0" rIns="0" tIns="0" bIns="0">
-            <a:spAutoFit/>
-          </a:bodyPr>
-          <a:lstStyle/>
-          <a:p>
-            <a:pPr algn="l">
-              <a:spcAft>
-                <a:spcPts val="1080"/>
-              </a:spcAft>
-            </a:pPr>
-            <a:r>
-              <a:rPr sz="2400" b="0" i="0">
-                <a:solidFill>
-                  <a:srgbClr val="1C1B19"/>
-                </a:solidFill>
-                <a:latin typeface="Source Serif 4"/>
-              </a:rPr>
-              <a:t>Which move will you use on your next test: relabel, breathe, skip and return, or the worry write?</a:t>
-            </a:r>
-          </a:p>
-        </p:txBody>
-      </p:sp>
-      <p:sp>
-        <p:nvSpPr>
-          <p:cNvPr id="7" name="Rectangle 6"/>
+              <a:t>The alarm takes your thinking space</a:t>
+            </a:r>
+          </a:p>
+        </p:txBody>
+      </p:sp>
+      <p:sp>
+        <p:nvSpPr>
+          <p:cNvPr id="6" name="Rectangle 5"/>
           <p:cNvSpPr/>
           <p:nvPr/>
         </p:nvSpPr>
         <p:spPr>
           <a:xfrm>
-            <a:off x="822960" y="4023360"/>
-            <a:ext cx="10515600" cy="1371600"/>
+            <a:off x="822960" y="2743200"/>
+            <a:ext cx="1874519" cy="1005840"/>
           </a:xfrm>
           <a:prstGeom prst="rect">
             <a:avLst/>
@@ -6321,7 +8569,7 @@
           </a:solidFill>
           <a:ln w="15875">
             <a:solidFill>
-              <a:srgbClr val="1C1B19"/>
+              <a:srgbClr val="0B2D5B"/>
             </a:solidFill>
           </a:ln>
           <a:effectLst/>
@@ -6350,14 +8598,14 @@
       </p:sp>
       <p:sp>
         <p:nvSpPr>
-          <p:cNvPr id="8" name="TextBox 7"/>
+          <p:cNvPr id="7" name="TextBox 6"/>
           <p:cNvSpPr txBox="1"/>
           <p:nvPr/>
         </p:nvSpPr>
         <p:spPr>
           <a:xfrm>
-            <a:off x="1097280" y="4206240"/>
-            <a:ext cx="10058400" cy="365760"/>
+            <a:off x="822960" y="2743200"/>
+            <a:ext cx="1874519" cy="1005840"/>
           </a:xfrm>
           <a:prstGeom prst="rect">
             <a:avLst/>
@@ -6365,112 +8613,85 @@
           <a:noFill/>
         </p:spPr>
         <p:txBody>
-          <a:bodyPr wrap="square" anchor="t" lIns="0" rIns="0" tIns="0" bIns="0">
+          <a:bodyPr wrap="square" anchor="ctr" lIns="0" rIns="0" tIns="0" bIns="0">
             <a:spAutoFit/>
           </a:bodyPr>
           <a:lstStyle/>
           <a:p>
-            <a:pPr algn="l">
-              <a:spcAft>
-                <a:spcPts val="540"/>
-              </a:spcAft>
-            </a:pPr>
-            <a:r>
-              <a:rPr sz="1200" b="1" i="0">
-                <a:solidFill>
-                  <a:srgbClr val="0B2D5B"/>
-                </a:solidFill>
-                <a:latin typeface="Inter Tight"/>
-              </a:rPr>
-              <a:t>ON THE BVR DINER MENU</a:t>
-            </a:r>
-          </a:p>
-        </p:txBody>
-      </p:sp>
-      <p:sp>
-        <p:nvSpPr>
-          <p:cNvPr id="9" name="TextBox 8"/>
-          <p:cNvSpPr txBox="1"/>
-          <p:nvPr/>
-        </p:nvSpPr>
-        <p:spPr>
-          <a:xfrm>
-            <a:off x="1097280" y="4617720"/>
-            <a:ext cx="10058400" cy="640080"/>
-          </a:xfrm>
-          <a:prstGeom prst="rect">
-            <a:avLst/>
-          </a:prstGeom>
-          <a:noFill/>
-        </p:spPr>
-        <p:txBody>
-          <a:bodyPr wrap="square" anchor="t" lIns="0" rIns="0" tIns="0" bIns="0">
-            <a:spAutoFit/>
-          </a:bodyPr>
-          <a:lstStyle/>
-          <a:p>
-            <a:pPr algn="l">
+            <a:pPr algn="ctr">
               <a:spcAft>
                 <a:spcPts val="900"/>
               </a:spcAft>
             </a:pPr>
             <a:r>
-              <a:rPr sz="2000" b="0" i="0">
+              <a:rPr sz="2000" b="1" i="0">
                 <a:solidFill>
                   <a:srgbClr val="1C1B19"/>
                 </a:solidFill>
-                <a:latin typeface="Inter Tight"/>
-              </a:rPr>
-              <a:t>https://rmwtoolkit.github.io/bcds-toolkit/when-your-mind-goes-blank-high-school.html</a:t>
-            </a:r>
-          </a:p>
-        </p:txBody>
-      </p:sp>
-    </p:spTree>
-  </p:cSld>
-  <p:clrMapOvr>
-    <a:masterClrMapping/>
-  </p:clrMapOvr>
-</p:sld>
-</file>
-
-<file path=ppt/slides/slide2.xml><?xml version="1.0" encoding="utf-8"?>
-<p:sld xmlns:a="http://schemas.openxmlformats.org/drawingml/2006/main" xmlns:p="http://schemas.openxmlformats.org/presentationml/2006/main" xmlns:r="http://schemas.openxmlformats.org/officeDocument/2006/relationships" show="0">
-  <p:cSld>
-    <p:bg>
-      <p:bgPr>
-        <a:solidFill>
-          <a:srgbClr val="EEEBE4"/>
-        </a:solidFill>
-        <a:effectLst/>
-      </p:bgPr>
-    </p:bg>
-    <p:spTree>
-      <p:nvGrpSpPr>
-        <p:cNvPr id="1" name=""/>
-        <p:cNvGrpSpPr/>
-        <p:nvPr/>
-      </p:nvGrpSpPr>
-      <p:grpSpPr/>
-      <p:sp>
-        <p:nvSpPr>
-          <p:cNvPr id="2" name="Rectangle 1"/>
+                <a:latin typeface="Source Serif 4"/>
+              </a:rPr>
+              <a:t>Timer, stakes</a:t>
+            </a:r>
+          </a:p>
+        </p:txBody>
+      </p:sp>
+      <p:cxnSp>
+        <p:nvCxnSpPr>
+          <p:cNvPr id="8" name="Connector 7"/>
+          <p:cNvCxnSpPr/>
+          <p:nvPr/>
+        </p:nvCxnSpPr>
+        <p:spPr>
+          <a:xfrm>
+            <a:off x="2752344" y="3246120"/>
+            <a:ext cx="176021" cy="0"/>
+          </a:xfrm>
+          <a:prstGeom prst="line">
+            <a:avLst/>
+          </a:prstGeom>
+          <a:ln w="31750">
+            <a:solidFill>
+              <a:srgbClr val="F47B20"/>
+            </a:solidFill>
+            <a:tailEnd type="triangle"/>
+          </a:ln>
+        </p:spPr>
+        <p:style>
+          <a:lnRef idx="2">
+            <a:schemeClr val="accent1"/>
+          </a:lnRef>
+          <a:fillRef idx="0">
+            <a:schemeClr val="accent1"/>
+          </a:fillRef>
+          <a:effectRef idx="1">
+            <a:schemeClr val="accent1"/>
+          </a:effectRef>
+          <a:fontRef idx="minor">
+            <a:schemeClr val="tx1"/>
+          </a:fontRef>
+        </p:style>
+      </p:cxnSp>
+      <p:sp>
+        <p:nvSpPr>
+          <p:cNvPr id="9" name="Rectangle 8"/>
           <p:cNvSpPr/>
           <p:nvPr/>
         </p:nvSpPr>
         <p:spPr>
           <a:xfrm>
-            <a:off x="0" y="0"/>
-            <a:ext cx="12191695" cy="384048"/>
+            <a:off x="2983229" y="2743200"/>
+            <a:ext cx="1874519" cy="1005840"/>
           </a:xfrm>
           <a:prstGeom prst="rect">
             <a:avLst/>
           </a:prstGeom>
           <a:solidFill>
-            <a:srgbClr val="0B2D5B"/>
+            <a:srgbClr val="FFFFFF"/>
           </a:solidFill>
-          <a:ln>
-            <a:noFill/>
+          <a:ln w="15875">
+            <a:solidFill>
+              <a:srgbClr val="0B2D5B"/>
+            </a:solidFill>
           </a:ln>
           <a:effectLst/>
         </p:spPr>
@@ -6498,14 +8719,14 @@
       </p:sp>
       <p:sp>
         <p:nvSpPr>
-          <p:cNvPr id="3" name="TextBox 2"/>
+          <p:cNvPr id="10" name="TextBox 9"/>
           <p:cNvSpPr txBox="1"/>
           <p:nvPr/>
         </p:nvSpPr>
         <p:spPr>
           <a:xfrm>
-            <a:off x="548640" y="100584"/>
-            <a:ext cx="10972800" cy="274320"/>
+            <a:off x="2983229" y="2743200"/>
+            <a:ext cx="1874519" cy="1005840"/>
           </a:xfrm>
           <a:prstGeom prst="rect">
             <a:avLst/>
@@ -6513,446 +8734,85 @@
           <a:noFill/>
         </p:spPr>
         <p:txBody>
-          <a:bodyPr wrap="square" anchor="t" lIns="0" rIns="0" tIns="0" bIns="0">
+          <a:bodyPr wrap="square" anchor="ctr" lIns="0" rIns="0" tIns="0" bIns="0">
             <a:spAutoFit/>
           </a:bodyPr>
           <a:lstStyle/>
           <a:p>
-            <a:pPr algn="l">
-              <a:spcAft>
-                <a:spcPts val="495"/>
-              </a:spcAft>
-            </a:pPr>
-            <a:r>
-              <a:rPr sz="1100" b="1" i="0">
-                <a:solidFill>
-                  <a:srgbClr val="FFFFFF"/>
-                </a:solidFill>
-                <a:latin typeface="Inter Tight"/>
-              </a:rPr>
-              <a:t>TEACHER PAGE  ·  skipped when you present  ·  Before you teach</a:t>
-            </a:r>
-          </a:p>
-        </p:txBody>
-      </p:sp>
-      <p:sp>
-        <p:nvSpPr>
-          <p:cNvPr id="4" name="TextBox 3"/>
-          <p:cNvSpPr txBox="1"/>
-          <p:nvPr/>
-        </p:nvSpPr>
-        <p:spPr>
-          <a:xfrm>
-            <a:off x="548640" y="685800"/>
-            <a:ext cx="10972800" cy="640080"/>
-          </a:xfrm>
-          <a:prstGeom prst="rect">
-            <a:avLst/>
-          </a:prstGeom>
-          <a:noFill/>
-        </p:spPr>
-        <p:txBody>
-          <a:bodyPr wrap="square" anchor="t" lIns="0" rIns="0" tIns="0" bIns="0">
-            <a:spAutoFit/>
-          </a:bodyPr>
-          <a:lstStyle/>
-          <a:p>
-            <a:pPr algn="l">
-              <a:spcAft>
-                <a:spcPts val="1350"/>
-              </a:spcAft>
-            </a:pPr>
-            <a:r>
-              <a:rPr sz="3000" b="1" i="0">
+            <a:pPr algn="ctr">
+              <a:spcAft>
+                <a:spcPts val="900"/>
+              </a:spcAft>
+            </a:pPr>
+            <a:r>
+              <a:rPr sz="2000" b="1" i="0">
                 <a:solidFill>
                   <a:srgbClr val="1C1B19"/>
                 </a:solidFill>
                 <a:latin typeface="Source Serif 4"/>
               </a:rPr>
-              <a:t>Before you teach</a:t>
-            </a:r>
-          </a:p>
-        </p:txBody>
-      </p:sp>
-      <p:sp>
-        <p:nvSpPr>
-          <p:cNvPr id="5" name="TextBox 4"/>
-          <p:cNvSpPr txBox="1"/>
-          <p:nvPr/>
-        </p:nvSpPr>
-        <p:spPr>
-          <a:xfrm>
-            <a:off x="548640" y="1463040"/>
-            <a:ext cx="5394960" cy="4937760"/>
-          </a:xfrm>
-          <a:prstGeom prst="rect">
-            <a:avLst/>
-          </a:prstGeom>
-          <a:noFill/>
-        </p:spPr>
-        <p:txBody>
-          <a:bodyPr wrap="square" anchor="t" lIns="0" rIns="0" tIns="0" bIns="0">
-            <a:spAutoFit/>
-          </a:bodyPr>
-          <a:lstStyle/>
-          <a:p>
-            <a:pPr algn="l">
-              <a:spcAft>
-                <a:spcPts val="585"/>
-              </a:spcAft>
-            </a:pPr>
-            <a:r>
-              <a:rPr sz="1500" b="1" i="0">
-                <a:solidFill>
-                  <a:srgbClr val="1C1B19"/>
-                </a:solidFill>
-                <a:latin typeface="Source Serif 4"/>
-              </a:rPr>
-              <a:t>Some students dread every test.</a:t>
-            </a:r>
-          </a:p>
-          <a:p>
-            <a:pPr algn="l">
-              <a:spcAft>
-                <a:spcPts val="585"/>
-              </a:spcAft>
-            </a:pPr>
-            <a:r>
-              <a:rPr sz="1300" b="0" i="0">
-                <a:solidFill>
-                  <a:srgbClr val="1C1B19"/>
-                </a:solidFill>
-                <a:latin typeface="Source Serif 4"/>
-              </a:rPr>
-              <a:t>For a few students this lesson is about something they feel every week. Keep the tone ordinary and practical. Never ask who gets anxious, who has blanked, or what anyone scored.</a:t>
-            </a:r>
-          </a:p>
-          <a:p>
-            <a:pPr algn="l">
-              <a:spcAft>
-                <a:spcPts val="585"/>
-              </a:spcAft>
-            </a:pPr>
-            <a:r>
-              <a:rPr sz="1300" b="0" i="0">
-                <a:solidFill>
-                  <a:srgbClr val="1C1B19"/>
-                </a:solidFill>
-                <a:latin typeface="Source Serif 4"/>
-              </a:rPr>
-              <a:t/>
-            </a:r>
-          </a:p>
-          <a:p>
-            <a:pPr algn="l">
-              <a:spcAft>
-                <a:spcPts val="585"/>
-              </a:spcAft>
-            </a:pPr>
-            <a:r>
-              <a:rPr sz="1500" b="1" i="0">
-                <a:solidFill>
-                  <a:srgbClr val="1C1B19"/>
-                </a:solidFill>
-                <a:latin typeface="Source Serif 4"/>
-              </a:rPr>
-              <a:t>Make the breathing optional.</a:t>
-            </a:r>
-          </a:p>
-          <a:p>
-            <a:pPr algn="l">
-              <a:spcAft>
-                <a:spcPts val="585"/>
-              </a:spcAft>
-            </a:pPr>
-            <a:r>
-              <a:rPr sz="1300" b="0" i="0">
-                <a:solidFill>
-                  <a:srgbClr val="1C1B19"/>
-                </a:solidFill>
-                <a:latin typeface="Source Serif 4"/>
-              </a:rPr>
-              <a:t>Some students feel more uneasy when they focus on their breath. Eyes can stay open. Anyone can just sit quietly or look at the clock. Grounding (three things you see, two you hear, one you feel) is the other choice.</a:t>
-            </a:r>
-          </a:p>
-          <a:p>
-            <a:pPr algn="l">
-              <a:spcAft>
-                <a:spcPts val="585"/>
-              </a:spcAft>
-            </a:pPr>
-            <a:r>
-              <a:rPr sz="1300" b="0" i="0">
-                <a:solidFill>
-                  <a:srgbClr val="1C1B19"/>
-                </a:solidFill>
-                <a:latin typeface="Source Serif 4"/>
-              </a:rPr>
-              <a:t/>
-            </a:r>
-          </a:p>
-          <a:p>
-            <a:pPr algn="l">
-              <a:spcAft>
-                <a:spcPts val="585"/>
-              </a:spcAft>
-            </a:pPr>
-            <a:r>
-              <a:rPr sz="1500" b="1" i="0">
-                <a:solidFill>
-                  <a:srgbClr val="1C1B19"/>
-                </a:solidFill>
-                <a:latin typeface="Source Serif 4"/>
-              </a:rPr>
-              <a:t>Know what panic looks like.</a:t>
-            </a:r>
-          </a:p>
-          <a:p>
-            <a:pPr algn="l">
-              <a:spcAft>
-                <a:spcPts val="585"/>
-              </a:spcAft>
-            </a:pPr>
-            <a:r>
-              <a:rPr sz="1300" b="0" i="0">
-                <a:solidFill>
-                  <a:srgbClr val="1C1B19"/>
-                </a:solidFill>
-                <a:latin typeface="Source Serif 4"/>
-              </a:rPr>
-              <a:t>If a student feels sick, panicky or can't settle, let them step out with a pass to the nurse or a counselor. Before class, know who's free that period.</a:t>
-            </a:r>
-          </a:p>
-          <a:p>
-            <a:pPr algn="l">
-              <a:spcAft>
-                <a:spcPts val="585"/>
-              </a:spcAft>
-            </a:pPr>
-            <a:r>
-              <a:rPr sz="1300" b="0" i="0">
-                <a:solidFill>
-                  <a:srgbClr val="1C1B19"/>
-                </a:solidFill>
-                <a:latin typeface="Source Serif 4"/>
-              </a:rPr>
-              <a:t/>
-            </a:r>
-          </a:p>
-        </p:txBody>
-      </p:sp>
-      <p:sp>
-        <p:nvSpPr>
-          <p:cNvPr id="6" name="TextBox 5"/>
-          <p:cNvSpPr txBox="1"/>
-          <p:nvPr/>
-        </p:nvSpPr>
-        <p:spPr>
-          <a:xfrm>
-            <a:off x="6217920" y="1463040"/>
-            <a:ext cx="5394960" cy="4937760"/>
-          </a:xfrm>
-          <a:prstGeom prst="rect">
-            <a:avLst/>
-          </a:prstGeom>
-          <a:noFill/>
-        </p:spPr>
-        <p:txBody>
-          <a:bodyPr wrap="square" anchor="t" lIns="0" rIns="0" tIns="0" bIns="0">
-            <a:spAutoFit/>
-          </a:bodyPr>
-          <a:lstStyle/>
-          <a:p>
-            <a:pPr algn="l">
-              <a:spcAft>
-                <a:spcPts val="585"/>
-              </a:spcAft>
-            </a:pPr>
-            <a:r>
-              <a:rPr sz="1500" b="1" i="0">
-                <a:solidFill>
-                  <a:srgbClr val="1C1B19"/>
-                </a:solidFill>
-                <a:latin typeface="Source Serif 4"/>
-              </a:rPr>
-              <a:t>Be honest about the size of it.</a:t>
-            </a:r>
-          </a:p>
-          <a:p>
-            <a:pPr algn="l">
-              <a:spcAft>
-                <a:spcPts val="585"/>
-              </a:spcAft>
-            </a:pPr>
-            <a:r>
-              <a:rPr sz="1300" b="0" i="0">
-                <a:solidFill>
-                  <a:srgbClr val="1C1B19"/>
-                </a:solidFill>
-                <a:latin typeface="Source Serif 4"/>
-              </a:rPr>
-              <a:t>Test anxiety is linked to lower scores, and the effect is small to moderate. Several of these studies were with adults or college students. Anxiety is one factor in a score, never a verdict.</a:t>
-            </a:r>
-          </a:p>
-          <a:p>
-            <a:pPr algn="l">
-              <a:spcAft>
-                <a:spcPts val="585"/>
-              </a:spcAft>
-            </a:pPr>
-            <a:r>
-              <a:rPr sz="1300" b="0" i="0">
-                <a:solidFill>
-                  <a:srgbClr val="1C1B19"/>
-                </a:solidFill>
-                <a:latin typeface="Source Serif 4"/>
-              </a:rPr>
-              <a:t/>
-            </a:r>
-          </a:p>
-          <a:p>
-            <a:pPr algn="l">
-              <a:spcAft>
-                <a:spcPts val="585"/>
-              </a:spcAft>
-            </a:pPr>
-            <a:r>
-              <a:rPr sz="1500" b="1" i="0">
-                <a:solidFill>
-                  <a:srgbClr val="1C1B19"/>
-                </a:solidFill>
-                <a:latin typeface="Source Serif 4"/>
-              </a:rPr>
-              <a:t>Point to accommodations.</a:t>
-            </a:r>
-          </a:p>
-          <a:p>
-            <a:pPr algn="l">
-              <a:spcAft>
-                <a:spcPts val="585"/>
-              </a:spcAft>
-            </a:pPr>
-            <a:r>
-              <a:rPr sz="1300" b="0" i="0">
-                <a:solidFill>
-                  <a:srgbClr val="1C1B19"/>
-                </a:solidFill>
-                <a:latin typeface="Source Serif 4"/>
-              </a:rPr>
-              <a:t>Students who feel sick before most tests, avoid school on test days, or score low even when they know the material should talk to a counselor. Some qualify for extended time or a separate room through a learning plan, and the College Board and ACT review requests through the school.</a:t>
-            </a:r>
-          </a:p>
-          <a:p>
-            <a:pPr algn="l">
-              <a:spcAft>
-                <a:spcPts val="585"/>
-              </a:spcAft>
-            </a:pPr>
-            <a:r>
-              <a:rPr sz="1300" b="0" i="0">
-                <a:solidFill>
-                  <a:srgbClr val="1C1B19"/>
-                </a:solidFill>
-                <a:latin typeface="Source Serif 4"/>
-              </a:rPr>
-              <a:t/>
-            </a:r>
-          </a:p>
-          <a:p>
-            <a:pPr algn="l">
-              <a:spcAft>
-                <a:spcPts val="585"/>
-              </a:spcAft>
-            </a:pPr>
-            <a:r>
-              <a:rPr sz="1500" b="1" i="0">
-                <a:solidFill>
-                  <a:srgbClr val="1C1B19"/>
-                </a:solidFill>
-                <a:latin typeface="Source Serif 4"/>
-              </a:rPr>
-              <a:t>Family pressure is close to the surface.</a:t>
-            </a:r>
-          </a:p>
-          <a:p>
-            <a:pPr algn="l">
-              <a:spcAft>
-                <a:spcPts val="585"/>
-              </a:spcAft>
-            </a:pPr>
-            <a:r>
-              <a:rPr sz="1300" b="0" i="0">
-                <a:solidFill>
-                  <a:srgbClr val="1C1B19"/>
-                </a:solidFill>
-                <a:latin typeface="Source Serif 4"/>
-              </a:rPr>
-              <a:t>Mei's scenario is about a family's sacrifice. Some students feel exactly that. Respect the family and the student's love for them, and keep any reflection on it private. If home pressure sounds frightening, that's a counselor conversation that day.</a:t>
-            </a:r>
-          </a:p>
-          <a:p>
-            <a:pPr algn="l">
-              <a:spcAft>
-                <a:spcPts val="585"/>
-              </a:spcAft>
-            </a:pPr>
-            <a:r>
-              <a:rPr sz="1300" b="0" i="0">
-                <a:solidFill>
-                  <a:srgbClr val="1C1B19"/>
-                </a:solidFill>
-                <a:latin typeface="Source Serif 4"/>
-              </a:rPr>
-              <a:t/>
-            </a:r>
-          </a:p>
-        </p:txBody>
-      </p:sp>
-    </p:spTree>
-  </p:cSld>
-  <p:clrMapOvr>
-    <a:masterClrMapping/>
-  </p:clrMapOvr>
-</p:sld>
-</file>
-
-<file path=ppt/slides/slide3.xml><?xml version="1.0" encoding="utf-8"?>
-<p:sld xmlns:a="http://schemas.openxmlformats.org/drawingml/2006/main" xmlns:p="http://schemas.openxmlformats.org/presentationml/2006/main" xmlns:r="http://schemas.openxmlformats.org/officeDocument/2006/relationships" show="0">
-  <p:cSld>
-    <p:bg>
-      <p:bgPr>
-        <a:solidFill>
-          <a:srgbClr val="EEEBE4"/>
-        </a:solidFill>
-        <a:effectLst/>
-      </p:bgPr>
-    </p:bg>
-    <p:spTree>
-      <p:nvGrpSpPr>
-        <p:cNvPr id="1" name=""/>
-        <p:cNvGrpSpPr/>
-        <p:nvPr/>
-      </p:nvGrpSpPr>
-      <p:grpSpPr/>
-      <p:sp>
-        <p:nvSpPr>
-          <p:cNvPr id="2" name="Rectangle 1"/>
+              <a:t>Alarm</a:t>
+            </a:r>
+          </a:p>
+        </p:txBody>
+      </p:sp>
+      <p:cxnSp>
+        <p:nvCxnSpPr>
+          <p:cNvPr id="11" name="Connector 10"/>
+          <p:cNvCxnSpPr/>
+          <p:nvPr/>
+        </p:nvCxnSpPr>
+        <p:spPr>
+          <a:xfrm>
+            <a:off x="4912614" y="3246120"/>
+            <a:ext cx="176022" cy="0"/>
+          </a:xfrm>
+          <a:prstGeom prst="line">
+            <a:avLst/>
+          </a:prstGeom>
+          <a:ln w="31750">
+            <a:solidFill>
+              <a:srgbClr val="F47B20"/>
+            </a:solidFill>
+            <a:tailEnd type="triangle"/>
+          </a:ln>
+        </p:spPr>
+        <p:style>
+          <a:lnRef idx="2">
+            <a:schemeClr val="accent1"/>
+          </a:lnRef>
+          <a:fillRef idx="0">
+            <a:schemeClr val="accent1"/>
+          </a:fillRef>
+          <a:effectRef idx="1">
+            <a:schemeClr val="accent1"/>
+          </a:effectRef>
+          <a:fontRef idx="minor">
+            <a:schemeClr val="tx1"/>
+          </a:fontRef>
+        </p:style>
+      </p:cxnSp>
+      <p:sp>
+        <p:nvSpPr>
+          <p:cNvPr id="12" name="Rectangle 11"/>
           <p:cNvSpPr/>
           <p:nvPr/>
         </p:nvSpPr>
         <p:spPr>
           <a:xfrm>
-            <a:off x="0" y="0"/>
-            <a:ext cx="12191695" cy="384048"/>
+            <a:off x="5143500" y="2743200"/>
+            <a:ext cx="1874519" cy="1005840"/>
           </a:xfrm>
           <a:prstGeom prst="rect">
             <a:avLst/>
           </a:prstGeom>
           <a:solidFill>
-            <a:srgbClr val="0B2D5B"/>
+            <a:srgbClr val="FFFFFF"/>
           </a:solidFill>
-          <a:ln>
-            <a:noFill/>
+          <a:ln w="15875">
+            <a:solidFill>
+              <a:srgbClr val="0B2D5B"/>
+            </a:solidFill>
           </a:ln>
           <a:effectLst/>
         </p:spPr>
@@ -6980,14 +8840,14 @@
       </p:sp>
       <p:sp>
         <p:nvSpPr>
-          <p:cNvPr id="3" name="TextBox 2"/>
+          <p:cNvPr id="13" name="TextBox 12"/>
           <p:cNvSpPr txBox="1"/>
           <p:nvPr/>
         </p:nvSpPr>
         <p:spPr>
           <a:xfrm>
-            <a:off x="548640" y="100584"/>
-            <a:ext cx="10972800" cy="274320"/>
+            <a:off x="5143500" y="2743200"/>
+            <a:ext cx="1874519" cy="1005840"/>
           </a:xfrm>
           <a:prstGeom prst="rect">
             <a:avLst/>
@@ -6995,485 +8855,85 @@
           <a:noFill/>
         </p:spPr>
         <p:txBody>
-          <a:bodyPr wrap="square" anchor="t" lIns="0" rIns="0" tIns="0" bIns="0">
+          <a:bodyPr wrap="square" anchor="ctr" lIns="0" rIns="0" tIns="0" bIns="0">
             <a:spAutoFit/>
           </a:bodyPr>
           <a:lstStyle/>
           <a:p>
-            <a:pPr algn="l">
-              <a:spcAft>
-                <a:spcPts val="495"/>
-              </a:spcAft>
-            </a:pPr>
-            <a:r>
-              <a:rPr sz="1100" b="1" i="0">
-                <a:solidFill>
-                  <a:srgbClr val="FFFFFF"/>
-                </a:solidFill>
-                <a:latin typeface="Inter Tight"/>
-              </a:rPr>
-              <a:t>TEACHER PAGE  ·  skipped when you present  ·  Every student in the room</a:t>
-            </a:r>
-          </a:p>
-        </p:txBody>
-      </p:sp>
-      <p:sp>
-        <p:nvSpPr>
-          <p:cNvPr id="4" name="TextBox 3"/>
-          <p:cNvSpPr txBox="1"/>
-          <p:nvPr/>
-        </p:nvSpPr>
-        <p:spPr>
-          <a:xfrm>
-            <a:off x="548640" y="685800"/>
-            <a:ext cx="10972800" cy="640080"/>
-          </a:xfrm>
-          <a:prstGeom prst="rect">
-            <a:avLst/>
-          </a:prstGeom>
-          <a:noFill/>
-        </p:spPr>
-        <p:txBody>
-          <a:bodyPr wrap="square" anchor="t" lIns="0" rIns="0" tIns="0" bIns="0">
-            <a:spAutoFit/>
-          </a:bodyPr>
-          <a:lstStyle/>
-          <a:p>
-            <a:pPr algn="l">
-              <a:spcAft>
-                <a:spcPts val="1350"/>
-              </a:spcAft>
-            </a:pPr>
-            <a:r>
-              <a:rPr sz="3000" b="1" i="0">
+            <a:pPr algn="ctr">
+              <a:spcAft>
+                <a:spcPts val="900"/>
+              </a:spcAft>
+            </a:pPr>
+            <a:r>
+              <a:rPr sz="2000" b="1" i="0">
                 <a:solidFill>
                   <a:srgbClr val="1C1B19"/>
                 </a:solidFill>
                 <a:latin typeface="Source Serif 4"/>
               </a:rPr>
-              <a:t>Every student in the room</a:t>
-            </a:r>
-          </a:p>
-        </p:txBody>
-      </p:sp>
-      <p:sp>
-        <p:nvSpPr>
-          <p:cNvPr id="5" name="TextBox 4"/>
-          <p:cNvSpPr txBox="1"/>
-          <p:nvPr/>
-        </p:nvSpPr>
-        <p:spPr>
-          <a:xfrm>
-            <a:off x="548640" y="1325880"/>
-            <a:ext cx="10972800" cy="365760"/>
-          </a:xfrm>
-          <a:prstGeom prst="rect">
-            <a:avLst/>
-          </a:prstGeom>
-          <a:noFill/>
-        </p:spPr>
-        <p:txBody>
-          <a:bodyPr wrap="square" anchor="t" lIns="0" rIns="0" tIns="0" bIns="0">
-            <a:spAutoFit/>
-          </a:bodyPr>
-          <a:lstStyle/>
-          <a:p>
-            <a:pPr algn="l">
-              <a:spcAft>
-                <a:spcPts val="630"/>
-              </a:spcAft>
-            </a:pPr>
-            <a:r>
-              <a:rPr sz="1400" b="0" i="0">
-                <a:solidFill>
-                  <a:srgbClr val="5D5A54"/>
-                </a:solidFill>
-                <a:latin typeface="Inter Tight"/>
-              </a:rPr>
-              <a:t>Culture, family, identity, ability and money: what to keep in mind for this topic.</a:t>
-            </a:r>
-          </a:p>
-        </p:txBody>
-      </p:sp>
-      <p:sp>
-        <p:nvSpPr>
-          <p:cNvPr id="6" name="TextBox 5"/>
-          <p:cNvSpPr txBox="1"/>
-          <p:nvPr/>
-        </p:nvSpPr>
-        <p:spPr>
-          <a:xfrm>
-            <a:off x="548640" y="1828800"/>
-            <a:ext cx="5394960" cy="4572000"/>
-          </a:xfrm>
-          <a:prstGeom prst="rect">
-            <a:avLst/>
-          </a:prstGeom>
-          <a:noFill/>
-        </p:spPr>
-        <p:txBody>
-          <a:bodyPr wrap="square" anchor="t" lIns="0" rIns="0" tIns="0" bIns="0">
-            <a:spAutoFit/>
-          </a:bodyPr>
-          <a:lstStyle/>
-          <a:p>
-            <a:pPr algn="l">
-              <a:spcAft>
-                <a:spcPts val="585"/>
-              </a:spcAft>
-            </a:pPr>
-            <a:r>
-              <a:rPr sz="1500" b="1" i="0">
-                <a:solidFill>
-                  <a:srgbClr val="1C1B19"/>
-                </a:solidFill>
-                <a:latin typeface="Source Serif 4"/>
-              </a:rPr>
-              <a:t>Stakes that belong to the whole family.</a:t>
-            </a:r>
-          </a:p>
-          <a:p>
-            <a:pPr algn="l">
-              <a:spcAft>
-                <a:spcPts val="585"/>
-              </a:spcAft>
-            </a:pPr>
-            <a:r>
-              <a:rPr sz="1300" b="0" i="0">
-                <a:solidFill>
-                  <a:srgbClr val="1C1B19"/>
-                </a:solidFill>
-                <a:latin typeface="Source Serif 4"/>
-              </a:rPr>
-              <a:t>For some students, a score feels like it belongs to parents who sacrificed, or to being the first in the family to take a big test. That can motivate and weigh at once. Don't tell students to stop caring. Help them name it, privately, and talk to someone they trust.</a:t>
-            </a:r>
-          </a:p>
-          <a:p>
-            <a:pPr algn="l">
-              <a:spcAft>
-                <a:spcPts val="585"/>
-              </a:spcAft>
-            </a:pPr>
-            <a:r>
-              <a:rPr sz="1300" b="0" i="0">
-                <a:solidFill>
-                  <a:srgbClr val="1C1B19"/>
-                </a:solidFill>
-                <a:latin typeface="Source Serif 4"/>
-              </a:rPr>
-              <a:t/>
-            </a:r>
-          </a:p>
-          <a:p>
-            <a:pPr algn="l">
-              <a:spcAft>
-                <a:spcPts val="585"/>
-              </a:spcAft>
-            </a:pPr>
-            <a:r>
-              <a:rPr sz="1500" b="1" i="0">
-                <a:solidFill>
-                  <a:srgbClr val="1C1B19"/>
-                </a:solidFill>
-                <a:latin typeface="Source Serif 4"/>
-              </a:rPr>
-              <a:t>Disability and neurodivergence.</a:t>
-            </a:r>
-          </a:p>
-          <a:p>
-            <a:pPr algn="l">
-              <a:spcAft>
-                <a:spcPts val="585"/>
-              </a:spcAft>
-            </a:pPr>
-            <a:r>
-              <a:rPr sz="1300" b="0" i="0">
-                <a:solidFill>
-                  <a:srgbClr val="1C1B19"/>
-                </a:solidFill>
-                <a:latin typeface="Source Serif 4"/>
-              </a:rPr>
-              <a:t>Students with ADHD, anxiety disorders, learning differences or slower processing may already have accommodations or need them. Mention learning plans as a normal, available support. The worry write can be typed, spoken or drawn as a list.</a:t>
-            </a:r>
-          </a:p>
-          <a:p>
-            <a:pPr algn="l">
-              <a:spcAft>
-                <a:spcPts val="585"/>
-              </a:spcAft>
-            </a:pPr>
-            <a:r>
-              <a:rPr sz="1300" b="0" i="0">
-                <a:solidFill>
-                  <a:srgbClr val="1C1B19"/>
-                </a:solidFill>
-                <a:latin typeface="Source Serif 4"/>
-              </a:rPr>
-              <a:t/>
-            </a:r>
-          </a:p>
-          <a:p>
-            <a:pPr algn="l">
-              <a:spcAft>
-                <a:spcPts val="585"/>
-              </a:spcAft>
-            </a:pPr>
-            <a:r>
-              <a:rPr sz="1500" b="1" i="0">
-                <a:solidFill>
-                  <a:srgbClr val="1C1B19"/>
-                </a:solidFill>
-                <a:latin typeface="Source Serif 4"/>
-              </a:rPr>
-              <a:t>Testing in a second language.</a:t>
-            </a:r>
-          </a:p>
-          <a:p>
-            <a:pPr algn="l">
-              <a:spcAft>
-                <a:spcPts val="585"/>
-              </a:spcAft>
-            </a:pPr>
-            <a:r>
-              <a:rPr sz="1300" b="0" i="0">
-                <a:solidFill>
-                  <a:srgbClr val="1C1B19"/>
-                </a:solidFill>
-                <a:latin typeface="Source Serif 4"/>
-              </a:rPr>
-              <a:t>A student learning English is doing extra work on every question, and stress takes up the same working memory. The worry write works in any language. Ask the student's teacher or counselor about language supports on tests.</a:t>
-            </a:r>
-          </a:p>
-          <a:p>
-            <a:pPr algn="l">
-              <a:spcAft>
-                <a:spcPts val="585"/>
-              </a:spcAft>
-            </a:pPr>
-            <a:r>
-              <a:rPr sz="1300" b="0" i="0">
-                <a:solidFill>
-                  <a:srgbClr val="1C1B19"/>
-                </a:solidFill>
-                <a:latin typeface="Source Serif 4"/>
-              </a:rPr>
-              <a:t/>
-            </a:r>
-          </a:p>
-        </p:txBody>
-      </p:sp>
-      <p:sp>
-        <p:nvSpPr>
-          <p:cNvPr id="7" name="TextBox 6"/>
-          <p:cNvSpPr txBox="1"/>
-          <p:nvPr/>
-        </p:nvSpPr>
-        <p:spPr>
-          <a:xfrm>
-            <a:off x="6217920" y="1828800"/>
-            <a:ext cx="5394960" cy="4572000"/>
-          </a:xfrm>
-          <a:prstGeom prst="rect">
-            <a:avLst/>
-          </a:prstGeom>
-          <a:noFill/>
-        </p:spPr>
-        <p:txBody>
-          <a:bodyPr wrap="square" anchor="t" lIns="0" rIns="0" tIns="0" bIns="0">
-            <a:spAutoFit/>
-          </a:bodyPr>
-          <a:lstStyle/>
-          <a:p>
-            <a:pPr algn="l">
-              <a:spcAft>
-                <a:spcPts val="585"/>
-              </a:spcAft>
-            </a:pPr>
-            <a:r>
-              <a:rPr sz="1500" b="1" i="0">
-                <a:solidFill>
-                  <a:srgbClr val="1C1B19"/>
-                </a:solidFill>
-                <a:latin typeface="Source Serif 4"/>
-              </a:rPr>
-              <a:t>Prep costs money. These moves don't.</a:t>
-            </a:r>
-          </a:p>
-          <a:p>
-            <a:pPr algn="l">
-              <a:spcAft>
-                <a:spcPts val="585"/>
-              </a:spcAft>
-            </a:pPr>
-            <a:r>
-              <a:rPr sz="1300" b="0" i="0">
-                <a:solidFill>
-                  <a:srgbClr val="1C1B19"/>
-                </a:solidFill>
-                <a:latin typeface="Source Serif 4"/>
-              </a:rPr>
-              <a:t>Some classmates have paid tutors or prep courses. Everything in this lesson is free: practice testing with old quizzes, timed practice at home, sleep, the long exhale, the worry write.</a:t>
-            </a:r>
-          </a:p>
-          <a:p>
-            <a:pPr algn="l">
-              <a:spcAft>
-                <a:spcPts val="585"/>
-              </a:spcAft>
-            </a:pPr>
-            <a:r>
-              <a:rPr sz="1300" b="0" i="0">
-                <a:solidFill>
-                  <a:srgbClr val="1C1B19"/>
-                </a:solidFill>
-                <a:latin typeface="Source Serif 4"/>
-              </a:rPr>
-              <a:t/>
-            </a:r>
-          </a:p>
-          <a:p>
-            <a:pPr algn="l">
-              <a:spcAft>
-                <a:spcPts val="585"/>
-              </a:spcAft>
-            </a:pPr>
-            <a:r>
-              <a:rPr sz="1500" b="1" i="0">
-                <a:solidFill>
-                  <a:srgbClr val="1C1B19"/>
-                </a:solidFill>
-                <a:latin typeface="Source Serif 4"/>
-              </a:rPr>
-              <a:t>Faith and what grounds a student.</a:t>
-            </a:r>
-          </a:p>
-          <a:p>
-            <a:pPr algn="l">
-              <a:spcAft>
-                <a:spcPts val="585"/>
-              </a:spcAft>
-            </a:pPr>
-            <a:r>
-              <a:rPr sz="1300" b="0" i="0">
-                <a:solidFill>
-                  <a:srgbClr val="1C1B19"/>
-                </a:solidFill>
-                <a:latin typeface="Source Serif 4"/>
-              </a:rPr>
-              <a:t>"I'm getting ready" can sit beside a prayer, a phrase from home, or whatever grounds a student. Fasting or religious holidays during exam weeks can affect sleep and energy; a student can plan practice around them and talk with a teacher early.</a:t>
-            </a:r>
-          </a:p>
-          <a:p>
-            <a:pPr algn="l">
-              <a:spcAft>
-                <a:spcPts val="585"/>
-              </a:spcAft>
-            </a:pPr>
-            <a:r>
-              <a:rPr sz="1300" b="0" i="0">
-                <a:solidFill>
-                  <a:srgbClr val="1C1B19"/>
-                </a:solidFill>
-                <a:latin typeface="Source Serif 4"/>
-              </a:rPr>
-              <a:t/>
-            </a:r>
-          </a:p>
-          <a:p>
-            <a:pPr algn="l">
-              <a:spcAft>
-                <a:spcPts val="585"/>
-              </a:spcAft>
-            </a:pPr>
-            <a:r>
-              <a:rPr sz="1500" b="1" i="0">
-                <a:solidFill>
-                  <a:srgbClr val="1C1B19"/>
-                </a:solidFill>
-                <a:latin typeface="Source Serif 4"/>
-              </a:rPr>
-              <a:t>Who the trusted person is.</a:t>
-            </a:r>
-          </a:p>
-          <a:p>
-            <a:pPr algn="l">
-              <a:spcAft>
-                <a:spcPts val="585"/>
-              </a:spcAft>
-            </a:pPr>
-            <a:r>
-              <a:rPr sz="1300" b="0" i="0">
-                <a:solidFill>
-                  <a:srgbClr val="1C1B19"/>
-                </a:solidFill>
-                <a:latin typeface="Source Serif 4"/>
-              </a:rPr>
-              <a:t>"Talk with someone you trust" might be a grandparent, an older sibling, a coach, a foster parent, or a friend. Don't assume two parents or a parent at home in any scenario.</a:t>
-            </a:r>
-          </a:p>
-          <a:p>
-            <a:pPr algn="l">
-              <a:spcAft>
-                <a:spcPts val="585"/>
-              </a:spcAft>
-            </a:pPr>
-            <a:r>
-              <a:rPr sz="1300" b="0" i="0">
-                <a:solidFill>
-                  <a:srgbClr val="1C1B19"/>
-                </a:solidFill>
-                <a:latin typeface="Source Serif 4"/>
-              </a:rPr>
-              <a:t/>
-            </a:r>
-          </a:p>
-        </p:txBody>
-      </p:sp>
-    </p:spTree>
-  </p:cSld>
-  <p:clrMapOvr>
-    <a:masterClrMapping/>
-  </p:clrMapOvr>
-</p:sld>
-</file>
-
-<file path=ppt/slides/slide4.xml><?xml version="1.0" encoding="utf-8"?>
-<p:sld xmlns:a="http://schemas.openxmlformats.org/drawingml/2006/main" xmlns:p="http://schemas.openxmlformats.org/presentationml/2006/main" xmlns:r="http://schemas.openxmlformats.org/officeDocument/2006/relationships" show="0">
-  <p:cSld>
-    <p:bg>
-      <p:bgPr>
-        <a:solidFill>
-          <a:srgbClr val="EEEBE4"/>
-        </a:solidFill>
-        <a:effectLst/>
-      </p:bgPr>
-    </p:bg>
-    <p:spTree>
-      <p:nvGrpSpPr>
-        <p:cNvPr id="1" name=""/>
-        <p:cNvGrpSpPr/>
-        <p:nvPr/>
-      </p:nvGrpSpPr>
-      <p:grpSpPr/>
-      <p:sp>
-        <p:nvSpPr>
-          <p:cNvPr id="2" name="Rectangle 1"/>
+              <a:t>Racing heart</a:t>
+            </a:r>
+          </a:p>
+        </p:txBody>
+      </p:sp>
+      <p:cxnSp>
+        <p:nvCxnSpPr>
+          <p:cNvPr id="14" name="Connector 13"/>
+          <p:cNvCxnSpPr/>
+          <p:nvPr/>
+        </p:nvCxnSpPr>
+        <p:spPr>
+          <a:xfrm>
+            <a:off x="7072883" y="3246120"/>
+            <a:ext cx="176023" cy="0"/>
+          </a:xfrm>
+          <a:prstGeom prst="line">
+            <a:avLst/>
+          </a:prstGeom>
+          <a:ln w="31750">
+            <a:solidFill>
+              <a:srgbClr val="F47B20"/>
+            </a:solidFill>
+            <a:tailEnd type="triangle"/>
+          </a:ln>
+        </p:spPr>
+        <p:style>
+          <a:lnRef idx="2">
+            <a:schemeClr val="accent1"/>
+          </a:lnRef>
+          <a:fillRef idx="0">
+            <a:schemeClr val="accent1"/>
+          </a:fillRef>
+          <a:effectRef idx="1">
+            <a:schemeClr val="accent1"/>
+          </a:effectRef>
+          <a:fontRef idx="minor">
+            <a:schemeClr val="tx1"/>
+          </a:fontRef>
+        </p:style>
+      </p:cxnSp>
+      <p:sp>
+        <p:nvSpPr>
+          <p:cNvPr id="15" name="Rectangle 14"/>
           <p:cNvSpPr/>
           <p:nvPr/>
         </p:nvSpPr>
         <p:spPr>
           <a:xfrm>
-            <a:off x="0" y="0"/>
-            <a:ext cx="12191695" cy="384048"/>
+            <a:off x="7303770" y="2743200"/>
+            <a:ext cx="1874519" cy="1005840"/>
           </a:xfrm>
           <a:prstGeom prst="rect">
             <a:avLst/>
           </a:prstGeom>
           <a:solidFill>
-            <a:srgbClr val="0B2D5B"/>
+            <a:srgbClr val="FFFFFF"/>
           </a:solidFill>
-          <a:ln>
-            <a:noFill/>
+          <a:ln w="15875">
+            <a:solidFill>
+              <a:srgbClr val="0B2D5B"/>
+            </a:solidFill>
           </a:ln>
           <a:effectLst/>
         </p:spPr>
@@ -7501,14 +8961,14 @@
       </p:sp>
       <p:sp>
         <p:nvSpPr>
-          <p:cNvPr id="3" name="TextBox 2"/>
+          <p:cNvPr id="16" name="TextBox 15"/>
           <p:cNvSpPr txBox="1"/>
           <p:nvPr/>
         </p:nvSpPr>
         <p:spPr>
           <a:xfrm>
-            <a:off x="548640" y="100584"/>
-            <a:ext cx="10972800" cy="274320"/>
+            <a:off x="7303770" y="2743200"/>
+            <a:ext cx="1874519" cy="1005840"/>
           </a:xfrm>
           <a:prstGeom prst="rect">
             <a:avLst/>
@@ -7516,350 +8976,85 @@
           <a:noFill/>
         </p:spPr>
         <p:txBody>
-          <a:bodyPr wrap="square" anchor="t" lIns="0" rIns="0" tIns="0" bIns="0">
+          <a:bodyPr wrap="square" anchor="ctr" lIns="0" rIns="0" tIns="0" bIns="0">
             <a:spAutoFit/>
           </a:bodyPr>
           <a:lstStyle/>
           <a:p>
-            <a:pPr algn="l">
-              <a:spcAft>
-                <a:spcPts val="495"/>
-              </a:spcAft>
-            </a:pPr>
-            <a:r>
-              <a:rPr sz="1100" b="1" i="0">
-                <a:solidFill>
-                  <a:srgbClr val="FFFFFF"/>
-                </a:solidFill>
-                <a:latin typeface="Inter Tight"/>
-              </a:rPr>
-              <a:t>TEACHER PAGE  ·  skipped when you present  ·  Background</a:t>
-            </a:r>
-          </a:p>
-        </p:txBody>
-      </p:sp>
-      <p:sp>
-        <p:nvSpPr>
-          <p:cNvPr id="4" name="TextBox 3"/>
-          <p:cNvSpPr txBox="1"/>
-          <p:nvPr/>
-        </p:nvSpPr>
-        <p:spPr>
-          <a:xfrm>
-            <a:off x="548640" y="685800"/>
-            <a:ext cx="10972800" cy="640080"/>
-          </a:xfrm>
-          <a:prstGeom prst="rect">
-            <a:avLst/>
-          </a:prstGeom>
-          <a:noFill/>
-        </p:spPr>
-        <p:txBody>
-          <a:bodyPr wrap="square" anchor="t" lIns="0" rIns="0" tIns="0" bIns="0">
-            <a:spAutoFit/>
-          </a:bodyPr>
-          <a:lstStyle/>
-          <a:p>
-            <a:pPr algn="l">
-              <a:spcAft>
-                <a:spcPts val="1350"/>
-              </a:spcAft>
-            </a:pPr>
-            <a:r>
-              <a:rPr sz="3000" b="1" i="0">
+            <a:pPr algn="ctr">
+              <a:spcAft>
+                <a:spcPts val="900"/>
+              </a:spcAft>
+            </a:pPr>
+            <a:r>
+              <a:rPr sz="2000" b="1" i="0">
                 <a:solidFill>
                   <a:srgbClr val="1C1B19"/>
                 </a:solidFill>
                 <a:latin typeface="Source Serif 4"/>
               </a:rPr>
-              <a:t>What the research says</a:t>
-            </a:r>
-          </a:p>
-        </p:txBody>
-      </p:sp>
-      <p:sp>
-        <p:nvSpPr>
-          <p:cNvPr id="5" name="TextBox 4"/>
-          <p:cNvSpPr txBox="1"/>
-          <p:nvPr/>
-        </p:nvSpPr>
-        <p:spPr>
-          <a:xfrm>
-            <a:off x="548640" y="1463040"/>
-            <a:ext cx="5394960" cy="4937760"/>
-          </a:xfrm>
-          <a:prstGeom prst="rect">
-            <a:avLst/>
-          </a:prstGeom>
-          <a:noFill/>
-        </p:spPr>
-        <p:txBody>
-          <a:bodyPr wrap="square" anchor="t" lIns="0" rIns="0" tIns="0" bIns="0">
-            <a:spAutoFit/>
-          </a:bodyPr>
-          <a:lstStyle/>
-          <a:p>
-            <a:pPr algn="l">
-              <a:spcAft>
-                <a:spcPts val="585"/>
-              </a:spcAft>
-            </a:pPr>
-            <a:r>
-              <a:rPr sz="1300" b="0" i="0">
-                <a:solidFill>
-                  <a:srgbClr val="1C1B19"/>
-                </a:solidFill>
-                <a:latin typeface="Source Serif 4"/>
-              </a:rPr>
-              <a:t>Even mild stress you feel you can't control can quickly weaken the prefrontal cortex, where working memory and reasoning happen.</a:t>
-            </a:r>
-          </a:p>
-          <a:p>
-            <a:pPr algn="l">
-              <a:spcAft>
-                <a:spcPts val="585"/>
-              </a:spcAft>
-            </a:pPr>
-            <a:r>
-              <a:rPr sz="1050" b="0" i="0">
-                <a:solidFill>
-                  <a:srgbClr val="5D5A54"/>
-                </a:solidFill>
-                <a:latin typeface="Inter Tight"/>
-              </a:rPr>
-              <a:t>Arnsten, Nature Reviews Neuroscience, 2009</a:t>
-            </a:r>
-          </a:p>
-          <a:p>
-            <a:pPr algn="l">
-              <a:spcAft>
-                <a:spcPts val="585"/>
-              </a:spcAft>
-            </a:pPr>
-            <a:r>
-              <a:rPr sz="1300" b="0" i="0">
-                <a:solidFill>
-                  <a:srgbClr val="1C1B19"/>
-                </a:solidFill>
-                <a:latin typeface="Source Serif 4"/>
-              </a:rPr>
-              <a:t>A review of 238 studies linked test anxiety to lower scores, with some of the strongest links on entrance exams and state tests in high school. The effects are small to moderate.</a:t>
-            </a:r>
-          </a:p>
-          <a:p>
-            <a:pPr algn="l">
-              <a:spcAft>
-                <a:spcPts val="585"/>
-              </a:spcAft>
-            </a:pPr>
-            <a:r>
-              <a:rPr sz="1050" b="0" i="0">
-                <a:solidFill>
-                  <a:srgbClr val="5D5A54"/>
-                </a:solidFill>
-                <a:latin typeface="Inter Tight"/>
-              </a:rPr>
-              <a:t>von der Embse et al., Journal of Affective Disorders, 2018</a:t>
-            </a:r>
-          </a:p>
-          <a:p>
-            <a:pPr algn="l">
-              <a:spcAft>
-                <a:spcPts val="585"/>
-              </a:spcAft>
-            </a:pPr>
-            <a:r>
-              <a:rPr sz="1300" b="0" i="0">
-                <a:solidFill>
-                  <a:srgbClr val="1C1B19"/>
-                </a:solidFill>
-                <a:latin typeface="Source Serif 4"/>
-              </a:rPr>
-              <a:t>Most people think calming down is the best way to handle nerves. People who told themselves "I am excited" before singing, a speech or a math test felt more excited and performed better than people told to calm down.</a:t>
-            </a:r>
-          </a:p>
-          <a:p>
-            <a:pPr algn="l">
-              <a:spcAft>
-                <a:spcPts val="585"/>
-              </a:spcAft>
-            </a:pPr>
-            <a:r>
-              <a:rPr sz="1050" b="0" i="0">
-                <a:solidFill>
-                  <a:srgbClr val="5D5A54"/>
-                </a:solidFill>
-                <a:latin typeface="Inter Tight"/>
-              </a:rPr>
-              <a:t>Brooks, Journal of Experimental Psychology: General, 2014</a:t>
-            </a:r>
-          </a:p>
-        </p:txBody>
-      </p:sp>
-      <p:sp>
-        <p:nvSpPr>
-          <p:cNvPr id="6" name="TextBox 5"/>
-          <p:cNvSpPr txBox="1"/>
-          <p:nvPr/>
-        </p:nvSpPr>
-        <p:spPr>
-          <a:xfrm>
-            <a:off x="6217920" y="1463040"/>
-            <a:ext cx="5394960" cy="4937760"/>
-          </a:xfrm>
-          <a:prstGeom prst="rect">
-            <a:avLst/>
-          </a:prstGeom>
-          <a:noFill/>
-        </p:spPr>
-        <p:txBody>
-          <a:bodyPr wrap="square" anchor="t" lIns="0" rIns="0" tIns="0" bIns="0">
-            <a:spAutoFit/>
-          </a:bodyPr>
-          <a:lstStyle/>
-          <a:p>
-            <a:pPr algn="l">
-              <a:spcAft>
-                <a:spcPts val="585"/>
-              </a:spcAft>
-            </a:pPr>
-            <a:r>
-              <a:rPr sz="1300" b="0" i="0">
-                <a:solidFill>
-                  <a:srgbClr val="1C1B19"/>
-                </a:solidFill>
-                <a:latin typeface="Source Serif 4"/>
-              </a:rPr>
-              <a:t>Students told that a racing heart can help performance did better on GRE math, in the lab and on their real exam months later.</a:t>
-            </a:r>
-          </a:p>
-          <a:p>
-            <a:pPr algn="l">
-              <a:spcAft>
-                <a:spcPts val="585"/>
-              </a:spcAft>
-            </a:pPr>
-            <a:r>
-              <a:rPr sz="1050" b="0" i="0">
-                <a:solidFill>
-                  <a:srgbClr val="5D5A54"/>
-                </a:solidFill>
-                <a:latin typeface="Inter Tight"/>
-              </a:rPr>
-              <a:t>Jamieson et al., Journal of Experimental Social Psychology, 2010</a:t>
-            </a:r>
-          </a:p>
-          <a:p>
-            <a:pPr algn="l">
-              <a:spcAft>
-                <a:spcPts val="585"/>
-              </a:spcAft>
-            </a:pPr>
-            <a:r>
-              <a:rPr sz="1300" b="0" i="0">
-                <a:solidFill>
-                  <a:srgbClr val="1C1B19"/>
-                </a:solidFill>
-                <a:latin typeface="Source Serif 4"/>
-              </a:rPr>
-              <a:t>People who learned by practice testing kept their memory under acute stress. People who learned by rereading lost more, especially after the stressor.</a:t>
-            </a:r>
-          </a:p>
-          <a:p>
-            <a:pPr algn="l">
-              <a:spcAft>
-                <a:spcPts val="585"/>
-              </a:spcAft>
-            </a:pPr>
-            <a:r>
-              <a:rPr sz="1050" b="0" i="0">
-                <a:solidFill>
-                  <a:srgbClr val="5D5A54"/>
-                </a:solidFill>
-                <a:latin typeface="Inter Tight"/>
-              </a:rPr>
-              <a:t>Smith, Floerke and Thomas, Science, 2016</a:t>
-            </a:r>
-          </a:p>
-          <a:p>
-            <a:pPr algn="l">
-              <a:spcAft>
-                <a:spcPts val="585"/>
-              </a:spcAft>
-            </a:pPr>
-            <a:r>
-              <a:rPr sz="1300" b="0" i="0">
-                <a:solidFill>
-                  <a:srgbClr val="1C1B19"/>
-                </a:solidFill>
-                <a:latin typeface="Source Serif 4"/>
-              </a:rPr>
-              <a:t>High school students who wrote freely about their test worries for about ten minutes before a final scored higher. The most anxious students gained the most.</a:t>
-            </a:r>
-          </a:p>
-          <a:p>
-            <a:pPr algn="l">
-              <a:spcAft>
-                <a:spcPts val="585"/>
-              </a:spcAft>
-            </a:pPr>
-            <a:r>
-              <a:rPr sz="1050" b="0" i="0">
-                <a:solidFill>
-                  <a:srgbClr val="5D5A54"/>
-                </a:solidFill>
-                <a:latin typeface="Inter Tight"/>
-              </a:rPr>
-              <a:t>Ramirez and Beilock, Science, 2011</a:t>
-            </a:r>
-          </a:p>
-        </p:txBody>
-      </p:sp>
-    </p:spTree>
-  </p:cSld>
-  <p:clrMapOvr>
-    <a:masterClrMapping/>
-  </p:clrMapOvr>
-</p:sld>
-</file>
-
-<file path=ppt/slides/slide5.xml><?xml version="1.0" encoding="utf-8"?>
-<p:sld xmlns:a="http://schemas.openxmlformats.org/drawingml/2006/main" xmlns:p="http://schemas.openxmlformats.org/presentationml/2006/main" xmlns:r="http://schemas.openxmlformats.org/officeDocument/2006/relationships">
-  <p:cSld>
-    <p:bg>
-      <p:bgPr>
-        <a:solidFill>
-          <a:srgbClr val="0B2D5B"/>
-        </a:solidFill>
-        <a:effectLst/>
-      </p:bgPr>
-    </p:bg>
-    <p:spTree>
-      <p:nvGrpSpPr>
-        <p:cNvPr id="1" name=""/>
-        <p:cNvGrpSpPr/>
-        <p:nvPr/>
-      </p:nvGrpSpPr>
-      <p:grpSpPr/>
-      <p:sp>
-        <p:nvSpPr>
-          <p:cNvPr id="2" name="Rectangle 1"/>
+              <a:t>Worry fills memory</a:t>
+            </a:r>
+          </a:p>
+        </p:txBody>
+      </p:sp>
+      <p:cxnSp>
+        <p:nvCxnSpPr>
+          <p:cNvPr id="17" name="Connector 16"/>
+          <p:cNvCxnSpPr/>
+          <p:nvPr/>
+        </p:nvCxnSpPr>
+        <p:spPr>
+          <a:xfrm>
+            <a:off x="9233154" y="3246120"/>
+            <a:ext cx="176022" cy="0"/>
+          </a:xfrm>
+          <a:prstGeom prst="line">
+            <a:avLst/>
+          </a:prstGeom>
+          <a:ln w="31750">
+            <a:solidFill>
+              <a:srgbClr val="F47B20"/>
+            </a:solidFill>
+            <a:tailEnd type="triangle"/>
+          </a:ln>
+        </p:spPr>
+        <p:style>
+          <a:lnRef idx="2">
+            <a:schemeClr val="accent1"/>
+          </a:lnRef>
+          <a:fillRef idx="0">
+            <a:schemeClr val="accent1"/>
+          </a:fillRef>
+          <a:effectRef idx="1">
+            <a:schemeClr val="accent1"/>
+          </a:effectRef>
+          <a:fontRef idx="minor">
+            <a:schemeClr val="tx1"/>
+          </a:fontRef>
+        </p:style>
+      </p:cxnSp>
+      <p:sp>
+        <p:nvSpPr>
+          <p:cNvPr id="18" name="Rectangle 17"/>
           <p:cNvSpPr/>
           <p:nvPr/>
         </p:nvSpPr>
         <p:spPr>
           <a:xfrm>
-            <a:off x="548640" y="502920"/>
-            <a:ext cx="457200" cy="54864"/>
+            <a:off x="9464040" y="2743200"/>
+            <a:ext cx="1874519" cy="1005840"/>
           </a:xfrm>
           <a:prstGeom prst="rect">
             <a:avLst/>
           </a:prstGeom>
           <a:solidFill>
-            <a:srgbClr val="F47B20"/>
+            <a:srgbClr val="FFFFFF"/>
           </a:solidFill>
-          <a:ln>
-            <a:noFill/>
+          <a:ln w="15875">
+            <a:solidFill>
+              <a:srgbClr val="0B2D5B"/>
+            </a:solidFill>
           </a:ln>
           <a:effectLst/>
         </p:spPr>
@@ -7887,14 +9082,53 @@
       </p:sp>
       <p:sp>
         <p:nvSpPr>
-          <p:cNvPr id="3" name="TextBox 2"/>
+          <p:cNvPr id="19" name="TextBox 18"/>
           <p:cNvSpPr txBox="1"/>
           <p:nvPr/>
         </p:nvSpPr>
         <p:spPr>
           <a:xfrm>
-            <a:off x="1143000" y="393192"/>
-            <a:ext cx="8229600" cy="274320"/>
+            <a:off x="9464040" y="2743200"/>
+            <a:ext cx="1874519" cy="1005840"/>
+          </a:xfrm>
+          <a:prstGeom prst="rect">
+            <a:avLst/>
+          </a:prstGeom>
+          <a:noFill/>
+        </p:spPr>
+        <p:txBody>
+          <a:bodyPr wrap="square" anchor="ctr" lIns="0" rIns="0" tIns="0" bIns="0">
+            <a:spAutoFit/>
+          </a:bodyPr>
+          <a:lstStyle/>
+          <a:p>
+            <a:pPr algn="ctr">
+              <a:spcAft>
+                <a:spcPts val="900"/>
+              </a:spcAft>
+            </a:pPr>
+            <a:r>
+              <a:rPr sz="2000" b="1" i="0">
+                <a:solidFill>
+                  <a:srgbClr val="1C1B19"/>
+                </a:solidFill>
+                <a:latin typeface="Source Serif 4"/>
+              </a:rPr>
+              <a:t>Blank</a:t>
+            </a:r>
+          </a:p>
+        </p:txBody>
+      </p:sp>
+      <p:sp>
+        <p:nvSpPr>
+          <p:cNvPr id="20" name="TextBox 19"/>
+          <p:cNvSpPr txBox="1"/>
+          <p:nvPr/>
+        </p:nvSpPr>
+        <p:spPr>
+          <a:xfrm>
+            <a:off x="822960" y="4160520"/>
+            <a:ext cx="10515600" cy="457200"/>
           </a:xfrm>
           <a:prstGeom prst="rect">
             <a:avLst/>
@@ -7907,33 +9141,33 @@
           </a:bodyPr>
           <a:lstStyle/>
           <a:p>
-            <a:pPr algn="l">
-              <a:spcAft>
-                <a:spcPts val="540"/>
-              </a:spcAft>
-            </a:pPr>
-            <a:r>
-              <a:rPr sz="1200" b="1" i="0">
-                <a:solidFill>
-                  <a:srgbClr val="5D5A54"/>
+            <a:pPr algn="ctr">
+              <a:spcAft>
+                <a:spcPts val="810"/>
+              </a:spcAft>
+            </a:pPr>
+            <a:r>
+              <a:rPr sz="1800" b="1" i="0">
+                <a:solidFill>
+                  <a:srgbClr val="F47B20"/>
                 </a:solidFill>
                 <a:latin typeface="Inter Tight"/>
               </a:rPr>
-              <a:t>WHEN YOUR MIND GOES BLANK</a:t>
-            </a:r>
-          </a:p>
-        </p:txBody>
-      </p:sp>
-      <p:sp>
-        <p:nvSpPr>
-          <p:cNvPr id="4" name="TextBox 3"/>
+              <a:t>↺  and around again</a:t>
+            </a:r>
+          </a:p>
+        </p:txBody>
+      </p:sp>
+      <p:sp>
+        <p:nvSpPr>
+          <p:cNvPr id="21" name="TextBox 20"/>
           <p:cNvSpPr txBox="1"/>
           <p:nvPr/>
         </p:nvSpPr>
         <p:spPr>
           <a:xfrm>
-            <a:off x="8229600" y="6400800"/>
-            <a:ext cx="3410712" cy="274320"/>
+            <a:off x="822960" y="4846320"/>
+            <a:ext cx="10515600" cy="1188720"/>
           </a:xfrm>
           <a:prstGeom prst="rect">
             <a:avLst/>
@@ -7946,136 +9180,19 @@
           </a:bodyPr>
           <a:lstStyle/>
           <a:p>
-            <a:pPr algn="r">
-              <a:spcAft>
-                <a:spcPts val="450"/>
-              </a:spcAft>
-            </a:pPr>
-            <a:r>
-              <a:rPr sz="1000" b="0" i="0">
+            <a:pPr algn="ctr">
+              <a:spcAft>
+                <a:spcPts val="900"/>
+              </a:spcAft>
+            </a:pPr>
+            <a:r>
+              <a:rPr sz="2000" b="0" i="1">
                 <a:solidFill>
                   <a:srgbClr val="5D5A54"/>
                 </a:solidFill>
-                <a:latin typeface="Inter Tight"/>
-              </a:rPr>
-              <a:t>Beaver Counseling</a:t>
-            </a:r>
-          </a:p>
-        </p:txBody>
-      </p:sp>
-      <p:sp>
-        <p:nvSpPr>
-          <p:cNvPr id="5" name="TextBox 4"/>
-          <p:cNvSpPr txBox="1"/>
-          <p:nvPr/>
-        </p:nvSpPr>
-        <p:spPr>
-          <a:xfrm>
-            <a:off x="822960" y="2011680"/>
-            <a:ext cx="10515600" cy="1463040"/>
-          </a:xfrm>
-          <a:prstGeom prst="rect">
-            <a:avLst/>
-          </a:prstGeom>
-          <a:noFill/>
-        </p:spPr>
-        <p:txBody>
-          <a:bodyPr wrap="square" anchor="b" lIns="0" rIns="0" tIns="0" bIns="0">
-            <a:spAutoFit/>
-          </a:bodyPr>
-          <a:lstStyle/>
-          <a:p>
-            <a:pPr algn="l">
-              <a:spcAft>
-                <a:spcPts val="2700"/>
-              </a:spcAft>
-            </a:pPr>
-            <a:r>
-              <a:rPr sz="6000" b="1" i="0">
-                <a:solidFill>
-                  <a:srgbClr val="FFFFFF"/>
-                </a:solidFill>
-                <a:latin typeface="Source Serif 4"/>
-              </a:rPr>
-              <a:t>When Your Mind Goes Blank</a:t>
-            </a:r>
-          </a:p>
-        </p:txBody>
-      </p:sp>
-      <p:sp>
-        <p:nvSpPr>
-          <p:cNvPr id="6" name="TextBox 5"/>
-          <p:cNvSpPr txBox="1"/>
-          <p:nvPr/>
-        </p:nvSpPr>
-        <p:spPr>
-          <a:xfrm>
-            <a:off x="822960" y="3611880"/>
-            <a:ext cx="10515600" cy="914400"/>
-          </a:xfrm>
-          <a:prstGeom prst="rect">
-            <a:avLst/>
-          </a:prstGeom>
-          <a:noFill/>
-        </p:spPr>
-        <p:txBody>
-          <a:bodyPr wrap="square" anchor="t" lIns="0" rIns="0" tIns="0" bIns="0">
-            <a:spAutoFit/>
-          </a:bodyPr>
-          <a:lstStyle/>
-          <a:p>
-            <a:pPr algn="l">
-              <a:spcAft>
-                <a:spcPts val="1080"/>
-              </a:spcAft>
-            </a:pPr>
-            <a:r>
-              <a:rPr sz="2400" b="0" i="1">
-                <a:solidFill>
-                  <a:srgbClr val="E8E4DA"/>
-                </a:solidFill>
-                <a:latin typeface="Source Serif 4"/>
-              </a:rPr>
-              <a:t>You knew it last night. Here's how to get it back.</a:t>
-            </a:r>
-          </a:p>
-        </p:txBody>
-      </p:sp>
-      <p:sp>
-        <p:nvSpPr>
-          <p:cNvPr id="7" name="TextBox 6"/>
-          <p:cNvSpPr txBox="1"/>
-          <p:nvPr/>
-        </p:nvSpPr>
-        <p:spPr>
-          <a:xfrm>
-            <a:off x="822960" y="6035040"/>
-            <a:ext cx="7315200" cy="365760"/>
-          </a:xfrm>
-          <a:prstGeom prst="rect">
-            <a:avLst/>
-          </a:prstGeom>
-          <a:noFill/>
-        </p:spPr>
-        <p:txBody>
-          <a:bodyPr wrap="square" anchor="t" lIns="0" rIns="0" tIns="0" bIns="0">
-            <a:spAutoFit/>
-          </a:bodyPr>
-          <a:lstStyle/>
-          <a:p>
-            <a:pPr algn="l">
-              <a:spcAft>
-                <a:spcPts val="585"/>
-              </a:spcAft>
-            </a:pPr>
-            <a:r>
-              <a:rPr sz="1300" b="0" i="0">
-                <a:solidFill>
-                  <a:srgbClr val="E8E4DA"/>
-                </a:solidFill>
-                <a:latin typeface="Inter Tight"/>
-              </a:rPr>
-              <a:t>Beaver Upper School · Counseling</a:t>
+                <a:latin typeface="Source Serif 4"/>
+              </a:rPr>
+              <a:t>The knowledge is still in there. The part that pulls it up is busy.</a:t>
             </a:r>
           </a:p>
         </p:txBody>
@@ -8184,7 +9301,7 @@
                 </a:solidFill>
                 <a:latin typeface="Inter Tight"/>
               </a:rPr>
-              <a:t>MYTH OR FACT?</a:t>
+              <a:t>THE COUNTERINTUITIVE PART</a:t>
             </a:r>
           </a:p>
         </p:txBody>
@@ -8236,7 +9353,46 @@
         </p:nvSpPr>
         <p:spPr>
           <a:xfrm>
-            <a:off x="822960" y="1005840"/>
+            <a:off x="822960" y="1463040"/>
+            <a:ext cx="10515600" cy="3291840"/>
+          </a:xfrm>
+          <a:prstGeom prst="rect">
+            <a:avLst/>
+          </a:prstGeom>
+          <a:noFill/>
+        </p:spPr>
+        <p:txBody>
+          <a:bodyPr wrap="square" anchor="ctr" lIns="0" rIns="0" tIns="0" bIns="0">
+            <a:spAutoFit/>
+          </a:bodyPr>
+          <a:lstStyle/>
+          <a:p>
+            <a:pPr algn="l">
+              <a:spcAft>
+                <a:spcPts val="2070"/>
+              </a:spcAft>
+            </a:pPr>
+            <a:r>
+              <a:rPr sz="4600" b="1" i="0">
+                <a:solidFill>
+                  <a:srgbClr val="1C1B19"/>
+                </a:solidFill>
+                <a:latin typeface="Source Serif 4"/>
+              </a:rPr>
+              <a:t>Aim for ready, not calm.</a:t>
+            </a:r>
+          </a:p>
+        </p:txBody>
+      </p:sp>
+      <p:sp>
+        <p:nvSpPr>
+          <p:cNvPr id="6" name="TextBox 5"/>
+          <p:cNvSpPr txBox="1"/>
+          <p:nvPr/>
+        </p:nvSpPr>
+        <p:spPr>
+          <a:xfrm>
+            <a:off x="822960" y="4846320"/>
             <a:ext cx="10515600" cy="1097280"/>
           </a:xfrm>
           <a:prstGeom prst="rect">
@@ -8252,407 +9408,17 @@
           <a:p>
             <a:pPr algn="l">
               <a:spcAft>
-                <a:spcPts val="1620"/>
-              </a:spcAft>
-            </a:pPr>
-            <a:r>
-              <a:rPr sz="3600" b="1" i="0">
-                <a:solidFill>
-                  <a:srgbClr val="1C1B19"/>
-                </a:solidFill>
-                <a:latin typeface="Source Serif 4"/>
-              </a:rPr>
-              <a:t>Stand up if you think it's a fact.</a:t>
-            </a:r>
-          </a:p>
-        </p:txBody>
-      </p:sp>
-      <p:sp>
-        <p:nvSpPr>
-          <p:cNvPr id="6" name="TextBox 5"/>
-          <p:cNvSpPr txBox="1"/>
-          <p:nvPr/>
-        </p:nvSpPr>
-        <p:spPr>
-          <a:xfrm>
-            <a:off x="822960" y="2057400"/>
-            <a:ext cx="548640" cy="804672"/>
-          </a:xfrm>
-          <a:prstGeom prst="rect">
-            <a:avLst/>
-          </a:prstGeom>
-          <a:noFill/>
-        </p:spPr>
-        <p:txBody>
-          <a:bodyPr wrap="square" anchor="t" lIns="0" rIns="0" tIns="0" bIns="0">
-            <a:spAutoFit/>
-          </a:bodyPr>
-          <a:lstStyle/>
-          <a:p>
-            <a:pPr algn="l">
-              <a:spcAft>
-                <a:spcPts val="1170"/>
-              </a:spcAft>
-            </a:pPr>
-            <a:r>
-              <a:rPr sz="2600" b="1" i="0">
-                <a:solidFill>
-                  <a:srgbClr val="F47B20"/>
-                </a:solidFill>
-                <a:latin typeface="Source Serif 4"/>
-              </a:rPr>
-              <a:t>1</a:t>
-            </a:r>
-          </a:p>
-        </p:txBody>
-      </p:sp>
-      <p:sp>
-        <p:nvSpPr>
-          <p:cNvPr id="7" name="TextBox 6"/>
-          <p:cNvSpPr txBox="1"/>
-          <p:nvPr/>
-        </p:nvSpPr>
-        <p:spPr>
-          <a:xfrm>
-            <a:off x="1463040" y="2093976"/>
-            <a:ext cx="9875520" cy="804672"/>
-          </a:xfrm>
-          <a:prstGeom prst="rect">
-            <a:avLst/>
-          </a:prstGeom>
-          <a:noFill/>
-        </p:spPr>
-        <p:txBody>
-          <a:bodyPr wrap="square" anchor="t" lIns="0" rIns="0" tIns="0" bIns="0">
-            <a:spAutoFit/>
-          </a:bodyPr>
-          <a:lstStyle/>
-          <a:p>
-            <a:pPr algn="l">
-              <a:spcAft>
-                <a:spcPts val="945"/>
-              </a:spcAft>
-            </a:pPr>
-            <a:r>
-              <a:rPr sz="2100" b="1" i="0">
-                <a:solidFill>
-                  <a:srgbClr val="1C1B19"/>
-                </a:solidFill>
-                <a:latin typeface="Source Serif 4"/>
-              </a:rPr>
-              <a:t>You have to be calm to do well on a test.</a:t>
-            </a:r>
-          </a:p>
-        </p:txBody>
-      </p:sp>
-      <p:sp>
-        <p:nvSpPr>
-          <p:cNvPr id="8" name="TextBox 7"/>
-          <p:cNvSpPr txBox="1"/>
-          <p:nvPr/>
-        </p:nvSpPr>
-        <p:spPr>
-          <a:xfrm>
-            <a:off x="822960" y="2862072"/>
-            <a:ext cx="548640" cy="804672"/>
-          </a:xfrm>
-          <a:prstGeom prst="rect">
-            <a:avLst/>
-          </a:prstGeom>
-          <a:noFill/>
-        </p:spPr>
-        <p:txBody>
-          <a:bodyPr wrap="square" anchor="t" lIns="0" rIns="0" tIns="0" bIns="0">
-            <a:spAutoFit/>
-          </a:bodyPr>
-          <a:lstStyle/>
-          <a:p>
-            <a:pPr algn="l">
-              <a:spcAft>
-                <a:spcPts val="1170"/>
-              </a:spcAft>
-            </a:pPr>
-            <a:r>
-              <a:rPr sz="2600" b="1" i="0">
-                <a:solidFill>
-                  <a:srgbClr val="F47B20"/>
-                </a:solidFill>
-                <a:latin typeface="Source Serif 4"/>
-              </a:rPr>
-              <a:t>2</a:t>
-            </a:r>
-          </a:p>
-        </p:txBody>
-      </p:sp>
-      <p:sp>
-        <p:nvSpPr>
-          <p:cNvPr id="9" name="TextBox 8"/>
-          <p:cNvSpPr txBox="1"/>
-          <p:nvPr/>
-        </p:nvSpPr>
-        <p:spPr>
-          <a:xfrm>
-            <a:off x="1463040" y="2898648"/>
-            <a:ext cx="9875520" cy="804672"/>
-          </a:xfrm>
-          <a:prstGeom prst="rect">
-            <a:avLst/>
-          </a:prstGeom>
-          <a:noFill/>
-        </p:spPr>
-        <p:txBody>
-          <a:bodyPr wrap="square" anchor="t" lIns="0" rIns="0" tIns="0" bIns="0">
-            <a:spAutoFit/>
-          </a:bodyPr>
-          <a:lstStyle/>
-          <a:p>
-            <a:pPr algn="l">
-              <a:spcAft>
-                <a:spcPts val="945"/>
-              </a:spcAft>
-            </a:pPr>
-            <a:r>
-              <a:rPr sz="2100" b="1" i="0">
-                <a:solidFill>
-                  <a:srgbClr val="1C1B19"/>
-                </a:solidFill>
-                <a:latin typeface="Source Serif 4"/>
-              </a:rPr>
-              <a:t>If you're anxious, you didn't study enough.</a:t>
-            </a:r>
-          </a:p>
-        </p:txBody>
-      </p:sp>
-      <p:sp>
-        <p:nvSpPr>
-          <p:cNvPr id="10" name="TextBox 9"/>
-          <p:cNvSpPr txBox="1"/>
-          <p:nvPr/>
-        </p:nvSpPr>
-        <p:spPr>
-          <a:xfrm>
-            <a:off x="822960" y="3666744"/>
-            <a:ext cx="548640" cy="804672"/>
-          </a:xfrm>
-          <a:prstGeom prst="rect">
-            <a:avLst/>
-          </a:prstGeom>
-          <a:noFill/>
-        </p:spPr>
-        <p:txBody>
-          <a:bodyPr wrap="square" anchor="t" lIns="0" rIns="0" tIns="0" bIns="0">
-            <a:spAutoFit/>
-          </a:bodyPr>
-          <a:lstStyle/>
-          <a:p>
-            <a:pPr algn="l">
-              <a:spcAft>
-                <a:spcPts val="1170"/>
-              </a:spcAft>
-            </a:pPr>
-            <a:r>
-              <a:rPr sz="2600" b="1" i="0">
-                <a:solidFill>
-                  <a:srgbClr val="F47B20"/>
-                </a:solidFill>
-                <a:latin typeface="Source Serif 4"/>
-              </a:rPr>
-              <a:t>3</a:t>
-            </a:r>
-          </a:p>
-        </p:txBody>
-      </p:sp>
-      <p:sp>
-        <p:nvSpPr>
-          <p:cNvPr id="11" name="TextBox 10"/>
-          <p:cNvSpPr txBox="1"/>
-          <p:nvPr/>
-        </p:nvSpPr>
-        <p:spPr>
-          <a:xfrm>
-            <a:off x="1463040" y="3703320"/>
-            <a:ext cx="9875520" cy="804672"/>
-          </a:xfrm>
-          <a:prstGeom prst="rect">
-            <a:avLst/>
-          </a:prstGeom>
-          <a:noFill/>
-        </p:spPr>
-        <p:txBody>
-          <a:bodyPr wrap="square" anchor="t" lIns="0" rIns="0" tIns="0" bIns="0">
-            <a:spAutoFit/>
-          </a:bodyPr>
-          <a:lstStyle/>
-          <a:p>
-            <a:pPr algn="l">
-              <a:spcAft>
-                <a:spcPts val="945"/>
-              </a:spcAft>
-            </a:pPr>
-            <a:r>
-              <a:rPr sz="2100" b="1" i="0">
-                <a:solidFill>
-                  <a:srgbClr val="1C1B19"/>
-                </a:solidFill>
-                <a:latin typeface="Source Serif 4"/>
-              </a:rPr>
-              <a:t>When you blank, the information is gone.</a:t>
-            </a:r>
-          </a:p>
-        </p:txBody>
-      </p:sp>
-      <p:sp>
-        <p:nvSpPr>
-          <p:cNvPr id="12" name="TextBox 11"/>
-          <p:cNvSpPr txBox="1"/>
-          <p:nvPr/>
-        </p:nvSpPr>
-        <p:spPr>
-          <a:xfrm>
-            <a:off x="822960" y="4471416"/>
-            <a:ext cx="548640" cy="804672"/>
-          </a:xfrm>
-          <a:prstGeom prst="rect">
-            <a:avLst/>
-          </a:prstGeom>
-          <a:noFill/>
-        </p:spPr>
-        <p:txBody>
-          <a:bodyPr wrap="square" anchor="t" lIns="0" rIns="0" tIns="0" bIns="0">
-            <a:spAutoFit/>
-          </a:bodyPr>
-          <a:lstStyle/>
-          <a:p>
-            <a:pPr algn="l">
-              <a:spcAft>
-                <a:spcPts val="1170"/>
-              </a:spcAft>
-            </a:pPr>
-            <a:r>
-              <a:rPr sz="2600" b="1" i="0">
-                <a:solidFill>
-                  <a:srgbClr val="F47B20"/>
-                </a:solidFill>
-                <a:latin typeface="Source Serif 4"/>
-              </a:rPr>
-              <a:t>4</a:t>
-            </a:r>
-          </a:p>
-        </p:txBody>
-      </p:sp>
-      <p:sp>
-        <p:nvSpPr>
-          <p:cNvPr id="13" name="TextBox 12"/>
-          <p:cNvSpPr txBox="1"/>
-          <p:nvPr/>
-        </p:nvSpPr>
-        <p:spPr>
-          <a:xfrm>
-            <a:off x="1463040" y="4507992"/>
-            <a:ext cx="9875520" cy="804672"/>
-          </a:xfrm>
-          <a:prstGeom prst="rect">
-            <a:avLst/>
-          </a:prstGeom>
-          <a:noFill/>
-        </p:spPr>
-        <p:txBody>
-          <a:bodyPr wrap="square" anchor="t" lIns="0" rIns="0" tIns="0" bIns="0">
-            <a:spAutoFit/>
-          </a:bodyPr>
-          <a:lstStyle/>
-          <a:p>
-            <a:pPr algn="l">
-              <a:spcAft>
-                <a:spcPts val="945"/>
-              </a:spcAft>
-            </a:pPr>
-            <a:r>
-              <a:rPr sz="2100" b="1" i="0">
-                <a:solidFill>
-                  <a:srgbClr val="1C1B19"/>
-                </a:solidFill>
-                <a:latin typeface="Source Serif 4"/>
-              </a:rPr>
-              <a:t>Writing about your worries before a test can raise your score.</a:t>
-            </a:r>
-          </a:p>
-        </p:txBody>
-      </p:sp>
-      <p:sp>
-        <p:nvSpPr>
-          <p:cNvPr id="14" name="TextBox 13"/>
-          <p:cNvSpPr txBox="1"/>
-          <p:nvPr/>
-        </p:nvSpPr>
-        <p:spPr>
-          <a:xfrm>
-            <a:off x="822960" y="5276088"/>
-            <a:ext cx="548640" cy="804672"/>
-          </a:xfrm>
-          <a:prstGeom prst="rect">
-            <a:avLst/>
-          </a:prstGeom>
-          <a:noFill/>
-        </p:spPr>
-        <p:txBody>
-          <a:bodyPr wrap="square" anchor="t" lIns="0" rIns="0" tIns="0" bIns="0">
-            <a:spAutoFit/>
-          </a:bodyPr>
-          <a:lstStyle/>
-          <a:p>
-            <a:pPr algn="l">
-              <a:spcAft>
-                <a:spcPts val="1170"/>
-              </a:spcAft>
-            </a:pPr>
-            <a:r>
-              <a:rPr sz="2600" b="1" i="0">
-                <a:solidFill>
-                  <a:srgbClr val="F47B20"/>
-                </a:solidFill>
-                <a:latin typeface="Source Serif 4"/>
-              </a:rPr>
-              <a:t>5</a:t>
-            </a:r>
-          </a:p>
-        </p:txBody>
-      </p:sp>
-      <p:sp>
-        <p:nvSpPr>
-          <p:cNvPr id="15" name="TextBox 14"/>
-          <p:cNvSpPr txBox="1"/>
-          <p:nvPr/>
-        </p:nvSpPr>
-        <p:spPr>
-          <a:xfrm>
-            <a:off x="1463040" y="5312664"/>
-            <a:ext cx="9875520" cy="804672"/>
-          </a:xfrm>
-          <a:prstGeom prst="rect">
-            <a:avLst/>
-          </a:prstGeom>
-          <a:noFill/>
-        </p:spPr>
-        <p:txBody>
-          <a:bodyPr wrap="square" anchor="t" lIns="0" rIns="0" tIns="0" bIns="0">
-            <a:spAutoFit/>
-          </a:bodyPr>
-          <a:lstStyle/>
-          <a:p>
-            <a:pPr algn="l">
-              <a:spcAft>
-                <a:spcPts val="945"/>
-              </a:spcAft>
-            </a:pPr>
-            <a:r>
-              <a:rPr sz="2100" b="1" i="0">
-                <a:solidFill>
-                  <a:srgbClr val="1C1B19"/>
-                </a:solidFill>
-                <a:latin typeface="Source Serif 4"/>
-              </a:rPr>
-              <a:t>An extra energy drink will sharpen you up.</a:t>
+                <a:spcPts val="990"/>
+              </a:spcAft>
+            </a:pPr>
+            <a:r>
+              <a:rPr sz="2200" b="0" i="1">
+                <a:solidFill>
+                  <a:srgbClr val="5D5A54"/>
+                </a:solidFill>
+                <a:latin typeface="Source Serif 4"/>
+              </a:rPr>
+              <a:t>People who told themselves "I am excited" did better than people told to calm down. Same heartbeat, different instructions.</a:t>
             </a:r>
           </a:p>
         </p:txBody>
@@ -8761,7 +9527,7 @@
                 </a:solidFill>
                 <a:latin typeface="Inter Tight"/>
               </a:rPr>
-              <a:t>MYTH OR FACT?</a:t>
+              <a:t>BEFORE AND DURING</a:t>
             </a:r>
           </a:p>
         </p:txBody>
@@ -8814,7 +9580,7 @@
         <p:spPr>
           <a:xfrm>
             <a:off x="822960" y="1005840"/>
-            <a:ext cx="10515600" cy="1097280"/>
+            <a:ext cx="10515600" cy="914400"/>
           </a:xfrm>
           <a:prstGeom prst="rect">
             <a:avLst/>
@@ -8829,31 +9595,77 @@
           <a:p>
             <a:pPr algn="l">
               <a:spcAft>
-                <a:spcPts val="1620"/>
-              </a:spcAft>
-            </a:pPr>
-            <a:r>
-              <a:rPr sz="3600" b="1" i="0">
+                <a:spcPts val="1530"/>
+              </a:spcAft>
+            </a:pPr>
+            <a:r>
+              <a:rPr sz="3400" b="1" i="0">
                 <a:solidFill>
                   <a:srgbClr val="1C1B19"/>
                 </a:solidFill>
                 <a:latin typeface="Source Serif 4"/>
               </a:rPr>
-              <a:t>The answers</a:t>
-            </a:r>
-          </a:p>
-        </p:txBody>
-      </p:sp>
-      <p:sp>
-        <p:nvSpPr>
-          <p:cNvPr id="6" name="TextBox 5"/>
+              <a:t>What to do, and when</a:t>
+            </a:r>
+          </a:p>
+        </p:txBody>
+      </p:sp>
+      <p:sp>
+        <p:nvSpPr>
+          <p:cNvPr id="6" name="Rectangle 5"/>
+          <p:cNvSpPr/>
+          <p:nvPr/>
+        </p:nvSpPr>
+        <p:spPr>
+          <a:xfrm>
+            <a:off x="822960" y="2103120"/>
+            <a:ext cx="5120640" cy="3931920"/>
+          </a:xfrm>
+          <a:prstGeom prst="rect">
+            <a:avLst/>
+          </a:prstGeom>
+          <a:solidFill>
+            <a:srgbClr val="FFFFFF"/>
+          </a:solidFill>
+          <a:ln w="15875">
+            <a:solidFill>
+              <a:srgbClr val="D8D2C6"/>
+            </a:solidFill>
+          </a:ln>
+          <a:effectLst/>
+        </p:spPr>
+        <p:style>
+          <a:lnRef idx="1">
+            <a:schemeClr val="accent1"/>
+          </a:lnRef>
+          <a:fillRef idx="3">
+            <a:schemeClr val="accent1"/>
+          </a:fillRef>
+          <a:effectRef idx="2">
+            <a:schemeClr val="accent1"/>
+          </a:effectRef>
+          <a:fontRef idx="minor">
+            <a:schemeClr val="lt1"/>
+          </a:fontRef>
+        </p:style>
+        <p:txBody>
+          <a:bodyPr rtlCol="0" anchor="ctr"/>
+          <a:lstStyle/>
+          <a:p>
+            <a:pPr algn="ctr"/>
+          </a:p>
+        </p:txBody>
+      </p:sp>
+      <p:sp>
+        <p:nvSpPr>
+          <p:cNvPr id="7" name="TextBox 6"/>
           <p:cNvSpPr txBox="1"/>
           <p:nvPr/>
         </p:nvSpPr>
         <p:spPr>
           <a:xfrm>
-            <a:off x="822960" y="2057400"/>
-            <a:ext cx="548640" cy="804672"/>
+            <a:off x="1097280" y="2286000"/>
+            <a:ext cx="4572000" cy="457200"/>
           </a:xfrm>
           <a:prstGeom prst="rect">
             <a:avLst/>
@@ -8868,31 +9680,31 @@
           <a:p>
             <a:pPr algn="l">
               <a:spcAft>
-                <a:spcPts val="1170"/>
-              </a:spcAft>
-            </a:pPr>
-            <a:r>
-              <a:rPr sz="2600" b="1" i="0">
-                <a:solidFill>
-                  <a:srgbClr val="F47B20"/>
-                </a:solidFill>
-                <a:latin typeface="Source Serif 4"/>
-              </a:rPr>
-              <a:t>1</a:t>
-            </a:r>
-          </a:p>
-        </p:txBody>
-      </p:sp>
-      <p:sp>
-        <p:nvSpPr>
-          <p:cNvPr id="7" name="TextBox 6"/>
+                <a:spcPts val="585"/>
+              </a:spcAft>
+            </a:pPr>
+            <a:r>
+              <a:rPr sz="1300" b="1" i="0">
+                <a:solidFill>
+                  <a:srgbClr val="0B2D5B"/>
+                </a:solidFill>
+                <a:latin typeface="Inter Tight"/>
+              </a:rPr>
+              <a:t>THE WEEK BEFORE</a:t>
+            </a:r>
+          </a:p>
+        </p:txBody>
+      </p:sp>
+      <p:sp>
+        <p:nvSpPr>
+          <p:cNvPr id="8" name="TextBox 7"/>
           <p:cNvSpPr txBox="1"/>
           <p:nvPr/>
         </p:nvSpPr>
         <p:spPr>
           <a:xfrm>
-            <a:off x="1463040" y="2093976"/>
-            <a:ext cx="9875520" cy="804672"/>
+            <a:off x="1097280" y="2788920"/>
+            <a:ext cx="4572000" cy="3108960"/>
           </a:xfrm>
           <a:prstGeom prst="rect">
             <a:avLst/>
@@ -8907,47 +9719,125 @@
           <a:p>
             <a:pPr algn="l">
               <a:spcAft>
-                <a:spcPts val="945"/>
-              </a:spcAft>
-            </a:pPr>
-            <a:r>
-              <a:rPr sz="2100" b="1" i="0">
+                <a:spcPts val="855"/>
+              </a:spcAft>
+            </a:pPr>
+            <a:r>
+              <a:rPr sz="1900" b="0" i="0">
                 <a:solidFill>
                   <a:srgbClr val="1C1B19"/>
                 </a:solidFill>
                 <a:latin typeface="Source Serif 4"/>
               </a:rPr>
-              <a:t>Myth.</a:t>
-            </a:r>
-          </a:p>
-          <a:p>
-            <a:pPr algn="l">
-              <a:spcAft>
-                <a:spcPts val="945"/>
-              </a:spcAft>
-            </a:pPr>
-            <a:r>
-              <a:rPr sz="1600" b="0" i="0">
-                <a:solidFill>
-                  <a:srgbClr val="5D5A54"/>
-                </a:solidFill>
-                <a:latin typeface="Source Serif 4"/>
-              </a:rPr>
-              <a:t>You can be keyed up and do well. Aim for ready.</a:t>
-            </a:r>
-          </a:p>
-        </p:txBody>
-      </p:sp>
-      <p:sp>
-        <p:nvSpPr>
-          <p:cNvPr id="8" name="TextBox 7"/>
+              <a:t>Quiz yourself, don't reread</a:t>
+            </a:r>
+          </a:p>
+          <a:p>
+            <a:pPr algn="l">
+              <a:spcAft>
+                <a:spcPts val="855"/>
+              </a:spcAft>
+            </a:pPr>
+            <a:r>
+              <a:rPr sz="1900" b="0" i="0">
+                <a:solidFill>
+                  <a:srgbClr val="1C1B19"/>
+                </a:solidFill>
+                <a:latin typeface="Source Serif 4"/>
+              </a:rPr>
+              <a:t>Practice timed, with no notes</a:t>
+            </a:r>
+          </a:p>
+          <a:p>
+            <a:pPr algn="l">
+              <a:spcAft>
+                <a:spcPts val="855"/>
+              </a:spcAft>
+            </a:pPr>
+            <a:r>
+              <a:rPr sz="1900" b="0" i="0">
+                <a:solidFill>
+                  <a:srgbClr val="1C1B19"/>
+                </a:solidFill>
+                <a:latin typeface="Source Serif 4"/>
+              </a:rPr>
+              <a:t>Protect sleep, last two nights</a:t>
+            </a:r>
+          </a:p>
+          <a:p>
+            <a:pPr algn="l">
+              <a:spcAft>
+                <a:spcPts val="855"/>
+              </a:spcAft>
+            </a:pPr>
+            <a:r>
+              <a:rPr sz="1900" b="0" i="0">
+                <a:solidFill>
+                  <a:srgbClr val="1C1B19"/>
+                </a:solidFill>
+                <a:latin typeface="Source Serif 4"/>
+              </a:rPr>
+              <a:t>Your usual caffeine, no extra</a:t>
+            </a:r>
+          </a:p>
+        </p:txBody>
+      </p:sp>
+      <p:sp>
+        <p:nvSpPr>
+          <p:cNvPr id="9" name="Rectangle 8"/>
+          <p:cNvSpPr/>
+          <p:nvPr/>
+        </p:nvSpPr>
+        <p:spPr>
+          <a:xfrm>
+            <a:off x="6309360" y="2103120"/>
+            <a:ext cx="5120640" cy="3931920"/>
+          </a:xfrm>
+          <a:prstGeom prst="rect">
+            <a:avLst/>
+          </a:prstGeom>
+          <a:solidFill>
+            <a:srgbClr val="FFFFFF"/>
+          </a:solidFill>
+          <a:ln w="15875">
+            <a:solidFill>
+              <a:srgbClr val="D8D2C6"/>
+            </a:solidFill>
+          </a:ln>
+          <a:effectLst/>
+        </p:spPr>
+        <p:style>
+          <a:lnRef idx="1">
+            <a:schemeClr val="accent1"/>
+          </a:lnRef>
+          <a:fillRef idx="3">
+            <a:schemeClr val="accent1"/>
+          </a:fillRef>
+          <a:effectRef idx="2">
+            <a:schemeClr val="accent1"/>
+          </a:effectRef>
+          <a:fontRef idx="minor">
+            <a:schemeClr val="lt1"/>
+          </a:fontRef>
+        </p:style>
+        <p:txBody>
+          <a:bodyPr rtlCol="0" anchor="ctr"/>
+          <a:lstStyle/>
+          <a:p>
+            <a:pPr algn="ctr"/>
+          </a:p>
+        </p:txBody>
+      </p:sp>
+      <p:sp>
+        <p:nvSpPr>
+          <p:cNvPr id="10" name="TextBox 9"/>
           <p:cNvSpPr txBox="1"/>
           <p:nvPr/>
         </p:nvSpPr>
         <p:spPr>
           <a:xfrm>
-            <a:off x="822960" y="2862072"/>
-            <a:ext cx="548640" cy="804672"/>
+            <a:off x="6583680" y="2286000"/>
+            <a:ext cx="4572000" cy="457200"/>
           </a:xfrm>
           <a:prstGeom prst="rect">
             <a:avLst/>
@@ -8962,31 +9852,31 @@
           <a:p>
             <a:pPr algn="l">
               <a:spcAft>
-                <a:spcPts val="1170"/>
-              </a:spcAft>
-            </a:pPr>
-            <a:r>
-              <a:rPr sz="2600" b="1" i="0">
-                <a:solidFill>
-                  <a:srgbClr val="F47B20"/>
-                </a:solidFill>
-                <a:latin typeface="Source Serif 4"/>
-              </a:rPr>
-              <a:t>2</a:t>
-            </a:r>
-          </a:p>
-        </p:txBody>
-      </p:sp>
-      <p:sp>
-        <p:nvSpPr>
-          <p:cNvPr id="9" name="TextBox 8"/>
+                <a:spcPts val="585"/>
+              </a:spcAft>
+            </a:pPr>
+            <a:r>
+              <a:rPr sz="1300" b="1" i="0">
+                <a:solidFill>
+                  <a:srgbClr val="0B2D5B"/>
+                </a:solidFill>
+                <a:latin typeface="Inter Tight"/>
+              </a:rPr>
+              <a:t>DURING THE TEST</a:t>
+            </a:r>
+          </a:p>
+        </p:txBody>
+      </p:sp>
+      <p:sp>
+        <p:nvSpPr>
+          <p:cNvPr id="11" name="TextBox 10"/>
           <p:cNvSpPr txBox="1"/>
           <p:nvPr/>
         </p:nvSpPr>
         <p:spPr>
           <a:xfrm>
-            <a:off x="1463040" y="2898648"/>
-            <a:ext cx="9875520" cy="804672"/>
+            <a:off x="6583680" y="2788920"/>
+            <a:ext cx="4572000" cy="3108960"/>
           </a:xfrm>
           <a:prstGeom prst="rect">
             <a:avLst/>
@@ -9001,315 +9891,65 @@
           <a:p>
             <a:pPr algn="l">
               <a:spcAft>
-                <a:spcPts val="945"/>
-              </a:spcAft>
-            </a:pPr>
-            <a:r>
-              <a:rPr sz="2100" b="1" i="0">
+                <a:spcPts val="855"/>
+              </a:spcAft>
+            </a:pPr>
+            <a:r>
+              <a:rPr sz="1900" b="0" i="0">
                 <a:solidFill>
                   <a:srgbClr val="1C1B19"/>
                 </a:solidFill>
                 <a:latin typeface="Source Serif 4"/>
               </a:rPr>
-              <a:t>Myth.</a:t>
-            </a:r>
-          </a:p>
-          <a:p>
-            <a:pPr algn="l">
-              <a:spcAft>
-                <a:spcPts val="945"/>
-              </a:spcAft>
-            </a:pPr>
-            <a:r>
-              <a:rPr sz="1600" b="0" i="0">
-                <a:solidFill>
-                  <a:srgbClr val="5D5A54"/>
-                </a:solidFill>
-                <a:latin typeface="Source Serif 4"/>
-              </a:rPr>
-              <a:t>Anxiety tracks how much it matters to you.</a:t>
-            </a:r>
-          </a:p>
-        </p:txBody>
-      </p:sp>
-      <p:sp>
-        <p:nvSpPr>
-          <p:cNvPr id="10" name="TextBox 9"/>
-          <p:cNvSpPr txBox="1"/>
-          <p:nvPr/>
-        </p:nvSpPr>
-        <p:spPr>
-          <a:xfrm>
-            <a:off x="822960" y="3666744"/>
-            <a:ext cx="548640" cy="804672"/>
-          </a:xfrm>
-          <a:prstGeom prst="rect">
-            <a:avLst/>
-          </a:prstGeom>
-          <a:noFill/>
-        </p:spPr>
-        <p:txBody>
-          <a:bodyPr wrap="square" anchor="t" lIns="0" rIns="0" tIns="0" bIns="0">
-            <a:spAutoFit/>
-          </a:bodyPr>
-          <a:lstStyle/>
-          <a:p>
-            <a:pPr algn="l">
-              <a:spcAft>
-                <a:spcPts val="1170"/>
-              </a:spcAft>
-            </a:pPr>
-            <a:r>
-              <a:rPr sz="2600" b="1" i="0">
-                <a:solidFill>
-                  <a:srgbClr val="F47B20"/>
-                </a:solidFill>
-                <a:latin typeface="Source Serif 4"/>
-              </a:rPr>
-              <a:t>3</a:t>
-            </a:r>
-          </a:p>
-        </p:txBody>
-      </p:sp>
-      <p:sp>
-        <p:nvSpPr>
-          <p:cNvPr id="11" name="TextBox 10"/>
-          <p:cNvSpPr txBox="1"/>
-          <p:nvPr/>
-        </p:nvSpPr>
-        <p:spPr>
-          <a:xfrm>
-            <a:off x="1463040" y="3703320"/>
-            <a:ext cx="9875520" cy="804672"/>
-          </a:xfrm>
-          <a:prstGeom prst="rect">
-            <a:avLst/>
-          </a:prstGeom>
-          <a:noFill/>
-        </p:spPr>
-        <p:txBody>
-          <a:bodyPr wrap="square" anchor="t" lIns="0" rIns="0" tIns="0" bIns="0">
-            <a:spAutoFit/>
-          </a:bodyPr>
-          <a:lstStyle/>
-          <a:p>
-            <a:pPr algn="l">
-              <a:spcAft>
-                <a:spcPts val="945"/>
-              </a:spcAft>
-            </a:pPr>
-            <a:r>
-              <a:rPr sz="2100" b="1" i="0">
+              <a:t>Breathe in for 4, out for 6</a:t>
+            </a:r>
+          </a:p>
+          <a:p>
+            <a:pPr algn="l">
+              <a:spcAft>
+                <a:spcPts val="855"/>
+              </a:spcAft>
+            </a:pPr>
+            <a:r>
+              <a:rPr sz="1900" b="0" i="0">
                 <a:solidFill>
                   <a:srgbClr val="1C1B19"/>
                 </a:solidFill>
                 <a:latin typeface="Source Serif 4"/>
               </a:rPr>
-              <a:t>Myth.</a:t>
-            </a:r>
-          </a:p>
-          <a:p>
-            <a:pPr algn="l">
-              <a:spcAft>
-                <a:spcPts val="945"/>
-              </a:spcAft>
-            </a:pPr>
-            <a:r>
-              <a:rPr sz="1600" b="0" i="0">
-                <a:solidFill>
-                  <a:srgbClr val="5D5A54"/>
-                </a:solidFill>
-                <a:latin typeface="Source Serif 4"/>
-              </a:rPr>
-              <a:t>It's still stored. Pulling it up is what's struggling.</a:t>
-            </a:r>
-          </a:p>
-        </p:txBody>
-      </p:sp>
-      <p:sp>
-        <p:nvSpPr>
-          <p:cNvPr id="12" name="TextBox 11"/>
-          <p:cNvSpPr txBox="1"/>
-          <p:nvPr/>
-        </p:nvSpPr>
-        <p:spPr>
-          <a:xfrm>
-            <a:off x="822960" y="4471416"/>
-            <a:ext cx="548640" cy="804672"/>
-          </a:xfrm>
-          <a:prstGeom prst="rect">
-            <a:avLst/>
-          </a:prstGeom>
-          <a:noFill/>
-        </p:spPr>
-        <p:txBody>
-          <a:bodyPr wrap="square" anchor="t" lIns="0" rIns="0" tIns="0" bIns="0">
-            <a:spAutoFit/>
-          </a:bodyPr>
-          <a:lstStyle/>
-          <a:p>
-            <a:pPr algn="l">
-              <a:spcAft>
-                <a:spcPts val="1170"/>
-              </a:spcAft>
-            </a:pPr>
-            <a:r>
-              <a:rPr sz="2600" b="1" i="0">
-                <a:solidFill>
-                  <a:srgbClr val="F47B20"/>
-                </a:solidFill>
-                <a:latin typeface="Source Serif 4"/>
-              </a:rPr>
-              <a:t>4</a:t>
-            </a:r>
-          </a:p>
-        </p:txBody>
-      </p:sp>
-      <p:sp>
-        <p:nvSpPr>
-          <p:cNvPr id="13" name="TextBox 12"/>
-          <p:cNvSpPr txBox="1"/>
-          <p:nvPr/>
-        </p:nvSpPr>
-        <p:spPr>
-          <a:xfrm>
-            <a:off x="1463040" y="4507992"/>
-            <a:ext cx="9875520" cy="804672"/>
-          </a:xfrm>
-          <a:prstGeom prst="rect">
-            <a:avLst/>
-          </a:prstGeom>
-          <a:noFill/>
-        </p:spPr>
-        <p:txBody>
-          <a:bodyPr wrap="square" anchor="t" lIns="0" rIns="0" tIns="0" bIns="0">
-            <a:spAutoFit/>
-          </a:bodyPr>
-          <a:lstStyle/>
-          <a:p>
-            <a:pPr algn="l">
-              <a:spcAft>
-                <a:spcPts val="945"/>
-              </a:spcAft>
-            </a:pPr>
-            <a:r>
-              <a:rPr sz="2100" b="1" i="0">
+              <a:t>Skip it, mark it, come back</a:t>
+            </a:r>
+          </a:p>
+          <a:p>
+            <a:pPr algn="l">
+              <a:spcAft>
+                <a:spcPts val="855"/>
+              </a:spcAft>
+            </a:pPr>
+            <a:r>
+              <a:rPr sz="1900" b="0" i="0">
                 <a:solidFill>
                   <a:srgbClr val="1C1B19"/>
                 </a:solidFill>
                 <a:latin typeface="Source Serif 4"/>
               </a:rPr>
-              <a:t>Fact.</a:t>
-            </a:r>
-          </a:p>
-          <a:p>
-            <a:pPr algn="l">
-              <a:spcAft>
-                <a:spcPts val="945"/>
-              </a:spcAft>
-            </a:pPr>
-            <a:r>
-              <a:rPr sz="1600" b="0" i="0">
-                <a:solidFill>
-                  <a:srgbClr val="5D5A54"/>
-                </a:solidFill>
-                <a:latin typeface="Source Serif 4"/>
-              </a:rPr>
-              <a:t>High schoolers who did it before a final scored higher.</a:t>
-            </a:r>
-          </a:p>
-        </p:txBody>
-      </p:sp>
-      <p:sp>
-        <p:nvSpPr>
-          <p:cNvPr id="14" name="TextBox 13"/>
-          <p:cNvSpPr txBox="1"/>
-          <p:nvPr/>
-        </p:nvSpPr>
-        <p:spPr>
-          <a:xfrm>
-            <a:off x="822960" y="5276088"/>
-            <a:ext cx="548640" cy="804672"/>
-          </a:xfrm>
-          <a:prstGeom prst="rect">
-            <a:avLst/>
-          </a:prstGeom>
-          <a:noFill/>
-        </p:spPr>
-        <p:txBody>
-          <a:bodyPr wrap="square" anchor="t" lIns="0" rIns="0" tIns="0" bIns="0">
-            <a:spAutoFit/>
-          </a:bodyPr>
-          <a:lstStyle/>
-          <a:p>
-            <a:pPr algn="l">
-              <a:spcAft>
-                <a:spcPts val="1170"/>
-              </a:spcAft>
-            </a:pPr>
-            <a:r>
-              <a:rPr sz="2600" b="1" i="0">
-                <a:solidFill>
-                  <a:srgbClr val="F47B20"/>
-                </a:solidFill>
-                <a:latin typeface="Source Serif 4"/>
-              </a:rPr>
-              <a:t>5</a:t>
-            </a:r>
-          </a:p>
-        </p:txBody>
-      </p:sp>
-      <p:sp>
-        <p:nvSpPr>
-          <p:cNvPr id="15" name="TextBox 14"/>
-          <p:cNvSpPr txBox="1"/>
-          <p:nvPr/>
-        </p:nvSpPr>
-        <p:spPr>
-          <a:xfrm>
-            <a:off x="1463040" y="5312664"/>
-            <a:ext cx="9875520" cy="804672"/>
-          </a:xfrm>
-          <a:prstGeom prst="rect">
-            <a:avLst/>
-          </a:prstGeom>
-          <a:noFill/>
-        </p:spPr>
-        <p:txBody>
-          <a:bodyPr wrap="square" anchor="t" lIns="0" rIns="0" tIns="0" bIns="0">
-            <a:spAutoFit/>
-          </a:bodyPr>
-          <a:lstStyle/>
-          <a:p>
-            <a:pPr algn="l">
-              <a:spcAft>
-                <a:spcPts val="945"/>
-              </a:spcAft>
-            </a:pPr>
-            <a:r>
-              <a:rPr sz="2100" b="1" i="0">
+              <a:t>Jot formulas at the start</a:t>
+            </a:r>
+          </a:p>
+          <a:p>
+            <a:pPr algn="l">
+              <a:spcAft>
+                <a:spcPts val="855"/>
+              </a:spcAft>
+            </a:pPr>
+            <a:r>
+              <a:rPr sz="1900" b="0" i="0">
                 <a:solidFill>
                   <a:srgbClr val="1C1B19"/>
                 </a:solidFill>
                 <a:latin typeface="Source Serif 4"/>
               </a:rPr>
-              <a:t>Myth.</a:t>
-            </a:r>
-          </a:p>
-          <a:p>
-            <a:pPr algn="l">
-              <a:spcAft>
-                <a:spcPts val="945"/>
-              </a:spcAft>
-            </a:pPr>
-            <a:r>
-              <a:rPr sz="1600" b="0" i="0">
-                <a:solidFill>
-                  <a:srgbClr val="5D5A54"/>
-                </a:solidFill>
-                <a:latin typeface="Source Serif 4"/>
-              </a:rPr>
-              <a:t>Extra caffeine adds to the racing heart. Your usual is fine.</a:t>
+              <a:t>After: debrief, don't replay</a:t>
             </a:r>
           </a:p>
         </p:txBody>
@@ -9418,7 +10058,7 @@
                 </a:solidFill>
                 <a:latin typeface="Inter Tight"/>
               </a:rPr>
-              <a:t>WHAT HAPPENS IN THE BLANK</a:t>
+              <a:t>THREE TEST MOMENTS</a:t>
             </a:r>
           </a:p>
         </p:txBody>
@@ -9496,7 +10136,7 @@
                 </a:solidFill>
                 <a:latin typeface="Source Serif 4"/>
               </a:rPr>
-              <a:t>The alarm takes your thinking space</a:t>
+              <a:t>What's the best move?</a:t>
             </a:r>
           </a:p>
         </p:txBody>
@@ -9509,8 +10149,8 @@
         </p:nvSpPr>
         <p:spPr>
           <a:xfrm>
-            <a:off x="822960" y="2743200"/>
-            <a:ext cx="1874519" cy="1005840"/>
+            <a:off x="822960" y="2103120"/>
+            <a:ext cx="3322320" cy="3840480"/>
           </a:xfrm>
           <a:prstGeom prst="rect">
             <a:avLst/>
@@ -9520,7 +10160,7 @@
           </a:solidFill>
           <a:ln w="15875">
             <a:solidFill>
-              <a:srgbClr val="0B2D5B"/>
+              <a:srgbClr val="D8D2C6"/>
             </a:solidFill>
           </a:ln>
           <a:effectLst/>
@@ -9555,8 +10195,8 @@
         </p:nvSpPr>
         <p:spPr>
           <a:xfrm>
-            <a:off x="822960" y="2743200"/>
-            <a:ext cx="1874519" cy="1005840"/>
+            <a:off x="1051560" y="2286000"/>
+            <a:ext cx="2865120" cy="365760"/>
           </a:xfrm>
           <a:prstGeom prst="rect">
             <a:avLst/>
@@ -9564,64 +10204,67 @@
           <a:noFill/>
         </p:spPr>
         <p:txBody>
-          <a:bodyPr wrap="square" anchor="ctr" lIns="0" rIns="0" tIns="0" bIns="0">
+          <a:bodyPr wrap="square" anchor="t" lIns="0" rIns="0" tIns="0" bIns="0">
             <a:spAutoFit/>
           </a:bodyPr>
           <a:lstStyle/>
           <a:p>
-            <a:pPr algn="ctr">
-              <a:spcAft>
-                <a:spcPts val="900"/>
-              </a:spcAft>
-            </a:pPr>
-            <a:r>
-              <a:rPr sz="2000" b="1" i="0">
+            <a:pPr algn="l">
+              <a:spcAft>
+                <a:spcPts val="585"/>
+              </a:spcAft>
+            </a:pPr>
+            <a:r>
+              <a:rPr sz="1300" b="1" i="0">
+                <a:solidFill>
+                  <a:srgbClr val="0B2D5B"/>
+                </a:solidFill>
+                <a:latin typeface="Inter Tight"/>
+              </a:rPr>
+              <a:t>TARIQ</a:t>
+            </a:r>
+          </a:p>
+        </p:txBody>
+      </p:sp>
+      <p:sp>
+        <p:nvSpPr>
+          <p:cNvPr id="8" name="TextBox 7"/>
+          <p:cNvSpPr txBox="1"/>
+          <p:nvPr/>
+        </p:nvSpPr>
+        <p:spPr>
+          <a:xfrm>
+            <a:off x="1051560" y="2743200"/>
+            <a:ext cx="2865120" cy="3017520"/>
+          </a:xfrm>
+          <a:prstGeom prst="rect">
+            <a:avLst/>
+          </a:prstGeom>
+          <a:noFill/>
+        </p:spPr>
+        <p:txBody>
+          <a:bodyPr wrap="square" anchor="t" lIns="0" rIns="0" tIns="0" bIns="0">
+            <a:spAutoFit/>
+          </a:bodyPr>
+          <a:lstStyle/>
+          <a:p>
+            <a:pPr algn="l">
+              <a:spcAft>
+                <a:spcPts val="810"/>
+              </a:spcAft>
+            </a:pPr>
+            <a:r>
+              <a:rPr sz="1800" b="0" i="0">
                 <a:solidFill>
                   <a:srgbClr val="1C1B19"/>
                 </a:solidFill>
                 <a:latin typeface="Source Serif 4"/>
               </a:rPr>
-              <a:t>Timer, stakes</a:t>
-            </a:r>
-          </a:p>
-        </p:txBody>
-      </p:sp>
-      <p:cxnSp>
-        <p:nvCxnSpPr>
-          <p:cNvPr id="8" name="Connector 7"/>
-          <p:cNvCxnSpPr/>
-          <p:nvPr/>
-        </p:nvCxnSpPr>
-        <p:spPr>
-          <a:xfrm>
-            <a:off x="2752344" y="3246120"/>
-            <a:ext cx="176021" cy="0"/>
-          </a:xfrm>
-          <a:prstGeom prst="line">
-            <a:avLst/>
-          </a:prstGeom>
-          <a:ln w="31750">
-            <a:solidFill>
-              <a:srgbClr val="F47B20"/>
-            </a:solidFill>
-            <a:tailEnd type="triangle"/>
-          </a:ln>
-        </p:spPr>
-        <p:style>
-          <a:lnRef idx="2">
-            <a:schemeClr val="accent1"/>
-          </a:lnRef>
-          <a:fillRef idx="0">
-            <a:schemeClr val="accent1"/>
-          </a:fillRef>
-          <a:effectRef idx="1">
-            <a:schemeClr val="accent1"/>
-          </a:effectRef>
-          <a:fontRef idx="minor">
-            <a:schemeClr val="tx1"/>
-          </a:fontRef>
-        </p:style>
-      </p:cxnSp>
+              <a:t>Halfway through his first geometry midterm, a problem he's sure he practiced looks completely unfamiliar. His heart starts pounding.</a:t>
+            </a:r>
+          </a:p>
+        </p:txBody>
+      </p:sp>
       <p:sp>
         <p:nvSpPr>
           <p:cNvPr id="9" name="Rectangle 8"/>
@@ -9630,8 +10273,8 @@
         </p:nvSpPr>
         <p:spPr>
           <a:xfrm>
-            <a:off x="2983229" y="2743200"/>
-            <a:ext cx="1874519" cy="1005840"/>
+            <a:off x="4419600" y="2103120"/>
+            <a:ext cx="3322320" cy="3840480"/>
           </a:xfrm>
           <a:prstGeom prst="rect">
             <a:avLst/>
@@ -9641,7 +10284,7 @@
           </a:solidFill>
           <a:ln w="15875">
             <a:solidFill>
-              <a:srgbClr val="0B2D5B"/>
+              <a:srgbClr val="D8D2C6"/>
             </a:solidFill>
           </a:ln>
           <a:effectLst/>
@@ -9676,8 +10319,8 @@
         </p:nvSpPr>
         <p:spPr>
           <a:xfrm>
-            <a:off x="2983229" y="2743200"/>
-            <a:ext cx="1874519" cy="1005840"/>
+            <a:off x="4648200" y="2286000"/>
+            <a:ext cx="2865120" cy="365760"/>
           </a:xfrm>
           <a:prstGeom prst="rect">
             <a:avLst/>
@@ -9685,64 +10328,67 @@
           <a:noFill/>
         </p:spPr>
         <p:txBody>
-          <a:bodyPr wrap="square" anchor="ctr" lIns="0" rIns="0" tIns="0" bIns="0">
+          <a:bodyPr wrap="square" anchor="t" lIns="0" rIns="0" tIns="0" bIns="0">
             <a:spAutoFit/>
           </a:bodyPr>
           <a:lstStyle/>
           <a:p>
-            <a:pPr algn="ctr">
-              <a:spcAft>
-                <a:spcPts val="900"/>
-              </a:spcAft>
-            </a:pPr>
-            <a:r>
-              <a:rPr sz="2000" b="1" i="0">
+            <a:pPr algn="l">
+              <a:spcAft>
+                <a:spcPts val="585"/>
+              </a:spcAft>
+            </a:pPr>
+            <a:r>
+              <a:rPr sz="1300" b="1" i="0">
+                <a:solidFill>
+                  <a:srgbClr val="0B2D5B"/>
+                </a:solidFill>
+                <a:latin typeface="Inter Tight"/>
+              </a:rPr>
+              <a:t>ANA</a:t>
+            </a:r>
+          </a:p>
+        </p:txBody>
+      </p:sp>
+      <p:sp>
+        <p:nvSpPr>
+          <p:cNvPr id="11" name="TextBox 10"/>
+          <p:cNvSpPr txBox="1"/>
+          <p:nvPr/>
+        </p:nvSpPr>
+        <p:spPr>
+          <a:xfrm>
+            <a:off x="4648200" y="2743200"/>
+            <a:ext cx="2865120" cy="3017520"/>
+          </a:xfrm>
+          <a:prstGeom prst="rect">
+            <a:avLst/>
+          </a:prstGeom>
+          <a:noFill/>
+        </p:spPr>
+        <p:txBody>
+          <a:bodyPr wrap="square" anchor="t" lIns="0" rIns="0" tIns="0" bIns="0">
+            <a:spAutoFit/>
+          </a:bodyPr>
+          <a:lstStyle/>
+          <a:p>
+            <a:pPr algn="l">
+              <a:spcAft>
+                <a:spcPts val="810"/>
+              </a:spcAft>
+            </a:pPr>
+            <a:r>
+              <a:rPr sz="1800" b="0" i="0">
                 <a:solidFill>
                   <a:srgbClr val="1C1B19"/>
                 </a:solidFill>
                 <a:latin typeface="Source Serif 4"/>
               </a:rPr>
-              <a:t>Alarm</a:t>
-            </a:r>
-          </a:p>
-        </p:txBody>
-      </p:sp>
-      <p:cxnSp>
-        <p:nvCxnSpPr>
-          <p:cNvPr id="11" name="Connector 10"/>
-          <p:cNvCxnSpPr/>
-          <p:nvPr/>
-        </p:nvCxnSpPr>
-        <p:spPr>
-          <a:xfrm>
-            <a:off x="4912614" y="3246120"/>
-            <a:ext cx="176022" cy="0"/>
-          </a:xfrm>
-          <a:prstGeom prst="line">
-            <a:avLst/>
-          </a:prstGeom>
-          <a:ln w="31750">
-            <a:solidFill>
-              <a:srgbClr val="F47B20"/>
-            </a:solidFill>
-            <a:tailEnd type="triangle"/>
-          </a:ln>
-        </p:spPr>
-        <p:style>
-          <a:lnRef idx="2">
-            <a:schemeClr val="accent1"/>
-          </a:lnRef>
-          <a:fillRef idx="0">
-            <a:schemeClr val="accent1"/>
-          </a:fillRef>
-          <a:effectRef idx="1">
-            <a:schemeClr val="accent1"/>
-          </a:effectRef>
-          <a:fontRef idx="minor">
-            <a:schemeClr val="tx1"/>
-          </a:fontRef>
-        </p:style>
-      </p:cxnSp>
+              <a:t>Has a Spanish oral exam tomorrow. She blanked on the last one and keeps replaying the moment the teacher waited.</a:t>
+            </a:r>
+          </a:p>
+        </p:txBody>
+      </p:sp>
       <p:sp>
         <p:nvSpPr>
           <p:cNvPr id="12" name="Rectangle 11"/>
@@ -9751,8 +10397,8 @@
         </p:nvSpPr>
         <p:spPr>
           <a:xfrm>
-            <a:off x="5143500" y="2743200"/>
-            <a:ext cx="1874519" cy="1005840"/>
+            <a:off x="8016239" y="2103120"/>
+            <a:ext cx="3322320" cy="3840480"/>
           </a:xfrm>
           <a:prstGeom prst="rect">
             <a:avLst/>
@@ -9762,7 +10408,7 @@
           </a:solidFill>
           <a:ln w="15875">
             <a:solidFill>
-              <a:srgbClr val="0B2D5B"/>
+              <a:srgbClr val="D8D2C6"/>
             </a:solidFill>
           </a:ln>
           <a:effectLst/>
@@ -9797,289 +10443,8 @@
         </p:nvSpPr>
         <p:spPr>
           <a:xfrm>
-            <a:off x="5143500" y="2743200"/>
-            <a:ext cx="1874519" cy="1005840"/>
-          </a:xfrm>
-          <a:prstGeom prst="rect">
-            <a:avLst/>
-          </a:prstGeom>
-          <a:noFill/>
-        </p:spPr>
-        <p:txBody>
-          <a:bodyPr wrap="square" anchor="ctr" lIns="0" rIns="0" tIns="0" bIns="0">
-            <a:spAutoFit/>
-          </a:bodyPr>
-          <a:lstStyle/>
-          <a:p>
-            <a:pPr algn="ctr">
-              <a:spcAft>
-                <a:spcPts val="900"/>
-              </a:spcAft>
-            </a:pPr>
-            <a:r>
-              <a:rPr sz="2000" b="1" i="0">
-                <a:solidFill>
-                  <a:srgbClr val="1C1B19"/>
-                </a:solidFill>
-                <a:latin typeface="Source Serif 4"/>
-              </a:rPr>
-              <a:t>Racing heart</a:t>
-            </a:r>
-          </a:p>
-        </p:txBody>
-      </p:sp>
-      <p:cxnSp>
-        <p:nvCxnSpPr>
-          <p:cNvPr id="14" name="Connector 13"/>
-          <p:cNvCxnSpPr/>
-          <p:nvPr/>
-        </p:nvCxnSpPr>
-        <p:spPr>
-          <a:xfrm>
-            <a:off x="7072883" y="3246120"/>
-            <a:ext cx="176023" cy="0"/>
-          </a:xfrm>
-          <a:prstGeom prst="line">
-            <a:avLst/>
-          </a:prstGeom>
-          <a:ln w="31750">
-            <a:solidFill>
-              <a:srgbClr val="F47B20"/>
-            </a:solidFill>
-            <a:tailEnd type="triangle"/>
-          </a:ln>
-        </p:spPr>
-        <p:style>
-          <a:lnRef idx="2">
-            <a:schemeClr val="accent1"/>
-          </a:lnRef>
-          <a:fillRef idx="0">
-            <a:schemeClr val="accent1"/>
-          </a:fillRef>
-          <a:effectRef idx="1">
-            <a:schemeClr val="accent1"/>
-          </a:effectRef>
-          <a:fontRef idx="minor">
-            <a:schemeClr val="tx1"/>
-          </a:fontRef>
-        </p:style>
-      </p:cxnSp>
-      <p:sp>
-        <p:nvSpPr>
-          <p:cNvPr id="15" name="Rectangle 14"/>
-          <p:cNvSpPr/>
-          <p:nvPr/>
-        </p:nvSpPr>
-        <p:spPr>
-          <a:xfrm>
-            <a:off x="7303770" y="2743200"/>
-            <a:ext cx="1874519" cy="1005840"/>
-          </a:xfrm>
-          <a:prstGeom prst="rect">
-            <a:avLst/>
-          </a:prstGeom>
-          <a:solidFill>
-            <a:srgbClr val="FFFFFF"/>
-          </a:solidFill>
-          <a:ln w="15875">
-            <a:solidFill>
-              <a:srgbClr val="0B2D5B"/>
-            </a:solidFill>
-          </a:ln>
-          <a:effectLst/>
-        </p:spPr>
-        <p:style>
-          <a:lnRef idx="1">
-            <a:schemeClr val="accent1"/>
-          </a:lnRef>
-          <a:fillRef idx="3">
-            <a:schemeClr val="accent1"/>
-          </a:fillRef>
-          <a:effectRef idx="2">
-            <a:schemeClr val="accent1"/>
-          </a:effectRef>
-          <a:fontRef idx="minor">
-            <a:schemeClr val="lt1"/>
-          </a:fontRef>
-        </p:style>
-        <p:txBody>
-          <a:bodyPr rtlCol="0" anchor="ctr"/>
-          <a:lstStyle/>
-          <a:p>
-            <a:pPr algn="ctr"/>
-          </a:p>
-        </p:txBody>
-      </p:sp>
-      <p:sp>
-        <p:nvSpPr>
-          <p:cNvPr id="16" name="TextBox 15"/>
-          <p:cNvSpPr txBox="1"/>
-          <p:nvPr/>
-        </p:nvSpPr>
-        <p:spPr>
-          <a:xfrm>
-            <a:off x="7303770" y="2743200"/>
-            <a:ext cx="1874519" cy="1005840"/>
-          </a:xfrm>
-          <a:prstGeom prst="rect">
-            <a:avLst/>
-          </a:prstGeom>
-          <a:noFill/>
-        </p:spPr>
-        <p:txBody>
-          <a:bodyPr wrap="square" anchor="ctr" lIns="0" rIns="0" tIns="0" bIns="0">
-            <a:spAutoFit/>
-          </a:bodyPr>
-          <a:lstStyle/>
-          <a:p>
-            <a:pPr algn="ctr">
-              <a:spcAft>
-                <a:spcPts val="900"/>
-              </a:spcAft>
-            </a:pPr>
-            <a:r>
-              <a:rPr sz="2000" b="1" i="0">
-                <a:solidFill>
-                  <a:srgbClr val="1C1B19"/>
-                </a:solidFill>
-                <a:latin typeface="Source Serif 4"/>
-              </a:rPr>
-              <a:t>Worry fills memory</a:t>
-            </a:r>
-          </a:p>
-        </p:txBody>
-      </p:sp>
-      <p:cxnSp>
-        <p:nvCxnSpPr>
-          <p:cNvPr id="17" name="Connector 16"/>
-          <p:cNvCxnSpPr/>
-          <p:nvPr/>
-        </p:nvCxnSpPr>
-        <p:spPr>
-          <a:xfrm>
-            <a:off x="9233154" y="3246120"/>
-            <a:ext cx="176022" cy="0"/>
-          </a:xfrm>
-          <a:prstGeom prst="line">
-            <a:avLst/>
-          </a:prstGeom>
-          <a:ln w="31750">
-            <a:solidFill>
-              <a:srgbClr val="F47B20"/>
-            </a:solidFill>
-            <a:tailEnd type="triangle"/>
-          </a:ln>
-        </p:spPr>
-        <p:style>
-          <a:lnRef idx="2">
-            <a:schemeClr val="accent1"/>
-          </a:lnRef>
-          <a:fillRef idx="0">
-            <a:schemeClr val="accent1"/>
-          </a:fillRef>
-          <a:effectRef idx="1">
-            <a:schemeClr val="accent1"/>
-          </a:effectRef>
-          <a:fontRef idx="minor">
-            <a:schemeClr val="tx1"/>
-          </a:fontRef>
-        </p:style>
-      </p:cxnSp>
-      <p:sp>
-        <p:nvSpPr>
-          <p:cNvPr id="18" name="Rectangle 17"/>
-          <p:cNvSpPr/>
-          <p:nvPr/>
-        </p:nvSpPr>
-        <p:spPr>
-          <a:xfrm>
-            <a:off x="9464040" y="2743200"/>
-            <a:ext cx="1874519" cy="1005840"/>
-          </a:xfrm>
-          <a:prstGeom prst="rect">
-            <a:avLst/>
-          </a:prstGeom>
-          <a:solidFill>
-            <a:srgbClr val="FFFFFF"/>
-          </a:solidFill>
-          <a:ln w="15875">
-            <a:solidFill>
-              <a:srgbClr val="0B2D5B"/>
-            </a:solidFill>
-          </a:ln>
-          <a:effectLst/>
-        </p:spPr>
-        <p:style>
-          <a:lnRef idx="1">
-            <a:schemeClr val="accent1"/>
-          </a:lnRef>
-          <a:fillRef idx="3">
-            <a:schemeClr val="accent1"/>
-          </a:fillRef>
-          <a:effectRef idx="2">
-            <a:schemeClr val="accent1"/>
-          </a:effectRef>
-          <a:fontRef idx="minor">
-            <a:schemeClr val="lt1"/>
-          </a:fontRef>
-        </p:style>
-        <p:txBody>
-          <a:bodyPr rtlCol="0" anchor="ctr"/>
-          <a:lstStyle/>
-          <a:p>
-            <a:pPr algn="ctr"/>
-          </a:p>
-        </p:txBody>
-      </p:sp>
-      <p:sp>
-        <p:nvSpPr>
-          <p:cNvPr id="19" name="TextBox 18"/>
-          <p:cNvSpPr txBox="1"/>
-          <p:nvPr/>
-        </p:nvSpPr>
-        <p:spPr>
-          <a:xfrm>
-            <a:off x="9464040" y="2743200"/>
-            <a:ext cx="1874519" cy="1005840"/>
-          </a:xfrm>
-          <a:prstGeom prst="rect">
-            <a:avLst/>
-          </a:prstGeom>
-          <a:noFill/>
-        </p:spPr>
-        <p:txBody>
-          <a:bodyPr wrap="square" anchor="ctr" lIns="0" rIns="0" tIns="0" bIns="0">
-            <a:spAutoFit/>
-          </a:bodyPr>
-          <a:lstStyle/>
-          <a:p>
-            <a:pPr algn="ctr">
-              <a:spcAft>
-                <a:spcPts val="900"/>
-              </a:spcAft>
-            </a:pPr>
-            <a:r>
-              <a:rPr sz="2000" b="1" i="0">
-                <a:solidFill>
-                  <a:srgbClr val="1C1B19"/>
-                </a:solidFill>
-                <a:latin typeface="Source Serif 4"/>
-              </a:rPr>
-              <a:t>Blank</a:t>
-            </a:r>
-          </a:p>
-        </p:txBody>
-      </p:sp>
-      <p:sp>
-        <p:nvSpPr>
-          <p:cNvPr id="20" name="TextBox 19"/>
-          <p:cNvSpPr txBox="1"/>
-          <p:nvPr/>
-        </p:nvSpPr>
-        <p:spPr>
-          <a:xfrm>
-            <a:off x="822960" y="4160520"/>
-            <a:ext cx="10515600" cy="457200"/>
+            <a:off x="8244839" y="2286000"/>
+            <a:ext cx="2865120" cy="365760"/>
           </a:xfrm>
           <a:prstGeom prst="rect">
             <a:avLst/>
@@ -10092,33 +10457,33 @@
           </a:bodyPr>
           <a:lstStyle/>
           <a:p>
-            <a:pPr algn="ctr">
-              <a:spcAft>
-                <a:spcPts val="810"/>
-              </a:spcAft>
-            </a:pPr>
-            <a:r>
-              <a:rPr sz="1800" b="1" i="0">
-                <a:solidFill>
-                  <a:srgbClr val="F47B20"/>
+            <a:pPr algn="l">
+              <a:spcAft>
+                <a:spcPts val="585"/>
+              </a:spcAft>
+            </a:pPr>
+            <a:r>
+              <a:rPr sz="1300" b="1" i="0">
+                <a:solidFill>
+                  <a:srgbClr val="0B2D5B"/>
                 </a:solidFill>
                 <a:latin typeface="Inter Tight"/>
               </a:rPr>
-              <a:t>↺  and around again</a:t>
-            </a:r>
-          </a:p>
-        </p:txBody>
-      </p:sp>
-      <p:sp>
-        <p:nvSpPr>
-          <p:cNvPr id="21" name="TextBox 20"/>
+              <a:t>MEI</a:t>
+            </a:r>
+          </a:p>
+        </p:txBody>
+      </p:sp>
+      <p:sp>
+        <p:nvSpPr>
+          <p:cNvPr id="14" name="TextBox 13"/>
           <p:cNvSpPr txBox="1"/>
           <p:nvPr/>
         </p:nvSpPr>
         <p:spPr>
           <a:xfrm>
-            <a:off x="822960" y="4846320"/>
-            <a:ext cx="10515600" cy="1188720"/>
+            <a:off x="8244839" y="2743200"/>
+            <a:ext cx="2865120" cy="3017520"/>
           </a:xfrm>
           <a:prstGeom prst="rect">
             <a:avLst/>
@@ -10131,19 +10496,19 @@
           </a:bodyPr>
           <a:lstStyle/>
           <a:p>
-            <a:pPr algn="ctr">
-              <a:spcAft>
-                <a:spcPts val="900"/>
-              </a:spcAft>
-            </a:pPr>
-            <a:r>
-              <a:rPr sz="2000" b="0" i="1">
-                <a:solidFill>
-                  <a:srgbClr val="5D5A54"/>
-                </a:solidFill>
-                <a:latin typeface="Source Serif 4"/>
-              </a:rPr>
-              <a:t>The knowledge is still in there. The part that pulls it up is busy.</a:t>
+            <a:pPr algn="l">
+              <a:spcAft>
+                <a:spcPts val="810"/>
+              </a:spcAft>
+            </a:pPr>
+            <a:r>
+              <a:rPr sz="1800" b="0" i="0">
+                <a:solidFill>
+                  <a:srgbClr val="1C1B19"/>
+                </a:solidFill>
+                <a:latin typeface="Source Serif 4"/>
+              </a:rPr>
+              <a:t>Her family moved so she could go to this school. She feels her biology final belongs to them too. It's midnight and she can't stop studying.</a:t>
             </a:r>
           </a:p>
         </p:txBody>
@@ -10252,7 +10617,7 @@
                 </a:solidFill>
                 <a:latin typeface="Inter Tight"/>
               </a:rPr>
-              <a:t>THE COUNTERINTUITIVE PART</a:t>
+              <a:t>TRY IT</a:t>
             </a:r>
           </a:p>
         </p:txBody>
@@ -10298,14 +10663,58 @@
       </p:sp>
       <p:sp>
         <p:nvSpPr>
-          <p:cNvPr id="5" name="TextBox 4"/>
+          <p:cNvPr id="5" name="Rectangle 4"/>
+          <p:cNvSpPr/>
+          <p:nvPr/>
+        </p:nvSpPr>
+        <p:spPr>
+          <a:xfrm>
+            <a:off x="822960" y="1371600"/>
+            <a:ext cx="73152" cy="3566160"/>
+          </a:xfrm>
+          <a:prstGeom prst="rect">
+            <a:avLst/>
+          </a:prstGeom>
+          <a:solidFill>
+            <a:srgbClr val="F47B20"/>
+          </a:solidFill>
+          <a:ln>
+            <a:noFill/>
+          </a:ln>
+          <a:effectLst/>
+        </p:spPr>
+        <p:style>
+          <a:lnRef idx="1">
+            <a:schemeClr val="accent1"/>
+          </a:lnRef>
+          <a:fillRef idx="3">
+            <a:schemeClr val="accent1"/>
+          </a:fillRef>
+          <a:effectRef idx="2">
+            <a:schemeClr val="accent1"/>
+          </a:effectRef>
+          <a:fontRef idx="minor">
+            <a:schemeClr val="lt1"/>
+          </a:fontRef>
+        </p:style>
+        <p:txBody>
+          <a:bodyPr rtlCol="0" anchor="ctr"/>
+          <a:lstStyle/>
+          <a:p>
+            <a:pPr algn="ctr"/>
+          </a:p>
+        </p:txBody>
+      </p:sp>
+      <p:sp>
+        <p:nvSpPr>
+          <p:cNvPr id="6" name="TextBox 5"/>
           <p:cNvSpPr txBox="1"/>
           <p:nvPr/>
         </p:nvSpPr>
         <p:spPr>
           <a:xfrm>
-            <a:off x="822960" y="1463040"/>
-            <a:ext cx="10515600" cy="3291840"/>
+            <a:off x="1188720" y="1371600"/>
+            <a:ext cx="10058400" cy="3566160"/>
           </a:xfrm>
           <a:prstGeom prst="rect">
             <a:avLst/>
@@ -10320,31 +10729,31 @@
           <a:p>
             <a:pPr algn="l">
               <a:spcAft>
-                <a:spcPts val="2070"/>
-              </a:spcAft>
-            </a:pPr>
-            <a:r>
-              <a:rPr sz="4600" b="1" i="0">
+                <a:spcPts val="1800"/>
+              </a:spcAft>
+            </a:pPr>
+            <a:r>
+              <a:rPr sz="4000" b="0" i="1">
                 <a:solidFill>
                   <a:srgbClr val="1C1B19"/>
                 </a:solidFill>
                 <a:latin typeface="Source Serif 4"/>
               </a:rPr>
-              <a:t>Aim for ready, not calm.</a:t>
-            </a:r>
-          </a:p>
-        </p:txBody>
-      </p:sp>
-      <p:sp>
-        <p:nvSpPr>
-          <p:cNvPr id="6" name="TextBox 5"/>
+              <a:t>What are you worried will happen on your next test, and why?</a:t>
+            </a:r>
+          </a:p>
+        </p:txBody>
+      </p:sp>
+      <p:sp>
+        <p:nvSpPr>
+          <p:cNvPr id="7" name="TextBox 6"/>
           <p:cNvSpPr txBox="1"/>
           <p:nvPr/>
         </p:nvSpPr>
         <p:spPr>
           <a:xfrm>
-            <a:off x="822960" y="4846320"/>
-            <a:ext cx="10515600" cy="1097280"/>
+            <a:off x="1188720" y="5120640"/>
+            <a:ext cx="10058400" cy="914400"/>
           </a:xfrm>
           <a:prstGeom prst="rect">
             <a:avLst/>
@@ -10359,17 +10768,17 @@
           <a:p>
             <a:pPr algn="l">
               <a:spcAft>
-                <a:spcPts val="990"/>
-              </a:spcAft>
-            </a:pPr>
-            <a:r>
-              <a:rPr sz="2200" b="0" i="1">
+                <a:spcPts val="810"/>
+              </a:spcAft>
+            </a:pPr>
+            <a:r>
+              <a:rPr sz="1800" b="0" i="0">
                 <a:solidFill>
                   <a:srgbClr val="5D5A54"/>
                 </a:solidFill>
-                <a:latin typeface="Source Serif 4"/>
-              </a:rPr>
-              <a:t>People who told themselves "I am excited" did better than people told to calm down. Same heartbeat, different instructions.</a:t>
+                <a:latin typeface="Inter Tight"/>
+              </a:rPr>
+              <a:t>Write without stopping. Don't edit. Nobody reads it.</a:t>
             </a:r>
           </a:p>
         </p:txBody>

--- a/decks/when-your-mind-goes-blank-lesson-v2.pptx
+++ b/decks/when-your-mind-goes-blank-lesson-v2.pptx
@@ -7125,6 +7125,45 @@
                 <a:latin typeface="Inter Tight"/>
               </a:rPr>
               <a:t>Beaver Upper School · Counseling</a:t>
+            </a:r>
+          </a:p>
+        </p:txBody>
+      </p:sp>
+      <p:sp>
+        <p:nvSpPr>
+          <p:cNvPr id="8" name="TextBox 7"/>
+          <p:cNvSpPr txBox="1"/>
+          <p:nvPr/>
+        </p:nvSpPr>
+        <p:spPr>
+          <a:xfrm>
+            <a:off x="6766560" y="5897880"/>
+            <a:ext cx="4846320" cy="640080"/>
+          </a:xfrm>
+          <a:prstGeom prst="rect">
+            <a:avLst/>
+          </a:prstGeom>
+          <a:noFill/>
+        </p:spPr>
+        <p:txBody>
+          <a:bodyPr wrap="square" anchor="t" lIns="0" rIns="0" tIns="0" bIns="0">
+            <a:spAutoFit/>
+          </a:bodyPr>
+          <a:lstStyle/>
+          <a:p>
+            <a:pPr algn="r">
+              <a:spcAft>
+                <a:spcPts val="495"/>
+              </a:spcAft>
+            </a:pPr>
+            <a:r>
+              <a:rPr sz="1100" b="0" i="0">
+                <a:solidFill>
+                  <a:srgbClr val="E8E4DA"/>
+                </a:solidFill>
+                <a:latin typeface="Inter Tight"/>
+              </a:rPr>
+              <a:t>Written by Dr. Rick Wilson, with AI-assisted drafting. Every lesson is reviewed and edited by Dr. Wilson.</a:t>
             </a:r>
           </a:p>
         </p:txBody>
